--- a/output/wordlabs-open-3day.pptx
+++ b/output/wordlabs-open-3day.pptx
@@ -4240,7 +4240,7 @@
                 <a:ea typeface="Calibri" pitchFamily="34" charset="-122"/>
                 <a:cs typeface="Calibri" pitchFamily="34" charset="-120"/>
               </a:rPr>
-              <a:t>"not closed or blocked"</a:t>
+              <a:t>"not closed, accessible, uncovered"</a:t>
             </a:r>
             <a:endParaRPr lang="en-US" sz="2200" dirty="0"/>
           </a:p>
@@ -5288,7 +5288,7 @@
                 <a:ea typeface="Calibri" pitchFamily="34" charset="-122"/>
                 <a:cs typeface="Calibri" pitchFamily="34" charset="-120"/>
               </a:rPr>
-              <a:t>Word Labs  •  wordlabs.app  •  Root: 'open' = not closed or blocked</a:t>
+              <a:t>Word Labs  •  wordlabs.app  •  Root: 'open' = not closed, accessible, uncovered</a:t>
             </a:r>
             <a:endParaRPr lang="en-US" sz="800" dirty="0"/>
           </a:p>
@@ -5622,7 +5622,7 @@
                 <a:ea typeface="Trebuchet MS" pitchFamily="34" charset="-122"/>
                 <a:cs typeface="Trebuchet MS" pitchFamily="34" charset="-120"/>
               </a:rPr>
-              <a:t>0</a:t>
+              <a:t>1</a:t>
             </a:r>
             <a:pPr algn="ctr" indent="0" marL="0">
               <a:buNone/>
@@ -5928,7 +5928,7 @@
                 <a:ea typeface="Calibri" pitchFamily="34" charset="-122"/>
                 <a:cs typeface="Calibri" pitchFamily="34" charset="-120"/>
               </a:rPr>
-              <a:t>Word Labs  •  wordlabs.app  •  Root: 'open' = not closed or blocked</a:t>
+              <a:t>Word Labs  •  wordlabs.app  •  Root: 'open' = not closed, accessible, uncovered</a:t>
             </a:r>
             <a:endParaRPr lang="en-US" sz="800" dirty="0"/>
           </a:p>
@@ -6040,7 +6040,7 @@
                 <a:ea typeface="Calibri" pitchFamily="34" charset="-122"/>
                 <a:cs typeface="Calibri" pitchFamily="34" charset="-120"/>
               </a:rPr>
-              <a:t>The shop owner spoke </a:t>
+              <a:t>The </a:t>
             </a:r>
             <a:pPr algn="l" indent="0" marL="0">
               <a:buNone/>
@@ -6057,7 +6057,7 @@
                 <a:ea typeface="Calibri" pitchFamily="34" charset="-122"/>
                 <a:cs typeface="Calibri" pitchFamily="34" charset="-120"/>
               </a:rPr>
-              <a:t>openly</a:t>
+              <a:t>reopening</a:t>
             </a:r>
             <a:pPr algn="l" indent="0" marL="0">
               <a:buNone/>
@@ -6071,7 +6071,7 @@
                 <a:ea typeface="Calibri" pitchFamily="34" charset="-122"/>
                 <a:cs typeface="Calibri" pitchFamily="34" charset="-120"/>
               </a:rPr>
-              <a:t> about the </a:t>
+              <a:t> of the new sports centre was exciting, and everyone arrived </a:t>
             </a:r>
             <a:pPr algn="l" indent="0" marL="0">
               <a:buNone/>
@@ -6088,7 +6088,7 @@
                 <a:ea typeface="Calibri" pitchFamily="34" charset="-122"/>
                 <a:cs typeface="Calibri" pitchFamily="34" charset="-120"/>
               </a:rPr>
-              <a:t>reopening</a:t>
+              <a:t>openly</a:t>
             </a:r>
             <a:pPr algn="l" indent="0" marL="0">
               <a:buNone/>
@@ -6102,7 +6102,7 @@
                 <a:ea typeface="Calibri" pitchFamily="34" charset="-122"/>
                 <a:cs typeface="Calibri" pitchFamily="34" charset="-120"/>
               </a:rPr>
-              <a:t> of the store after repairs.</a:t>
+              <a:t> curious about the facilities.</a:t>
             </a:r>
             <a:endParaRPr lang="en-US" sz="1800" dirty="0"/>
           </a:p>
@@ -6257,7 +6257,7 @@
                 <a:ea typeface="Trebuchet MS" pitchFamily="34" charset="-122"/>
                 <a:cs typeface="Trebuchet MS" pitchFamily="34" charset="-120"/>
               </a:rPr>
-              <a:t>openly</a:t>
+              <a:t>reopening</a:t>
             </a:r>
             <a:endParaRPr lang="en-US" sz="1400" dirty="0"/>
           </a:p>
@@ -6385,7 +6385,7 @@
                 <a:ea typeface="Trebuchet MS" pitchFamily="34" charset="-122"/>
                 <a:cs typeface="Trebuchet MS" pitchFamily="34" charset="-120"/>
               </a:rPr>
-              <a:t>reopening</a:t>
+              <a:t>openly</a:t>
             </a:r>
             <a:endParaRPr lang="en-US" sz="1400" dirty="0"/>
           </a:p>
@@ -6716,7 +6716,7 @@
                 <a:ea typeface="Calibri" pitchFamily="34" charset="-122"/>
                 <a:cs typeface="Calibri" pitchFamily="34" charset="-120"/>
               </a:rPr>
-              <a:t>Word Labs  •  wordlabs.app  •  Root: 'open' = not closed or blocked</a:t>
+              <a:t>Word Labs  •  wordlabs.app  •  Root: 'open' = not closed, accessible, uncovered</a:t>
             </a:r>
             <a:endParaRPr lang="en-US" sz="800" dirty="0"/>
           </a:p>
@@ -6855,7 +6855,7 @@
                 <a:ea typeface="Trebuchet MS" pitchFamily="34" charset="-122"/>
                 <a:cs typeface="Trebuchet MS" pitchFamily="34" charset="-120"/>
               </a:rPr>
-              <a:t>openly</a:t>
+              <a:t>reopening</a:t>
             </a:r>
             <a:endParaRPr lang="en-US" sz="2800" dirty="0"/>
           </a:p>
@@ -7543,7 +7543,7 @@
                 <a:ea typeface="Calibri" pitchFamily="34" charset="-122"/>
                 <a:cs typeface="Calibri" pitchFamily="34" charset="-120"/>
               </a:rPr>
-              <a:t>Word Labs  •  wordlabs.app  •  Root: 'open' = not closed or blocked</a:t>
+              <a:t>Word Labs  •  wordlabs.app  •  Root: 'open' = not closed, accessible, uncovered</a:t>
             </a:r>
             <a:endParaRPr lang="en-US" sz="800" dirty="0"/>
           </a:p>
@@ -7682,7 +7682,7 @@
                 <a:ea typeface="Trebuchet MS" pitchFamily="34" charset="-122"/>
                 <a:cs typeface="Trebuchet MS" pitchFamily="34" charset="-120"/>
               </a:rPr>
-              <a:t>openly</a:t>
+              <a:t>reopening</a:t>
             </a:r>
             <a:endParaRPr lang="en-US" sz="2800" dirty="0"/>
           </a:p>
@@ -7762,7 +7762,7 @@
         </p:nvSpPr>
         <p:spPr>
           <a:xfrm>
-            <a:off x="2938272" y="2258568"/>
+            <a:off x="2221992" y="2258568"/>
             <a:ext cx="1828800" cy="292608"/>
           </a:xfrm>
           <a:prstGeom prst="rect">
@@ -7771,11 +7771,11 @@
             </a:avLst>
           </a:prstGeom>
           <a:solidFill>
-            <a:srgbClr val="CCFBF1"/>
+            <a:srgbClr val="DDD6FE"/>
           </a:solidFill>
           <a:ln w="19050">
             <a:solidFill>
-              <a:srgbClr val="0D9488"/>
+              <a:srgbClr val="7C3AED"/>
             </a:solidFill>
             <a:prstDash val="solid"/>
           </a:ln>
@@ -7796,7 +7796,7 @@
         </p:nvSpPr>
         <p:spPr>
           <a:xfrm>
-            <a:off x="2938272" y="2258568"/>
+            <a:off x="2221992" y="2258568"/>
             <a:ext cx="1828800" cy="292608"/>
           </a:xfrm>
           <a:prstGeom prst="rect">
@@ -7815,13 +7815,13 @@
             <a:r>
               <a:rPr lang="en-US" sz="1300" b="1" dirty="0">
                 <a:solidFill>
-                  <a:srgbClr val="0F766E"/>
+                  <a:srgbClr val="4C1D95"/>
                 </a:solidFill>
                 <a:latin typeface="Trebuchet MS" pitchFamily="34" charset="0"/>
                 <a:ea typeface="Trebuchet MS" pitchFamily="34" charset="-122"/>
                 <a:cs typeface="Trebuchet MS" pitchFamily="34" charset="-120"/>
               </a:rPr>
-              <a:t>open</a:t>
+              <a:t>re</a:t>
             </a:r>
             <a:endParaRPr lang="en-US" sz="1300" dirty="0"/>
           </a:p>
@@ -7835,7 +7835,7 @@
         </p:nvSpPr>
         <p:spPr>
           <a:xfrm>
-            <a:off x="2938272" y="2569464"/>
+            <a:off x="2221992" y="2569464"/>
             <a:ext cx="1828800" cy="201168"/>
           </a:xfrm>
           <a:prstGeom prst="rect">
@@ -7860,7 +7860,7 @@
                 <a:ea typeface="Calibri" pitchFamily="34" charset="-122"/>
                 <a:cs typeface="Calibri" pitchFamily="34" charset="-120"/>
               </a:rPr>
-              <a:t>not closed; honest</a:t>
+              <a:t>again</a:t>
             </a:r>
             <a:endParaRPr lang="en-US" sz="850" dirty="0"/>
           </a:p>
@@ -7874,7 +7874,7 @@
         </p:nvSpPr>
         <p:spPr>
           <a:xfrm>
-            <a:off x="5803392" y="2258568"/>
+            <a:off x="4370832" y="2258568"/>
             <a:ext cx="1828800" cy="292608"/>
           </a:xfrm>
           <a:prstGeom prst="rect">
@@ -7883,11 +7883,11 @@
             </a:avLst>
           </a:prstGeom>
           <a:solidFill>
-            <a:srgbClr val="FCE7F3"/>
+            <a:srgbClr val="CCFBF1"/>
           </a:solidFill>
           <a:ln w="19050">
             <a:solidFill>
-              <a:srgbClr val="DB2777"/>
+              <a:srgbClr val="0D9488"/>
             </a:solidFill>
             <a:prstDash val="solid"/>
           </a:ln>
@@ -7908,7 +7908,7 @@
         </p:nvSpPr>
         <p:spPr>
           <a:xfrm>
-            <a:off x="5803392" y="2258568"/>
+            <a:off x="4370832" y="2258568"/>
             <a:ext cx="1828800" cy="292608"/>
           </a:xfrm>
           <a:prstGeom prst="rect">
@@ -7927,13 +7927,13 @@
             <a:r>
               <a:rPr lang="en-US" sz="1300" b="1" dirty="0">
                 <a:solidFill>
-                  <a:srgbClr val="9D174D"/>
+                  <a:srgbClr val="0F766E"/>
                 </a:solidFill>
                 <a:latin typeface="Trebuchet MS" pitchFamily="34" charset="0"/>
                 <a:ea typeface="Trebuchet MS" pitchFamily="34" charset="-122"/>
                 <a:cs typeface="Trebuchet MS" pitchFamily="34" charset="-120"/>
               </a:rPr>
-              <a:t>ly</a:t>
+              <a:t>open</a:t>
             </a:r>
             <a:endParaRPr lang="en-US" sz="1300" dirty="0"/>
           </a:p>
@@ -7947,7 +7947,7 @@
         </p:nvSpPr>
         <p:spPr>
           <a:xfrm>
-            <a:off x="5803392" y="2569464"/>
+            <a:off x="4370832" y="2569464"/>
             <a:ext cx="1828800" cy="201168"/>
           </a:xfrm>
           <a:prstGeom prst="rect">
@@ -7972,7 +7972,7 @@
                 <a:ea typeface="Calibri" pitchFamily="34" charset="-122"/>
                 <a:cs typeface="Calibri" pitchFamily="34" charset="-120"/>
               </a:rPr>
-              <a:t>in a certain way</a:t>
+              <a:t>not closed, accessible</a:t>
             </a:r>
             <a:endParaRPr lang="en-US" sz="850" dirty="0"/>
           </a:p>
@@ -7981,6 +7981,118 @@
       <p:sp>
         <p:nvSpPr>
           <p:cNvPr id="22" name="Shape 20"/>
+          <p:cNvSpPr/>
+          <p:nvPr/>
+        </p:nvSpPr>
+        <p:spPr>
+          <a:xfrm>
+            <a:off x="6519672" y="2258568"/>
+            <a:ext cx="1828800" cy="292608"/>
+          </a:xfrm>
+          <a:prstGeom prst="rect">
+            <a:avLst>
+              <a:gd name="adj" fmla="val 25000"/>
+            </a:avLst>
+          </a:prstGeom>
+          <a:solidFill>
+            <a:srgbClr val="FCE7F3"/>
+          </a:solidFill>
+          <a:ln w="19050">
+            <a:solidFill>
+              <a:srgbClr val="DB2777"/>
+            </a:solidFill>
+            <a:prstDash val="solid"/>
+          </a:ln>
+          <a:effectLst>
+            <a:outerShdw sx="100000" sy="100000" kx="0" ky="0" algn="bl" rotWithShape="0" blurRad="101600" dist="38100" dir="8100000">
+              <a:srgbClr val="000000">
+                <a:alpha val="12000"/>
+              </a:srgbClr>
+            </a:outerShdw>
+          </a:effectLst>
+        </p:spPr>
+      </p:sp>
+      <p:sp>
+        <p:nvSpPr>
+          <p:cNvPr id="23" name="Text 21"/>
+          <p:cNvSpPr/>
+          <p:nvPr/>
+        </p:nvSpPr>
+        <p:spPr>
+          <a:xfrm>
+            <a:off x="6519672" y="2258568"/>
+            <a:ext cx="1828800" cy="292608"/>
+          </a:xfrm>
+          <a:prstGeom prst="rect">
+            <a:avLst/>
+          </a:prstGeom>
+          <a:noFill/>
+          <a:ln/>
+        </p:spPr>
+        <p:txBody>
+          <a:bodyPr wrap="square" lIns="0" tIns="0" rIns="0" bIns="0" rtlCol="0" anchor="ctr"/>
+          <a:lstStyle/>
+          <a:p>
+            <a:pPr algn="ctr" indent="0" marL="0">
+              <a:buNone/>
+            </a:pPr>
+            <a:r>
+              <a:rPr lang="en-US" sz="1300" b="1" dirty="0">
+                <a:solidFill>
+                  <a:srgbClr val="9D174D"/>
+                </a:solidFill>
+                <a:latin typeface="Trebuchet MS" pitchFamily="34" charset="0"/>
+                <a:ea typeface="Trebuchet MS" pitchFamily="34" charset="-122"/>
+                <a:cs typeface="Trebuchet MS" pitchFamily="34" charset="-120"/>
+              </a:rPr>
+              <a:t>ing</a:t>
+            </a:r>
+            <a:endParaRPr lang="en-US" sz="1300" dirty="0"/>
+          </a:p>
+        </p:txBody>
+      </p:sp>
+      <p:sp>
+        <p:nvSpPr>
+          <p:cNvPr id="24" name="Text 22"/>
+          <p:cNvSpPr/>
+          <p:nvPr/>
+        </p:nvSpPr>
+        <p:spPr>
+          <a:xfrm>
+            <a:off x="6519672" y="2569464"/>
+            <a:ext cx="1828800" cy="201168"/>
+          </a:xfrm>
+          <a:prstGeom prst="rect">
+            <a:avLst/>
+          </a:prstGeom>
+          <a:noFill/>
+          <a:ln/>
+        </p:spPr>
+        <p:txBody>
+          <a:bodyPr wrap="square" lIns="0" tIns="0" rIns="0" bIns="0" rtlCol="0" anchor="t"/>
+          <a:lstStyle/>
+          <a:p>
+            <a:pPr algn="ctr" indent="0" marL="0">
+              <a:buNone/>
+            </a:pPr>
+            <a:r>
+              <a:rPr lang="en-US" sz="850" dirty="0">
+                <a:solidFill>
+                  <a:srgbClr val="475569"/>
+                </a:solidFill>
+                <a:latin typeface="Calibri" pitchFamily="34" charset="0"/>
+                <a:ea typeface="Calibri" pitchFamily="34" charset="-122"/>
+                <a:cs typeface="Calibri" pitchFamily="34" charset="-120"/>
+              </a:rPr>
+              <a:t>action in progress</a:t>
+            </a:r>
+            <a:endParaRPr lang="en-US" sz="850" dirty="0"/>
+          </a:p>
+        </p:txBody>
+      </p:sp>
+      <p:sp>
+        <p:nvSpPr>
+          <p:cNvPr id="25" name="Shape 23"/>
           <p:cNvSpPr/>
           <p:nvPr/>
         </p:nvSpPr>
@@ -8007,7 +8119,7 @@
       </p:sp>
       <p:sp>
         <p:nvSpPr>
-          <p:cNvPr id="23" name="Text 21"/>
+          <p:cNvPr id="26" name="Text 24"/>
           <p:cNvSpPr/>
           <p:nvPr/>
         </p:nvSpPr>
@@ -8046,7 +8158,7 @@
       </p:sp>
       <p:sp>
         <p:nvSpPr>
-          <p:cNvPr id="24" name="Shape 22"/>
+          <p:cNvPr id="27" name="Shape 25"/>
           <p:cNvSpPr/>
           <p:nvPr/>
         </p:nvSpPr>
@@ -8073,7 +8185,7 @@
       </p:sp>
       <p:sp>
         <p:nvSpPr>
-          <p:cNvPr id="25" name="Text 23"/>
+          <p:cNvPr id="28" name="Text 26"/>
           <p:cNvSpPr/>
           <p:nvPr/>
         </p:nvSpPr>
@@ -8112,7 +8224,7 @@
       </p:sp>
       <p:sp>
         <p:nvSpPr>
-          <p:cNvPr id="26" name="Shape 24"/>
+          <p:cNvPr id="29" name="Shape 27"/>
           <p:cNvSpPr/>
           <p:nvPr/>
         </p:nvSpPr>
@@ -8139,7 +8251,7 @@
       </p:sp>
       <p:sp>
         <p:nvSpPr>
-          <p:cNvPr id="27" name="Text 25"/>
+          <p:cNvPr id="30" name="Text 28"/>
           <p:cNvSpPr/>
           <p:nvPr/>
         </p:nvSpPr>
@@ -8178,7 +8290,7 @@
       </p:sp>
       <p:sp>
         <p:nvSpPr>
-          <p:cNvPr id="28" name="Shape 26"/>
+          <p:cNvPr id="31" name="Shape 29"/>
           <p:cNvSpPr/>
           <p:nvPr/>
         </p:nvSpPr>
@@ -8205,7 +8317,7 @@
       </p:sp>
       <p:sp>
         <p:nvSpPr>
-          <p:cNvPr id="29" name="Text 27"/>
+          <p:cNvPr id="32" name="Text 30"/>
           <p:cNvSpPr/>
           <p:nvPr/>
         </p:nvSpPr>
@@ -8528,7 +8640,7 @@
                 <a:ea typeface="Calibri" pitchFamily="34" charset="-122"/>
                 <a:cs typeface="Calibri" pitchFamily="34" charset="-120"/>
               </a:rPr>
-              <a:t>Word Labs  •  wordlabs.app  •  Root: 'open' = not closed or blocked</a:t>
+              <a:t>Word Labs  •  wordlabs.app  •  Root: 'open' = not closed, accessible, uncovered</a:t>
             </a:r>
             <a:endParaRPr lang="en-US" sz="800" dirty="0"/>
           </a:p>
@@ -8667,7 +8779,7 @@
                 <a:ea typeface="Trebuchet MS" pitchFamily="34" charset="-122"/>
                 <a:cs typeface="Trebuchet MS" pitchFamily="34" charset="-120"/>
               </a:rPr>
-              <a:t>openly</a:t>
+              <a:t>reopening</a:t>
             </a:r>
             <a:endParaRPr lang="en-US" sz="2800" dirty="0"/>
           </a:p>
@@ -8747,7 +8859,7 @@
         </p:nvSpPr>
         <p:spPr>
           <a:xfrm>
-            <a:off x="2938272" y="2258568"/>
+            <a:off x="2221992" y="2258568"/>
             <a:ext cx="1828800" cy="292608"/>
           </a:xfrm>
           <a:prstGeom prst="rect">
@@ -8756,11 +8868,11 @@
             </a:avLst>
           </a:prstGeom>
           <a:solidFill>
-            <a:srgbClr val="CCFBF1"/>
+            <a:srgbClr val="DDD6FE"/>
           </a:solidFill>
           <a:ln w="19050">
             <a:solidFill>
-              <a:srgbClr val="0D9488"/>
+              <a:srgbClr val="7C3AED"/>
             </a:solidFill>
             <a:prstDash val="solid"/>
           </a:ln>
@@ -8781,7 +8893,7 @@
         </p:nvSpPr>
         <p:spPr>
           <a:xfrm>
-            <a:off x="2938272" y="2258568"/>
+            <a:off x="2221992" y="2258568"/>
             <a:ext cx="1828800" cy="292608"/>
           </a:xfrm>
           <a:prstGeom prst="rect">
@@ -8800,13 +8912,13 @@
             <a:r>
               <a:rPr lang="en-US" sz="1300" b="1" dirty="0">
                 <a:solidFill>
-                  <a:srgbClr val="0F766E"/>
+                  <a:srgbClr val="4C1D95"/>
                 </a:solidFill>
                 <a:latin typeface="Trebuchet MS" pitchFamily="34" charset="0"/>
                 <a:ea typeface="Trebuchet MS" pitchFamily="34" charset="-122"/>
                 <a:cs typeface="Trebuchet MS" pitchFamily="34" charset="-120"/>
               </a:rPr>
-              <a:t>open</a:t>
+              <a:t>re</a:t>
             </a:r>
             <a:endParaRPr lang="en-US" sz="1300" dirty="0"/>
           </a:p>
@@ -8820,7 +8932,7 @@
         </p:nvSpPr>
         <p:spPr>
           <a:xfrm>
-            <a:off x="2938272" y="2569464"/>
+            <a:off x="2221992" y="2569464"/>
             <a:ext cx="1828800" cy="201168"/>
           </a:xfrm>
           <a:prstGeom prst="rect">
@@ -8845,7 +8957,7 @@
                 <a:ea typeface="Calibri" pitchFamily="34" charset="-122"/>
                 <a:cs typeface="Calibri" pitchFamily="34" charset="-120"/>
               </a:rPr>
-              <a:t>not closed; honest</a:t>
+              <a:t>again</a:t>
             </a:r>
             <a:endParaRPr lang="en-US" sz="850" dirty="0"/>
           </a:p>
@@ -8859,7 +8971,7 @@
         </p:nvSpPr>
         <p:spPr>
           <a:xfrm>
-            <a:off x="5803392" y="2258568"/>
+            <a:off x="4370832" y="2258568"/>
             <a:ext cx="1828800" cy="292608"/>
           </a:xfrm>
           <a:prstGeom prst="rect">
@@ -8868,11 +8980,11 @@
             </a:avLst>
           </a:prstGeom>
           <a:solidFill>
-            <a:srgbClr val="FCE7F3"/>
+            <a:srgbClr val="CCFBF1"/>
           </a:solidFill>
           <a:ln w="19050">
             <a:solidFill>
-              <a:srgbClr val="DB2777"/>
+              <a:srgbClr val="0D9488"/>
             </a:solidFill>
             <a:prstDash val="solid"/>
           </a:ln>
@@ -8893,7 +9005,7 @@
         </p:nvSpPr>
         <p:spPr>
           <a:xfrm>
-            <a:off x="5803392" y="2258568"/>
+            <a:off x="4370832" y="2258568"/>
             <a:ext cx="1828800" cy="292608"/>
           </a:xfrm>
           <a:prstGeom prst="rect">
@@ -8912,13 +9024,13 @@
             <a:r>
               <a:rPr lang="en-US" sz="1300" b="1" dirty="0">
                 <a:solidFill>
-                  <a:srgbClr val="9D174D"/>
+                  <a:srgbClr val="0F766E"/>
                 </a:solidFill>
                 <a:latin typeface="Trebuchet MS" pitchFamily="34" charset="0"/>
                 <a:ea typeface="Trebuchet MS" pitchFamily="34" charset="-122"/>
                 <a:cs typeface="Trebuchet MS" pitchFamily="34" charset="-120"/>
               </a:rPr>
-              <a:t>ly</a:t>
+              <a:t>open</a:t>
             </a:r>
             <a:endParaRPr lang="en-US" sz="1300" dirty="0"/>
           </a:p>
@@ -8932,7 +9044,7 @@
         </p:nvSpPr>
         <p:spPr>
           <a:xfrm>
-            <a:off x="5803392" y="2569464"/>
+            <a:off x="4370832" y="2569464"/>
             <a:ext cx="1828800" cy="201168"/>
           </a:xfrm>
           <a:prstGeom prst="rect">
@@ -8957,7 +9069,7 @@
                 <a:ea typeface="Calibri" pitchFamily="34" charset="-122"/>
                 <a:cs typeface="Calibri" pitchFamily="34" charset="-120"/>
               </a:rPr>
-              <a:t>in a certain way</a:t>
+              <a:t>not closed, accessible</a:t>
             </a:r>
             <a:endParaRPr lang="en-US" sz="850" dirty="0"/>
           </a:p>
@@ -8966,6 +9078,118 @@
       <p:sp>
         <p:nvSpPr>
           <p:cNvPr id="22" name="Shape 20"/>
+          <p:cNvSpPr/>
+          <p:nvPr/>
+        </p:nvSpPr>
+        <p:spPr>
+          <a:xfrm>
+            <a:off x="6519672" y="2258568"/>
+            <a:ext cx="1828800" cy="292608"/>
+          </a:xfrm>
+          <a:prstGeom prst="rect">
+            <a:avLst>
+              <a:gd name="adj" fmla="val 25000"/>
+            </a:avLst>
+          </a:prstGeom>
+          <a:solidFill>
+            <a:srgbClr val="FCE7F3"/>
+          </a:solidFill>
+          <a:ln w="19050">
+            <a:solidFill>
+              <a:srgbClr val="DB2777"/>
+            </a:solidFill>
+            <a:prstDash val="solid"/>
+          </a:ln>
+          <a:effectLst>
+            <a:outerShdw sx="100000" sy="100000" kx="0" ky="0" algn="bl" rotWithShape="0" blurRad="101600" dist="38100" dir="8100000">
+              <a:srgbClr val="000000">
+                <a:alpha val="12000"/>
+              </a:srgbClr>
+            </a:outerShdw>
+          </a:effectLst>
+        </p:spPr>
+      </p:sp>
+      <p:sp>
+        <p:nvSpPr>
+          <p:cNvPr id="23" name="Text 21"/>
+          <p:cNvSpPr/>
+          <p:nvPr/>
+        </p:nvSpPr>
+        <p:spPr>
+          <a:xfrm>
+            <a:off x="6519672" y="2258568"/>
+            <a:ext cx="1828800" cy="292608"/>
+          </a:xfrm>
+          <a:prstGeom prst="rect">
+            <a:avLst/>
+          </a:prstGeom>
+          <a:noFill/>
+          <a:ln/>
+        </p:spPr>
+        <p:txBody>
+          <a:bodyPr wrap="square" lIns="0" tIns="0" rIns="0" bIns="0" rtlCol="0" anchor="ctr"/>
+          <a:lstStyle/>
+          <a:p>
+            <a:pPr algn="ctr" indent="0" marL="0">
+              <a:buNone/>
+            </a:pPr>
+            <a:r>
+              <a:rPr lang="en-US" sz="1300" b="1" dirty="0">
+                <a:solidFill>
+                  <a:srgbClr val="9D174D"/>
+                </a:solidFill>
+                <a:latin typeface="Trebuchet MS" pitchFamily="34" charset="0"/>
+                <a:ea typeface="Trebuchet MS" pitchFamily="34" charset="-122"/>
+                <a:cs typeface="Trebuchet MS" pitchFamily="34" charset="-120"/>
+              </a:rPr>
+              <a:t>ing</a:t>
+            </a:r>
+            <a:endParaRPr lang="en-US" sz="1300" dirty="0"/>
+          </a:p>
+        </p:txBody>
+      </p:sp>
+      <p:sp>
+        <p:nvSpPr>
+          <p:cNvPr id="24" name="Text 22"/>
+          <p:cNvSpPr/>
+          <p:nvPr/>
+        </p:nvSpPr>
+        <p:spPr>
+          <a:xfrm>
+            <a:off x="6519672" y="2569464"/>
+            <a:ext cx="1828800" cy="201168"/>
+          </a:xfrm>
+          <a:prstGeom prst="rect">
+            <a:avLst/>
+          </a:prstGeom>
+          <a:noFill/>
+          <a:ln/>
+        </p:spPr>
+        <p:txBody>
+          <a:bodyPr wrap="square" lIns="0" tIns="0" rIns="0" bIns="0" rtlCol="0" anchor="t"/>
+          <a:lstStyle/>
+          <a:p>
+            <a:pPr algn="ctr" indent="0" marL="0">
+              <a:buNone/>
+            </a:pPr>
+            <a:r>
+              <a:rPr lang="en-US" sz="850" dirty="0">
+                <a:solidFill>
+                  <a:srgbClr val="475569"/>
+                </a:solidFill>
+                <a:latin typeface="Calibri" pitchFamily="34" charset="0"/>
+                <a:ea typeface="Calibri" pitchFamily="34" charset="-122"/>
+                <a:cs typeface="Calibri" pitchFamily="34" charset="-120"/>
+              </a:rPr>
+              <a:t>action in progress</a:t>
+            </a:r>
+            <a:endParaRPr lang="en-US" sz="850" dirty="0"/>
+          </a:p>
+        </p:txBody>
+      </p:sp>
+      <p:sp>
+        <p:nvSpPr>
+          <p:cNvPr id="25" name="Shape 23"/>
           <p:cNvSpPr/>
           <p:nvPr/>
         </p:nvSpPr>
@@ -8992,7 +9216,7 @@
       </p:sp>
       <p:sp>
         <p:nvSpPr>
-          <p:cNvPr id="23" name="Text 21"/>
+          <p:cNvPr id="26" name="Text 24"/>
           <p:cNvSpPr/>
           <p:nvPr/>
         </p:nvSpPr>
@@ -9031,7 +9255,7 @@
       </p:sp>
       <p:sp>
         <p:nvSpPr>
-          <p:cNvPr id="24" name="Shape 22"/>
+          <p:cNvPr id="27" name="Shape 25"/>
           <p:cNvSpPr/>
           <p:nvPr/>
         </p:nvSpPr>
@@ -9058,14 +9282,14 @@
       </p:sp>
       <p:sp>
         <p:nvSpPr>
-          <p:cNvPr id="25" name="Shape 23"/>
-          <p:cNvSpPr/>
-          <p:nvPr/>
-        </p:nvSpPr>
-        <p:spPr>
-          <a:xfrm>
-            <a:off x="2313432" y="3364992"/>
-            <a:ext cx="1645920" cy="475488"/>
+          <p:cNvPr id="28" name="Shape 26"/>
+          <p:cNvSpPr/>
+          <p:nvPr/>
+        </p:nvSpPr>
+        <p:spPr>
+          <a:xfrm>
+            <a:off x="1975104" y="3364992"/>
+            <a:ext cx="1554480" cy="475488"/>
           </a:xfrm>
           <a:prstGeom prst="rect">
             <a:avLst>
@@ -9085,14 +9309,14 @@
       </p:sp>
       <p:sp>
         <p:nvSpPr>
-          <p:cNvPr id="26" name="Text 24"/>
-          <p:cNvSpPr/>
-          <p:nvPr/>
-        </p:nvSpPr>
-        <p:spPr>
-          <a:xfrm>
-            <a:off x="2313432" y="3364992"/>
-            <a:ext cx="1645920" cy="475488"/>
+          <p:cNvPr id="29" name="Text 27"/>
+          <p:cNvSpPr/>
+          <p:nvPr/>
+        </p:nvSpPr>
+        <p:spPr>
+          <a:xfrm>
+            <a:off x="1975104" y="3364992"/>
+            <a:ext cx="1554480" cy="475488"/>
           </a:xfrm>
           <a:prstGeom prst="rect">
             <a:avLst/>
@@ -9116,7 +9340,7 @@
                 <a:ea typeface="Trebuchet MS" pitchFamily="34" charset="-122"/>
                 <a:cs typeface="Trebuchet MS" pitchFamily="34" charset="-120"/>
               </a:rPr>
-              <a:t>o</a:t>
+              <a:t>re</a:t>
             </a:r>
             <a:endParaRPr lang="en-US" sz="1400" dirty="0"/>
           </a:p>
@@ -9124,14 +9348,14 @@
       </p:sp>
       <p:sp>
         <p:nvSpPr>
-          <p:cNvPr id="27" name="Text 25"/>
-          <p:cNvSpPr/>
-          <p:nvPr/>
-        </p:nvSpPr>
-        <p:spPr>
-          <a:xfrm>
-            <a:off x="3959352" y="3364992"/>
-            <a:ext cx="411480" cy="475488"/>
+          <p:cNvPr id="30" name="Text 28"/>
+          <p:cNvSpPr/>
+          <p:nvPr/>
+        </p:nvSpPr>
+        <p:spPr>
+          <a:xfrm>
+            <a:off x="3529584" y="3364992"/>
+            <a:ext cx="73152" cy="475488"/>
           </a:xfrm>
           <a:prstGeom prst="rect">
             <a:avLst/>
@@ -9163,14 +9387,14 @@
       </p:sp>
       <p:sp>
         <p:nvSpPr>
-          <p:cNvPr id="28" name="Shape 26"/>
-          <p:cNvSpPr/>
-          <p:nvPr/>
-        </p:nvSpPr>
-        <p:spPr>
-          <a:xfrm>
-            <a:off x="4370832" y="3364992"/>
-            <a:ext cx="1645920" cy="475488"/>
+          <p:cNvPr id="31" name="Shape 29"/>
+          <p:cNvSpPr/>
+          <p:nvPr/>
+        </p:nvSpPr>
+        <p:spPr>
+          <a:xfrm>
+            <a:off x="3602736" y="3364992"/>
+            <a:ext cx="1554480" cy="475488"/>
           </a:xfrm>
           <a:prstGeom prst="rect">
             <a:avLst>
@@ -9190,14 +9414,14 @@
       </p:sp>
       <p:sp>
         <p:nvSpPr>
-          <p:cNvPr id="29" name="Text 27"/>
-          <p:cNvSpPr/>
-          <p:nvPr/>
-        </p:nvSpPr>
-        <p:spPr>
-          <a:xfrm>
-            <a:off x="4370832" y="3364992"/>
-            <a:ext cx="1645920" cy="475488"/>
+          <p:cNvPr id="32" name="Text 30"/>
+          <p:cNvSpPr/>
+          <p:nvPr/>
+        </p:nvSpPr>
+        <p:spPr>
+          <a:xfrm>
+            <a:off x="3602736" y="3364992"/>
+            <a:ext cx="1554480" cy="475488"/>
           </a:xfrm>
           <a:prstGeom prst="rect">
             <a:avLst/>
@@ -9221,7 +9445,7 @@
                 <a:ea typeface="Trebuchet MS" pitchFamily="34" charset="-122"/>
                 <a:cs typeface="Trebuchet MS" pitchFamily="34" charset="-120"/>
               </a:rPr>
-              <a:t>pen</a:t>
+              <a:t>o</a:t>
             </a:r>
             <a:endParaRPr lang="en-US" sz="1400" dirty="0"/>
           </a:p>
@@ -9229,14 +9453,14 @@
       </p:sp>
       <p:sp>
         <p:nvSpPr>
-          <p:cNvPr id="30" name="Text 28"/>
-          <p:cNvSpPr/>
-          <p:nvPr/>
-        </p:nvSpPr>
-        <p:spPr>
-          <a:xfrm>
-            <a:off x="6016752" y="3364992"/>
-            <a:ext cx="411480" cy="475488"/>
+          <p:cNvPr id="33" name="Text 31"/>
+          <p:cNvSpPr/>
+          <p:nvPr/>
+        </p:nvSpPr>
+        <p:spPr>
+          <a:xfrm>
+            <a:off x="5157216" y="3364992"/>
+            <a:ext cx="73152" cy="475488"/>
           </a:xfrm>
           <a:prstGeom prst="rect">
             <a:avLst/>
@@ -9268,14 +9492,14 @@
       </p:sp>
       <p:sp>
         <p:nvSpPr>
-          <p:cNvPr id="31" name="Shape 29"/>
-          <p:cNvSpPr/>
-          <p:nvPr/>
-        </p:nvSpPr>
-        <p:spPr>
-          <a:xfrm>
-            <a:off x="6428232" y="3364992"/>
-            <a:ext cx="1645920" cy="475488"/>
+          <p:cNvPr id="34" name="Shape 32"/>
+          <p:cNvSpPr/>
+          <p:nvPr/>
+        </p:nvSpPr>
+        <p:spPr>
+          <a:xfrm>
+            <a:off x="5230368" y="3364992"/>
+            <a:ext cx="1554480" cy="475488"/>
           </a:xfrm>
           <a:prstGeom prst="rect">
             <a:avLst>
@@ -9295,14 +9519,14 @@
       </p:sp>
       <p:sp>
         <p:nvSpPr>
-          <p:cNvPr id="32" name="Text 30"/>
-          <p:cNvSpPr/>
-          <p:nvPr/>
-        </p:nvSpPr>
-        <p:spPr>
-          <a:xfrm>
-            <a:off x="6428232" y="3364992"/>
-            <a:ext cx="1645920" cy="475488"/>
+          <p:cNvPr id="35" name="Text 33"/>
+          <p:cNvSpPr/>
+          <p:nvPr/>
+        </p:nvSpPr>
+        <p:spPr>
+          <a:xfrm>
+            <a:off x="5230368" y="3364992"/>
+            <a:ext cx="1554480" cy="475488"/>
           </a:xfrm>
           <a:prstGeom prst="rect">
             <a:avLst/>
@@ -9326,7 +9550,7 @@
                 <a:ea typeface="Trebuchet MS" pitchFamily="34" charset="-122"/>
                 <a:cs typeface="Trebuchet MS" pitchFamily="34" charset="-120"/>
               </a:rPr>
-              <a:t>ly</a:t>
+              <a:t>pen</a:t>
             </a:r>
             <a:endParaRPr lang="en-US" sz="1400" dirty="0"/>
           </a:p>
@@ -9334,7 +9558,112 @@
       </p:sp>
       <p:sp>
         <p:nvSpPr>
-          <p:cNvPr id="33" name="Shape 31"/>
+          <p:cNvPr id="36" name="Text 34"/>
+          <p:cNvSpPr/>
+          <p:nvPr/>
+        </p:nvSpPr>
+        <p:spPr>
+          <a:xfrm>
+            <a:off x="6784848" y="3364992"/>
+            <a:ext cx="73152" cy="475488"/>
+          </a:xfrm>
+          <a:prstGeom prst="rect">
+            <a:avLst/>
+          </a:prstGeom>
+          <a:noFill/>
+          <a:ln/>
+        </p:spPr>
+        <p:txBody>
+          <a:bodyPr wrap="square" lIns="0" tIns="0" rIns="0" bIns="0" rtlCol="0" anchor="ctr"/>
+          <a:lstStyle/>
+          <a:p>
+            <a:pPr algn="ctr" indent="0" marL="0">
+              <a:buNone/>
+            </a:pPr>
+            <a:r>
+              <a:rPr lang="en-US" sz="1600" b="1" dirty="0">
+                <a:solidFill>
+                  <a:srgbClr val="0D9488"/>
+                </a:solidFill>
+                <a:latin typeface="Trebuchet MS" pitchFamily="34" charset="0"/>
+                <a:ea typeface="Trebuchet MS" pitchFamily="34" charset="-122"/>
+                <a:cs typeface="Trebuchet MS" pitchFamily="34" charset="-120"/>
+              </a:rPr>
+              <a:t>·</a:t>
+            </a:r>
+            <a:endParaRPr lang="en-US" sz="1600" dirty="0"/>
+          </a:p>
+        </p:txBody>
+      </p:sp>
+      <p:sp>
+        <p:nvSpPr>
+          <p:cNvPr id="37" name="Shape 35"/>
+          <p:cNvSpPr/>
+          <p:nvPr/>
+        </p:nvSpPr>
+        <p:spPr>
+          <a:xfrm>
+            <a:off x="6858000" y="3364992"/>
+            <a:ext cx="1554480" cy="475488"/>
+          </a:xfrm>
+          <a:prstGeom prst="rect">
+            <a:avLst>
+              <a:gd name="adj" fmla="val 9615"/>
+            </a:avLst>
+          </a:prstGeom>
+          <a:solidFill>
+            <a:srgbClr val="FFFFFF"/>
+          </a:solidFill>
+          <a:ln w="12700">
+            <a:solidFill>
+              <a:srgbClr val="0D9488"/>
+            </a:solidFill>
+            <a:prstDash val="solid"/>
+          </a:ln>
+        </p:spPr>
+      </p:sp>
+      <p:sp>
+        <p:nvSpPr>
+          <p:cNvPr id="38" name="Text 36"/>
+          <p:cNvSpPr/>
+          <p:nvPr/>
+        </p:nvSpPr>
+        <p:spPr>
+          <a:xfrm>
+            <a:off x="6858000" y="3364992"/>
+            <a:ext cx="1554480" cy="475488"/>
+          </a:xfrm>
+          <a:prstGeom prst="rect">
+            <a:avLst/>
+          </a:prstGeom>
+          <a:noFill/>
+          <a:ln/>
+        </p:spPr>
+        <p:txBody>
+          <a:bodyPr wrap="square" lIns="0" tIns="0" rIns="0" bIns="0" rtlCol="0" anchor="ctr"/>
+          <a:lstStyle/>
+          <a:p>
+            <a:pPr algn="ctr" indent="0" marL="0">
+              <a:buNone/>
+            </a:pPr>
+            <a:r>
+              <a:rPr lang="en-US" sz="1400" b="1" dirty="0">
+                <a:solidFill>
+                  <a:srgbClr val="0D9488"/>
+                </a:solidFill>
+                <a:latin typeface="Trebuchet MS" pitchFamily="34" charset="0"/>
+                <a:ea typeface="Trebuchet MS" pitchFamily="34" charset="-122"/>
+                <a:cs typeface="Trebuchet MS" pitchFamily="34" charset="-120"/>
+              </a:rPr>
+              <a:t>ing</a:t>
+            </a:r>
+            <a:endParaRPr lang="en-US" sz="1400" dirty="0"/>
+          </a:p>
+        </p:txBody>
+      </p:sp>
+      <p:sp>
+        <p:nvSpPr>
+          <p:cNvPr id="39" name="Shape 37"/>
           <p:cNvSpPr/>
           <p:nvPr/>
         </p:nvSpPr>
@@ -9361,7 +9690,7 @@
       </p:sp>
       <p:sp>
         <p:nvSpPr>
-          <p:cNvPr id="34" name="Text 32"/>
+          <p:cNvPr id="40" name="Text 38"/>
           <p:cNvSpPr/>
           <p:nvPr/>
         </p:nvSpPr>
@@ -9400,7 +9729,7 @@
       </p:sp>
       <p:sp>
         <p:nvSpPr>
-          <p:cNvPr id="35" name="Shape 33"/>
+          <p:cNvPr id="41" name="Shape 39"/>
           <p:cNvSpPr/>
           <p:nvPr/>
         </p:nvSpPr>
@@ -9427,7 +9756,7 @@
       </p:sp>
       <p:sp>
         <p:nvSpPr>
-          <p:cNvPr id="36" name="Text 34"/>
+          <p:cNvPr id="42" name="Text 40"/>
           <p:cNvSpPr/>
           <p:nvPr/>
         </p:nvSpPr>
@@ -9750,7 +10079,7 @@
                 <a:ea typeface="Calibri" pitchFamily="34" charset="-122"/>
                 <a:cs typeface="Calibri" pitchFamily="34" charset="-120"/>
               </a:rPr>
-              <a:t>Word Labs  •  wordlabs.app  •  Root: 'open' = not closed or blocked</a:t>
+              <a:t>Word Labs  •  wordlabs.app  •  Root: 'open' = not closed, accessible, uncovered</a:t>
             </a:r>
             <a:endParaRPr lang="en-US" sz="800" dirty="0"/>
           </a:p>
@@ -9889,7 +10218,7 @@
                 <a:ea typeface="Trebuchet MS" pitchFamily="34" charset="-122"/>
                 <a:cs typeface="Trebuchet MS" pitchFamily="34" charset="-120"/>
               </a:rPr>
-              <a:t>openly</a:t>
+              <a:t>reopening</a:t>
             </a:r>
             <a:endParaRPr lang="en-US" sz="2800" dirty="0"/>
           </a:p>
@@ -9969,7 +10298,7 @@
         </p:nvSpPr>
         <p:spPr>
           <a:xfrm>
-            <a:off x="2938272" y="2258568"/>
+            <a:off x="2221992" y="2258568"/>
             <a:ext cx="1828800" cy="292608"/>
           </a:xfrm>
           <a:prstGeom prst="rect">
@@ -9978,11 +10307,11 @@
             </a:avLst>
           </a:prstGeom>
           <a:solidFill>
-            <a:srgbClr val="CCFBF1"/>
+            <a:srgbClr val="DDD6FE"/>
           </a:solidFill>
           <a:ln w="19050">
             <a:solidFill>
-              <a:srgbClr val="0D9488"/>
+              <a:srgbClr val="7C3AED"/>
             </a:solidFill>
             <a:prstDash val="solid"/>
           </a:ln>
@@ -10003,7 +10332,7 @@
         </p:nvSpPr>
         <p:spPr>
           <a:xfrm>
-            <a:off x="2938272" y="2258568"/>
+            <a:off x="2221992" y="2258568"/>
             <a:ext cx="1828800" cy="292608"/>
           </a:xfrm>
           <a:prstGeom prst="rect">
@@ -10022,13 +10351,13 @@
             <a:r>
               <a:rPr lang="en-US" sz="1300" b="1" dirty="0">
                 <a:solidFill>
-                  <a:srgbClr val="0F766E"/>
+                  <a:srgbClr val="4C1D95"/>
                 </a:solidFill>
                 <a:latin typeface="Trebuchet MS" pitchFamily="34" charset="0"/>
                 <a:ea typeface="Trebuchet MS" pitchFamily="34" charset="-122"/>
                 <a:cs typeface="Trebuchet MS" pitchFamily="34" charset="-120"/>
               </a:rPr>
-              <a:t>open</a:t>
+              <a:t>re</a:t>
             </a:r>
             <a:endParaRPr lang="en-US" sz="1300" dirty="0"/>
           </a:p>
@@ -10042,7 +10371,7 @@
         </p:nvSpPr>
         <p:spPr>
           <a:xfrm>
-            <a:off x="2938272" y="2569464"/>
+            <a:off x="2221992" y="2569464"/>
             <a:ext cx="1828800" cy="201168"/>
           </a:xfrm>
           <a:prstGeom prst="rect">
@@ -10067,7 +10396,7 @@
                 <a:ea typeface="Calibri" pitchFamily="34" charset="-122"/>
                 <a:cs typeface="Calibri" pitchFamily="34" charset="-120"/>
               </a:rPr>
-              <a:t>not closed; honest</a:t>
+              <a:t>again</a:t>
             </a:r>
             <a:endParaRPr lang="en-US" sz="850" dirty="0"/>
           </a:p>
@@ -10081,7 +10410,7 @@
         </p:nvSpPr>
         <p:spPr>
           <a:xfrm>
-            <a:off x="5803392" y="2258568"/>
+            <a:off x="4370832" y="2258568"/>
             <a:ext cx="1828800" cy="292608"/>
           </a:xfrm>
           <a:prstGeom prst="rect">
@@ -10090,11 +10419,11 @@
             </a:avLst>
           </a:prstGeom>
           <a:solidFill>
-            <a:srgbClr val="FCE7F3"/>
+            <a:srgbClr val="CCFBF1"/>
           </a:solidFill>
           <a:ln w="19050">
             <a:solidFill>
-              <a:srgbClr val="DB2777"/>
+              <a:srgbClr val="0D9488"/>
             </a:solidFill>
             <a:prstDash val="solid"/>
           </a:ln>
@@ -10115,7 +10444,7 @@
         </p:nvSpPr>
         <p:spPr>
           <a:xfrm>
-            <a:off x="5803392" y="2258568"/>
+            <a:off x="4370832" y="2258568"/>
             <a:ext cx="1828800" cy="292608"/>
           </a:xfrm>
           <a:prstGeom prst="rect">
@@ -10134,13 +10463,13 @@
             <a:r>
               <a:rPr lang="en-US" sz="1300" b="1" dirty="0">
                 <a:solidFill>
-                  <a:srgbClr val="9D174D"/>
+                  <a:srgbClr val="0F766E"/>
                 </a:solidFill>
                 <a:latin typeface="Trebuchet MS" pitchFamily="34" charset="0"/>
                 <a:ea typeface="Trebuchet MS" pitchFamily="34" charset="-122"/>
                 <a:cs typeface="Trebuchet MS" pitchFamily="34" charset="-120"/>
               </a:rPr>
-              <a:t>ly</a:t>
+              <a:t>open</a:t>
             </a:r>
             <a:endParaRPr lang="en-US" sz="1300" dirty="0"/>
           </a:p>
@@ -10154,7 +10483,7 @@
         </p:nvSpPr>
         <p:spPr>
           <a:xfrm>
-            <a:off x="5803392" y="2569464"/>
+            <a:off x="4370832" y="2569464"/>
             <a:ext cx="1828800" cy="201168"/>
           </a:xfrm>
           <a:prstGeom prst="rect">
@@ -10179,7 +10508,7 @@
                 <a:ea typeface="Calibri" pitchFamily="34" charset="-122"/>
                 <a:cs typeface="Calibri" pitchFamily="34" charset="-120"/>
               </a:rPr>
-              <a:t>in a certain way</a:t>
+              <a:t>not closed, accessible</a:t>
             </a:r>
             <a:endParaRPr lang="en-US" sz="850" dirty="0"/>
           </a:p>
@@ -10188,6 +10517,118 @@
       <p:sp>
         <p:nvSpPr>
           <p:cNvPr id="22" name="Shape 20"/>
+          <p:cNvSpPr/>
+          <p:nvPr/>
+        </p:nvSpPr>
+        <p:spPr>
+          <a:xfrm>
+            <a:off x="6519672" y="2258568"/>
+            <a:ext cx="1828800" cy="292608"/>
+          </a:xfrm>
+          <a:prstGeom prst="rect">
+            <a:avLst>
+              <a:gd name="adj" fmla="val 25000"/>
+            </a:avLst>
+          </a:prstGeom>
+          <a:solidFill>
+            <a:srgbClr val="FCE7F3"/>
+          </a:solidFill>
+          <a:ln w="19050">
+            <a:solidFill>
+              <a:srgbClr val="DB2777"/>
+            </a:solidFill>
+            <a:prstDash val="solid"/>
+          </a:ln>
+          <a:effectLst>
+            <a:outerShdw sx="100000" sy="100000" kx="0" ky="0" algn="bl" rotWithShape="0" blurRad="101600" dist="38100" dir="8100000">
+              <a:srgbClr val="000000">
+                <a:alpha val="12000"/>
+              </a:srgbClr>
+            </a:outerShdw>
+          </a:effectLst>
+        </p:spPr>
+      </p:sp>
+      <p:sp>
+        <p:nvSpPr>
+          <p:cNvPr id="23" name="Text 21"/>
+          <p:cNvSpPr/>
+          <p:nvPr/>
+        </p:nvSpPr>
+        <p:spPr>
+          <a:xfrm>
+            <a:off x="6519672" y="2258568"/>
+            <a:ext cx="1828800" cy="292608"/>
+          </a:xfrm>
+          <a:prstGeom prst="rect">
+            <a:avLst/>
+          </a:prstGeom>
+          <a:noFill/>
+          <a:ln/>
+        </p:spPr>
+        <p:txBody>
+          <a:bodyPr wrap="square" lIns="0" tIns="0" rIns="0" bIns="0" rtlCol="0" anchor="ctr"/>
+          <a:lstStyle/>
+          <a:p>
+            <a:pPr algn="ctr" indent="0" marL="0">
+              <a:buNone/>
+            </a:pPr>
+            <a:r>
+              <a:rPr lang="en-US" sz="1300" b="1" dirty="0">
+                <a:solidFill>
+                  <a:srgbClr val="9D174D"/>
+                </a:solidFill>
+                <a:latin typeface="Trebuchet MS" pitchFamily="34" charset="0"/>
+                <a:ea typeface="Trebuchet MS" pitchFamily="34" charset="-122"/>
+                <a:cs typeface="Trebuchet MS" pitchFamily="34" charset="-120"/>
+              </a:rPr>
+              <a:t>ing</a:t>
+            </a:r>
+            <a:endParaRPr lang="en-US" sz="1300" dirty="0"/>
+          </a:p>
+        </p:txBody>
+      </p:sp>
+      <p:sp>
+        <p:nvSpPr>
+          <p:cNvPr id="24" name="Text 22"/>
+          <p:cNvSpPr/>
+          <p:nvPr/>
+        </p:nvSpPr>
+        <p:spPr>
+          <a:xfrm>
+            <a:off x="6519672" y="2569464"/>
+            <a:ext cx="1828800" cy="201168"/>
+          </a:xfrm>
+          <a:prstGeom prst="rect">
+            <a:avLst/>
+          </a:prstGeom>
+          <a:noFill/>
+          <a:ln/>
+        </p:spPr>
+        <p:txBody>
+          <a:bodyPr wrap="square" lIns="0" tIns="0" rIns="0" bIns="0" rtlCol="0" anchor="t"/>
+          <a:lstStyle/>
+          <a:p>
+            <a:pPr algn="ctr" indent="0" marL="0">
+              <a:buNone/>
+            </a:pPr>
+            <a:r>
+              <a:rPr lang="en-US" sz="850" dirty="0">
+                <a:solidFill>
+                  <a:srgbClr val="475569"/>
+                </a:solidFill>
+                <a:latin typeface="Calibri" pitchFamily="34" charset="0"/>
+                <a:ea typeface="Calibri" pitchFamily="34" charset="-122"/>
+                <a:cs typeface="Calibri" pitchFamily="34" charset="-120"/>
+              </a:rPr>
+              <a:t>action in progress</a:t>
+            </a:r>
+            <a:endParaRPr lang="en-US" sz="850" dirty="0"/>
+          </a:p>
+        </p:txBody>
+      </p:sp>
+      <p:sp>
+        <p:nvSpPr>
+          <p:cNvPr id="25" name="Shape 23"/>
           <p:cNvSpPr/>
           <p:nvPr/>
         </p:nvSpPr>
@@ -10214,7 +10655,7 @@
       </p:sp>
       <p:sp>
         <p:nvSpPr>
-          <p:cNvPr id="23" name="Text 21"/>
+          <p:cNvPr id="26" name="Text 24"/>
           <p:cNvSpPr/>
           <p:nvPr/>
         </p:nvSpPr>
@@ -10253,7 +10694,7 @@
       </p:sp>
       <p:sp>
         <p:nvSpPr>
-          <p:cNvPr id="24" name="Shape 22"/>
+          <p:cNvPr id="27" name="Shape 25"/>
           <p:cNvSpPr/>
           <p:nvPr/>
         </p:nvSpPr>
@@ -10280,14 +10721,14 @@
       </p:sp>
       <p:sp>
         <p:nvSpPr>
-          <p:cNvPr id="25" name="Shape 23"/>
-          <p:cNvSpPr/>
-          <p:nvPr/>
-        </p:nvSpPr>
-        <p:spPr>
-          <a:xfrm>
-            <a:off x="2313432" y="3364992"/>
-            <a:ext cx="1645920" cy="475488"/>
+          <p:cNvPr id="28" name="Shape 26"/>
+          <p:cNvSpPr/>
+          <p:nvPr/>
+        </p:nvSpPr>
+        <p:spPr>
+          <a:xfrm>
+            <a:off x="1975104" y="3364992"/>
+            <a:ext cx="1554480" cy="475488"/>
           </a:xfrm>
           <a:prstGeom prst="rect">
             <a:avLst>
@@ -10307,14 +10748,14 @@
       </p:sp>
       <p:sp>
         <p:nvSpPr>
-          <p:cNvPr id="26" name="Text 24"/>
-          <p:cNvSpPr/>
-          <p:nvPr/>
-        </p:nvSpPr>
-        <p:spPr>
-          <a:xfrm>
-            <a:off x="2313432" y="3364992"/>
-            <a:ext cx="1645920" cy="475488"/>
+          <p:cNvPr id="29" name="Text 27"/>
+          <p:cNvSpPr/>
+          <p:nvPr/>
+        </p:nvSpPr>
+        <p:spPr>
+          <a:xfrm>
+            <a:off x="1975104" y="3364992"/>
+            <a:ext cx="1554480" cy="475488"/>
           </a:xfrm>
           <a:prstGeom prst="rect">
             <a:avLst/>
@@ -10338,7 +10779,7 @@
                 <a:ea typeface="Trebuchet MS" pitchFamily="34" charset="-122"/>
                 <a:cs typeface="Trebuchet MS" pitchFamily="34" charset="-120"/>
               </a:rPr>
-              <a:t>o</a:t>
+              <a:t>re</a:t>
             </a:r>
             <a:endParaRPr lang="en-US" sz="1400" dirty="0"/>
           </a:p>
@@ -10346,14 +10787,14 @@
       </p:sp>
       <p:sp>
         <p:nvSpPr>
-          <p:cNvPr id="27" name="Text 25"/>
-          <p:cNvSpPr/>
-          <p:nvPr/>
-        </p:nvSpPr>
-        <p:spPr>
-          <a:xfrm>
-            <a:off x="3959352" y="3364992"/>
-            <a:ext cx="411480" cy="475488"/>
+          <p:cNvPr id="30" name="Text 28"/>
+          <p:cNvSpPr/>
+          <p:nvPr/>
+        </p:nvSpPr>
+        <p:spPr>
+          <a:xfrm>
+            <a:off x="3529584" y="3364992"/>
+            <a:ext cx="73152" cy="475488"/>
           </a:xfrm>
           <a:prstGeom prst="rect">
             <a:avLst/>
@@ -10385,14 +10826,14 @@
       </p:sp>
       <p:sp>
         <p:nvSpPr>
-          <p:cNvPr id="28" name="Shape 26"/>
-          <p:cNvSpPr/>
-          <p:nvPr/>
-        </p:nvSpPr>
-        <p:spPr>
-          <a:xfrm>
-            <a:off x="4370832" y="3364992"/>
-            <a:ext cx="1645920" cy="475488"/>
+          <p:cNvPr id="31" name="Shape 29"/>
+          <p:cNvSpPr/>
+          <p:nvPr/>
+        </p:nvSpPr>
+        <p:spPr>
+          <a:xfrm>
+            <a:off x="3602736" y="3364992"/>
+            <a:ext cx="1554480" cy="475488"/>
           </a:xfrm>
           <a:prstGeom prst="rect">
             <a:avLst>
@@ -10412,14 +10853,14 @@
       </p:sp>
       <p:sp>
         <p:nvSpPr>
-          <p:cNvPr id="29" name="Text 27"/>
-          <p:cNvSpPr/>
-          <p:nvPr/>
-        </p:nvSpPr>
-        <p:spPr>
-          <a:xfrm>
-            <a:off x="4370832" y="3364992"/>
-            <a:ext cx="1645920" cy="475488"/>
+          <p:cNvPr id="32" name="Text 30"/>
+          <p:cNvSpPr/>
+          <p:nvPr/>
+        </p:nvSpPr>
+        <p:spPr>
+          <a:xfrm>
+            <a:off x="3602736" y="3364992"/>
+            <a:ext cx="1554480" cy="475488"/>
           </a:xfrm>
           <a:prstGeom prst="rect">
             <a:avLst/>
@@ -10443,7 +10884,7 @@
                 <a:ea typeface="Trebuchet MS" pitchFamily="34" charset="-122"/>
                 <a:cs typeface="Trebuchet MS" pitchFamily="34" charset="-120"/>
               </a:rPr>
-              <a:t>pen</a:t>
+              <a:t>o</a:t>
             </a:r>
             <a:endParaRPr lang="en-US" sz="1400" dirty="0"/>
           </a:p>
@@ -10451,14 +10892,14 @@
       </p:sp>
       <p:sp>
         <p:nvSpPr>
-          <p:cNvPr id="30" name="Text 28"/>
-          <p:cNvSpPr/>
-          <p:nvPr/>
-        </p:nvSpPr>
-        <p:spPr>
-          <a:xfrm>
-            <a:off x="6016752" y="3364992"/>
-            <a:ext cx="411480" cy="475488"/>
+          <p:cNvPr id="33" name="Text 31"/>
+          <p:cNvSpPr/>
+          <p:nvPr/>
+        </p:nvSpPr>
+        <p:spPr>
+          <a:xfrm>
+            <a:off x="5157216" y="3364992"/>
+            <a:ext cx="73152" cy="475488"/>
           </a:xfrm>
           <a:prstGeom prst="rect">
             <a:avLst/>
@@ -10490,14 +10931,14 @@
       </p:sp>
       <p:sp>
         <p:nvSpPr>
-          <p:cNvPr id="31" name="Shape 29"/>
-          <p:cNvSpPr/>
-          <p:nvPr/>
-        </p:nvSpPr>
-        <p:spPr>
-          <a:xfrm>
-            <a:off x="6428232" y="3364992"/>
-            <a:ext cx="1645920" cy="475488"/>
+          <p:cNvPr id="34" name="Shape 32"/>
+          <p:cNvSpPr/>
+          <p:nvPr/>
+        </p:nvSpPr>
+        <p:spPr>
+          <a:xfrm>
+            <a:off x="5230368" y="3364992"/>
+            <a:ext cx="1554480" cy="475488"/>
           </a:xfrm>
           <a:prstGeom prst="rect">
             <a:avLst>
@@ -10517,14 +10958,14 @@
       </p:sp>
       <p:sp>
         <p:nvSpPr>
-          <p:cNvPr id="32" name="Text 30"/>
-          <p:cNvSpPr/>
-          <p:nvPr/>
-        </p:nvSpPr>
-        <p:spPr>
-          <a:xfrm>
-            <a:off x="6428232" y="3364992"/>
-            <a:ext cx="1645920" cy="475488"/>
+          <p:cNvPr id="35" name="Text 33"/>
+          <p:cNvSpPr/>
+          <p:nvPr/>
+        </p:nvSpPr>
+        <p:spPr>
+          <a:xfrm>
+            <a:off x="5230368" y="3364992"/>
+            <a:ext cx="1554480" cy="475488"/>
           </a:xfrm>
           <a:prstGeom prst="rect">
             <a:avLst/>
@@ -10548,7 +10989,7 @@
                 <a:ea typeface="Trebuchet MS" pitchFamily="34" charset="-122"/>
                 <a:cs typeface="Trebuchet MS" pitchFamily="34" charset="-120"/>
               </a:rPr>
-              <a:t>ly</a:t>
+              <a:t>pen</a:t>
             </a:r>
             <a:endParaRPr lang="en-US" sz="1400" dirty="0"/>
           </a:p>
@@ -10556,7 +10997,112 @@
       </p:sp>
       <p:sp>
         <p:nvSpPr>
-          <p:cNvPr id="33" name="Shape 31"/>
+          <p:cNvPr id="36" name="Text 34"/>
+          <p:cNvSpPr/>
+          <p:nvPr/>
+        </p:nvSpPr>
+        <p:spPr>
+          <a:xfrm>
+            <a:off x="6784848" y="3364992"/>
+            <a:ext cx="73152" cy="475488"/>
+          </a:xfrm>
+          <a:prstGeom prst="rect">
+            <a:avLst/>
+          </a:prstGeom>
+          <a:noFill/>
+          <a:ln/>
+        </p:spPr>
+        <p:txBody>
+          <a:bodyPr wrap="square" lIns="0" tIns="0" rIns="0" bIns="0" rtlCol="0" anchor="ctr"/>
+          <a:lstStyle/>
+          <a:p>
+            <a:pPr algn="ctr" indent="0" marL="0">
+              <a:buNone/>
+            </a:pPr>
+            <a:r>
+              <a:rPr lang="en-US" sz="1600" b="1" dirty="0">
+                <a:solidFill>
+                  <a:srgbClr val="0D9488"/>
+                </a:solidFill>
+                <a:latin typeface="Trebuchet MS" pitchFamily="34" charset="0"/>
+                <a:ea typeface="Trebuchet MS" pitchFamily="34" charset="-122"/>
+                <a:cs typeface="Trebuchet MS" pitchFamily="34" charset="-120"/>
+              </a:rPr>
+              <a:t>·</a:t>
+            </a:r>
+            <a:endParaRPr lang="en-US" sz="1600" dirty="0"/>
+          </a:p>
+        </p:txBody>
+      </p:sp>
+      <p:sp>
+        <p:nvSpPr>
+          <p:cNvPr id="37" name="Shape 35"/>
+          <p:cNvSpPr/>
+          <p:nvPr/>
+        </p:nvSpPr>
+        <p:spPr>
+          <a:xfrm>
+            <a:off x="6858000" y="3364992"/>
+            <a:ext cx="1554480" cy="475488"/>
+          </a:xfrm>
+          <a:prstGeom prst="rect">
+            <a:avLst>
+              <a:gd name="adj" fmla="val 9615"/>
+            </a:avLst>
+          </a:prstGeom>
+          <a:solidFill>
+            <a:srgbClr val="FFFFFF"/>
+          </a:solidFill>
+          <a:ln w="12700">
+            <a:solidFill>
+              <a:srgbClr val="0D9488"/>
+            </a:solidFill>
+            <a:prstDash val="solid"/>
+          </a:ln>
+        </p:spPr>
+      </p:sp>
+      <p:sp>
+        <p:nvSpPr>
+          <p:cNvPr id="38" name="Text 36"/>
+          <p:cNvSpPr/>
+          <p:nvPr/>
+        </p:nvSpPr>
+        <p:spPr>
+          <a:xfrm>
+            <a:off x="6858000" y="3364992"/>
+            <a:ext cx="1554480" cy="475488"/>
+          </a:xfrm>
+          <a:prstGeom prst="rect">
+            <a:avLst/>
+          </a:prstGeom>
+          <a:noFill/>
+          <a:ln/>
+        </p:spPr>
+        <p:txBody>
+          <a:bodyPr wrap="square" lIns="0" tIns="0" rIns="0" bIns="0" rtlCol="0" anchor="ctr"/>
+          <a:lstStyle/>
+          <a:p>
+            <a:pPr algn="ctr" indent="0" marL="0">
+              <a:buNone/>
+            </a:pPr>
+            <a:r>
+              <a:rPr lang="en-US" sz="1400" b="1" dirty="0">
+                <a:solidFill>
+                  <a:srgbClr val="0D9488"/>
+                </a:solidFill>
+                <a:latin typeface="Trebuchet MS" pitchFamily="34" charset="0"/>
+                <a:ea typeface="Trebuchet MS" pitchFamily="34" charset="-122"/>
+                <a:cs typeface="Trebuchet MS" pitchFamily="34" charset="-120"/>
+              </a:rPr>
+              <a:t>ing</a:t>
+            </a:r>
+            <a:endParaRPr lang="en-US" sz="1400" dirty="0"/>
+          </a:p>
+        </p:txBody>
+      </p:sp>
+      <p:sp>
+        <p:nvSpPr>
+          <p:cNvPr id="39" name="Shape 37"/>
           <p:cNvSpPr/>
           <p:nvPr/>
         </p:nvSpPr>
@@ -10583,7 +11129,7 @@
       </p:sp>
       <p:sp>
         <p:nvSpPr>
-          <p:cNvPr id="34" name="Text 32"/>
+          <p:cNvPr id="40" name="Text 38"/>
           <p:cNvSpPr/>
           <p:nvPr/>
         </p:nvSpPr>
@@ -10622,7 +11168,7 @@
       </p:sp>
       <p:sp>
         <p:nvSpPr>
-          <p:cNvPr id="35" name="Shape 33"/>
+          <p:cNvPr id="41" name="Shape 39"/>
           <p:cNvSpPr/>
           <p:nvPr/>
         </p:nvSpPr>
@@ -10649,13 +11195,13 @@
       </p:sp>
       <p:sp>
         <p:nvSpPr>
-          <p:cNvPr id="36" name="Shape 34"/>
-          <p:cNvSpPr/>
-          <p:nvPr/>
-        </p:nvSpPr>
-        <p:spPr>
-          <a:xfrm>
-            <a:off x="2254649" y="4169664"/>
+          <p:cNvPr id="42" name="Shape 40"/>
+          <p:cNvSpPr/>
+          <p:nvPr/>
+        </p:nvSpPr>
+        <p:spPr>
+          <a:xfrm>
+            <a:off x="2023872" y="4169664"/>
             <a:ext cx="685800" cy="475488"/>
           </a:xfrm>
           <a:prstGeom prst="rect">
@@ -10676,13 +11222,13 @@
       </p:sp>
       <p:sp>
         <p:nvSpPr>
-          <p:cNvPr id="37" name="Text 35"/>
-          <p:cNvSpPr/>
-          <p:nvPr/>
-        </p:nvSpPr>
-        <p:spPr>
-          <a:xfrm>
-            <a:off x="2254649" y="4169664"/>
+          <p:cNvPr id="43" name="Text 41"/>
+          <p:cNvSpPr/>
+          <p:nvPr/>
+        </p:nvSpPr>
+        <p:spPr>
+          <a:xfrm>
+            <a:off x="2023872" y="4169664"/>
             <a:ext cx="685800" cy="475488"/>
           </a:xfrm>
           <a:prstGeom prst="rect">
@@ -10707,7 +11253,7 @@
                 <a:ea typeface="Trebuchet MS" pitchFamily="34" charset="-122"/>
                 <a:cs typeface="Trebuchet MS" pitchFamily="34" charset="-120"/>
               </a:rPr>
-              <a:t>o</a:t>
+              <a:t>r</a:t>
             </a:r>
             <a:endParaRPr lang="en-US" sz="900" dirty="0"/>
           </a:p>
@@ -10715,13 +11261,13 @@
       </p:sp>
       <p:sp>
         <p:nvSpPr>
-          <p:cNvPr id="38" name="Shape 36"/>
-          <p:cNvSpPr/>
-          <p:nvPr/>
-        </p:nvSpPr>
-        <p:spPr>
-          <a:xfrm>
-            <a:off x="3293146" y="4169664"/>
+          <p:cNvPr id="44" name="Shape 42"/>
+          <p:cNvSpPr/>
+          <p:nvPr/>
+        </p:nvSpPr>
+        <p:spPr>
+          <a:xfrm>
+            <a:off x="2831592" y="4169664"/>
             <a:ext cx="685800" cy="475488"/>
           </a:xfrm>
           <a:prstGeom prst="rect">
@@ -10742,13 +11288,13 @@
       </p:sp>
       <p:sp>
         <p:nvSpPr>
-          <p:cNvPr id="39" name="Text 37"/>
-          <p:cNvSpPr/>
-          <p:nvPr/>
-        </p:nvSpPr>
-        <p:spPr>
-          <a:xfrm>
-            <a:off x="3293146" y="4169664"/>
+          <p:cNvPr id="45" name="Text 43"/>
+          <p:cNvSpPr/>
+          <p:nvPr/>
+        </p:nvSpPr>
+        <p:spPr>
+          <a:xfrm>
+            <a:off x="2831592" y="4169664"/>
             <a:ext cx="685800" cy="475488"/>
           </a:xfrm>
           <a:prstGeom prst="rect">
@@ -10773,7 +11319,7 @@
                 <a:ea typeface="Trebuchet MS" pitchFamily="34" charset="-122"/>
                 <a:cs typeface="Trebuchet MS" pitchFamily="34" charset="-120"/>
               </a:rPr>
-              <a:t>p</a:t>
+              <a:t>e</a:t>
             </a:r>
             <a:endParaRPr lang="en-US" sz="900" dirty="0"/>
           </a:p>
@@ -10781,13 +11327,13 @@
       </p:sp>
       <p:sp>
         <p:nvSpPr>
-          <p:cNvPr id="40" name="Shape 38"/>
-          <p:cNvSpPr/>
-          <p:nvPr/>
-        </p:nvSpPr>
-        <p:spPr>
-          <a:xfrm>
-            <a:off x="4331643" y="4169664"/>
+          <p:cNvPr id="46" name="Shape 44"/>
+          <p:cNvSpPr/>
+          <p:nvPr/>
+        </p:nvSpPr>
+        <p:spPr>
+          <a:xfrm>
+            <a:off x="3639312" y="4169664"/>
             <a:ext cx="685800" cy="475488"/>
           </a:xfrm>
           <a:prstGeom prst="rect">
@@ -10808,13 +11354,13 @@
       </p:sp>
       <p:sp>
         <p:nvSpPr>
-          <p:cNvPr id="41" name="Text 39"/>
-          <p:cNvSpPr/>
-          <p:nvPr/>
-        </p:nvSpPr>
-        <p:spPr>
-          <a:xfrm>
-            <a:off x="4331643" y="4169664"/>
+          <p:cNvPr id="47" name="Text 45"/>
+          <p:cNvSpPr/>
+          <p:nvPr/>
+        </p:nvSpPr>
+        <p:spPr>
+          <a:xfrm>
+            <a:off x="3639312" y="4169664"/>
             <a:ext cx="685800" cy="475488"/>
           </a:xfrm>
           <a:prstGeom prst="rect">
@@ -10839,7 +11385,7 @@
                 <a:ea typeface="Trebuchet MS" pitchFamily="34" charset="-122"/>
                 <a:cs typeface="Trebuchet MS" pitchFamily="34" charset="-120"/>
               </a:rPr>
-              <a:t>e</a:t>
+              <a:t>o</a:t>
             </a:r>
             <a:endParaRPr lang="en-US" sz="900" dirty="0"/>
           </a:p>
@@ -10847,13 +11393,13 @@
       </p:sp>
       <p:sp>
         <p:nvSpPr>
-          <p:cNvPr id="42" name="Shape 40"/>
-          <p:cNvSpPr/>
-          <p:nvPr/>
-        </p:nvSpPr>
-        <p:spPr>
-          <a:xfrm>
-            <a:off x="5370141" y="4169664"/>
+          <p:cNvPr id="48" name="Shape 46"/>
+          <p:cNvSpPr/>
+          <p:nvPr/>
+        </p:nvSpPr>
+        <p:spPr>
+          <a:xfrm>
+            <a:off x="4447032" y="4169664"/>
             <a:ext cx="685800" cy="475488"/>
           </a:xfrm>
           <a:prstGeom prst="rect">
@@ -10874,13 +11420,13 @@
       </p:sp>
       <p:sp>
         <p:nvSpPr>
-          <p:cNvPr id="43" name="Text 41"/>
-          <p:cNvSpPr/>
-          <p:nvPr/>
-        </p:nvSpPr>
-        <p:spPr>
-          <a:xfrm>
-            <a:off x="5370141" y="4169664"/>
+          <p:cNvPr id="49" name="Text 47"/>
+          <p:cNvSpPr/>
+          <p:nvPr/>
+        </p:nvSpPr>
+        <p:spPr>
+          <a:xfrm>
+            <a:off x="4447032" y="4169664"/>
             <a:ext cx="685800" cy="475488"/>
           </a:xfrm>
           <a:prstGeom prst="rect">
@@ -10905,7 +11451,7 @@
                 <a:ea typeface="Trebuchet MS" pitchFamily="34" charset="-122"/>
                 <a:cs typeface="Trebuchet MS" pitchFamily="34" charset="-120"/>
               </a:rPr>
-              <a:t>n</a:t>
+              <a:t>p</a:t>
             </a:r>
             <a:endParaRPr lang="en-US" sz="900" dirty="0"/>
           </a:p>
@@ -10913,13 +11459,13 @@
       </p:sp>
       <p:sp>
         <p:nvSpPr>
-          <p:cNvPr id="44" name="Shape 42"/>
-          <p:cNvSpPr/>
-          <p:nvPr/>
-        </p:nvSpPr>
-        <p:spPr>
-          <a:xfrm>
-            <a:off x="6408638" y="4169664"/>
+          <p:cNvPr id="50" name="Shape 48"/>
+          <p:cNvSpPr/>
+          <p:nvPr/>
+        </p:nvSpPr>
+        <p:spPr>
+          <a:xfrm>
+            <a:off x="5254752" y="4169664"/>
             <a:ext cx="685800" cy="475488"/>
           </a:xfrm>
           <a:prstGeom prst="rect">
@@ -10940,13 +11486,13 @@
       </p:sp>
       <p:sp>
         <p:nvSpPr>
-          <p:cNvPr id="45" name="Text 43"/>
-          <p:cNvSpPr/>
-          <p:nvPr/>
-        </p:nvSpPr>
-        <p:spPr>
-          <a:xfrm>
-            <a:off x="6408638" y="4169664"/>
+          <p:cNvPr id="51" name="Text 49"/>
+          <p:cNvSpPr/>
+          <p:nvPr/>
+        </p:nvSpPr>
+        <p:spPr>
+          <a:xfrm>
+            <a:off x="5254752" y="4169664"/>
             <a:ext cx="685800" cy="475488"/>
           </a:xfrm>
           <a:prstGeom prst="rect">
@@ -10971,7 +11517,7 @@
                 <a:ea typeface="Trebuchet MS" pitchFamily="34" charset="-122"/>
                 <a:cs typeface="Trebuchet MS" pitchFamily="34" charset="-120"/>
               </a:rPr>
-              <a:t>l</a:t>
+              <a:t>e</a:t>
             </a:r>
             <a:endParaRPr lang="en-US" sz="900" dirty="0"/>
           </a:p>
@@ -10979,13 +11525,13 @@
       </p:sp>
       <p:sp>
         <p:nvSpPr>
-          <p:cNvPr id="46" name="Shape 44"/>
-          <p:cNvSpPr/>
-          <p:nvPr/>
-        </p:nvSpPr>
-        <p:spPr>
-          <a:xfrm>
-            <a:off x="7447135" y="4169664"/>
+          <p:cNvPr id="52" name="Shape 50"/>
+          <p:cNvSpPr/>
+          <p:nvPr/>
+        </p:nvSpPr>
+        <p:spPr>
+          <a:xfrm>
+            <a:off x="6062472" y="4169664"/>
             <a:ext cx="685800" cy="475488"/>
           </a:xfrm>
           <a:prstGeom prst="rect">
@@ -11006,13 +11552,13 @@
       </p:sp>
       <p:sp>
         <p:nvSpPr>
-          <p:cNvPr id="47" name="Text 45"/>
-          <p:cNvSpPr/>
-          <p:nvPr/>
-        </p:nvSpPr>
-        <p:spPr>
-          <a:xfrm>
-            <a:off x="7447135" y="4169664"/>
+          <p:cNvPr id="53" name="Text 51"/>
+          <p:cNvSpPr/>
+          <p:nvPr/>
+        </p:nvSpPr>
+        <p:spPr>
+          <a:xfrm>
+            <a:off x="6062472" y="4169664"/>
             <a:ext cx="685800" cy="475488"/>
           </a:xfrm>
           <a:prstGeom prst="rect">
@@ -11037,7 +11583,139 @@
                 <a:ea typeface="Trebuchet MS" pitchFamily="34" charset="-122"/>
                 <a:cs typeface="Trebuchet MS" pitchFamily="34" charset="-120"/>
               </a:rPr>
-              <a:t>y</a:t>
+              <a:t>n</a:t>
+            </a:r>
+            <a:endParaRPr lang="en-US" sz="900" dirty="0"/>
+          </a:p>
+        </p:txBody>
+      </p:sp>
+      <p:sp>
+        <p:nvSpPr>
+          <p:cNvPr id="54" name="Shape 52"/>
+          <p:cNvSpPr/>
+          <p:nvPr/>
+        </p:nvSpPr>
+        <p:spPr>
+          <a:xfrm>
+            <a:off x="6870192" y="4169664"/>
+            <a:ext cx="685800" cy="475488"/>
+          </a:xfrm>
+          <a:prstGeom prst="rect">
+            <a:avLst>
+              <a:gd name="adj" fmla="val 7692"/>
+            </a:avLst>
+          </a:prstGeom>
+          <a:solidFill>
+            <a:srgbClr val="FFFFFF"/>
+          </a:solidFill>
+          <a:ln w="12700">
+            <a:solidFill>
+              <a:srgbClr val="DB2777"/>
+            </a:solidFill>
+            <a:prstDash val="solid"/>
+          </a:ln>
+        </p:spPr>
+      </p:sp>
+      <p:sp>
+        <p:nvSpPr>
+          <p:cNvPr id="55" name="Text 53"/>
+          <p:cNvSpPr/>
+          <p:nvPr/>
+        </p:nvSpPr>
+        <p:spPr>
+          <a:xfrm>
+            <a:off x="6870192" y="4169664"/>
+            <a:ext cx="685800" cy="475488"/>
+          </a:xfrm>
+          <a:prstGeom prst="rect">
+            <a:avLst/>
+          </a:prstGeom>
+          <a:noFill/>
+          <a:ln/>
+        </p:spPr>
+        <p:txBody>
+          <a:bodyPr wrap="square" lIns="0" tIns="0" rIns="0" bIns="0" rtlCol="0" anchor="ctr"/>
+          <a:lstStyle/>
+          <a:p>
+            <a:pPr algn="ctr" indent="0" marL="0">
+              <a:buNone/>
+            </a:pPr>
+            <a:r>
+              <a:rPr lang="en-US" sz="900" b="1" dirty="0">
+                <a:solidFill>
+                  <a:srgbClr val="9D174D"/>
+                </a:solidFill>
+                <a:latin typeface="Trebuchet MS" pitchFamily="34" charset="0"/>
+                <a:ea typeface="Trebuchet MS" pitchFamily="34" charset="-122"/>
+                <a:cs typeface="Trebuchet MS" pitchFamily="34" charset="-120"/>
+              </a:rPr>
+              <a:t>i</a:t>
+            </a:r>
+            <a:endParaRPr lang="en-US" sz="900" dirty="0"/>
+          </a:p>
+        </p:txBody>
+      </p:sp>
+      <p:sp>
+        <p:nvSpPr>
+          <p:cNvPr id="56" name="Shape 54"/>
+          <p:cNvSpPr/>
+          <p:nvPr/>
+        </p:nvSpPr>
+        <p:spPr>
+          <a:xfrm>
+            <a:off x="7677912" y="4169664"/>
+            <a:ext cx="685800" cy="475488"/>
+          </a:xfrm>
+          <a:prstGeom prst="rect">
+            <a:avLst>
+              <a:gd name="adj" fmla="val 7692"/>
+            </a:avLst>
+          </a:prstGeom>
+          <a:solidFill>
+            <a:srgbClr val="FFFFFF"/>
+          </a:solidFill>
+          <a:ln w="12700">
+            <a:solidFill>
+              <a:srgbClr val="DB2777"/>
+            </a:solidFill>
+            <a:prstDash val="solid"/>
+          </a:ln>
+        </p:spPr>
+      </p:sp>
+      <p:sp>
+        <p:nvSpPr>
+          <p:cNvPr id="57" name="Text 55"/>
+          <p:cNvSpPr/>
+          <p:nvPr/>
+        </p:nvSpPr>
+        <p:spPr>
+          <a:xfrm>
+            <a:off x="7677912" y="4169664"/>
+            <a:ext cx="685800" cy="475488"/>
+          </a:xfrm>
+          <a:prstGeom prst="rect">
+            <a:avLst/>
+          </a:prstGeom>
+          <a:noFill/>
+          <a:ln/>
+        </p:spPr>
+        <p:txBody>
+          <a:bodyPr wrap="square" lIns="0" tIns="0" rIns="0" bIns="0" rtlCol="0" anchor="ctr"/>
+          <a:lstStyle/>
+          <a:p>
+            <a:pPr algn="ctr" indent="0" marL="0">
+              <a:buNone/>
+            </a:pPr>
+            <a:r>
+              <a:rPr lang="en-US" sz="900" b="1" dirty="0">
+                <a:solidFill>
+                  <a:srgbClr val="9D174D"/>
+                </a:solidFill>
+                <a:latin typeface="Trebuchet MS" pitchFamily="34" charset="0"/>
+                <a:ea typeface="Trebuchet MS" pitchFamily="34" charset="-122"/>
+                <a:cs typeface="Trebuchet MS" pitchFamily="34" charset="-120"/>
+              </a:rPr>
+              <a:t>ng</a:t>
             </a:r>
             <a:endParaRPr lang="en-US" sz="900" dirty="0"/>
           </a:p>
@@ -11329,7 +12007,7 @@
                 <a:ea typeface="Calibri" pitchFamily="34" charset="-122"/>
                 <a:cs typeface="Calibri" pitchFamily="34" charset="-120"/>
               </a:rPr>
-              <a:t>Word Labs  •  wordlabs.app  •  Root: 'open' = not closed or blocked</a:t>
+              <a:t>Word Labs  •  wordlabs.app  •  Root: 'open' = not closed, accessible, uncovered</a:t>
             </a:r>
             <a:endParaRPr lang="en-US" sz="800" dirty="0"/>
           </a:p>
@@ -11468,7 +12146,7 @@
                 <a:ea typeface="Trebuchet MS" pitchFamily="34" charset="-122"/>
                 <a:cs typeface="Trebuchet MS" pitchFamily="34" charset="-120"/>
               </a:rPr>
-              <a:t>reopening</a:t>
+              <a:t>openly</a:t>
             </a:r>
             <a:endParaRPr lang="en-US" sz="2800" dirty="0"/>
           </a:p>
@@ -12156,7 +12834,7 @@
                 <a:ea typeface="Calibri" pitchFamily="34" charset="-122"/>
                 <a:cs typeface="Calibri" pitchFamily="34" charset="-120"/>
               </a:rPr>
-              <a:t>Word Labs  •  wordlabs.app  •  Root: 'open' = not closed or blocked</a:t>
+              <a:t>Word Labs  •  wordlabs.app  •  Root: 'open' = not closed, accessible, uncovered</a:t>
             </a:r>
             <a:endParaRPr lang="en-US" sz="800" dirty="0"/>
           </a:p>
@@ -12295,7 +12973,7 @@
                 <a:ea typeface="Trebuchet MS" pitchFamily="34" charset="-122"/>
                 <a:cs typeface="Trebuchet MS" pitchFamily="34" charset="-120"/>
               </a:rPr>
-              <a:t>reopening</a:t>
+              <a:t>openly</a:t>
             </a:r>
             <a:endParaRPr lang="en-US" sz="2800" dirty="0"/>
           </a:p>
@@ -12375,7 +13053,7 @@
         </p:nvSpPr>
         <p:spPr>
           <a:xfrm>
-            <a:off x="2221992" y="2258568"/>
+            <a:off x="2938272" y="2258568"/>
             <a:ext cx="1828800" cy="292608"/>
           </a:xfrm>
           <a:prstGeom prst="rect">
@@ -12384,11 +13062,11 @@
             </a:avLst>
           </a:prstGeom>
           <a:solidFill>
-            <a:srgbClr val="DDD6FE"/>
+            <a:srgbClr val="CCFBF1"/>
           </a:solidFill>
           <a:ln w="19050">
             <a:solidFill>
-              <a:srgbClr val="7C3AED"/>
+              <a:srgbClr val="0D9488"/>
             </a:solidFill>
             <a:prstDash val="solid"/>
           </a:ln>
@@ -12409,7 +13087,7 @@
         </p:nvSpPr>
         <p:spPr>
           <a:xfrm>
-            <a:off x="2221992" y="2258568"/>
+            <a:off x="2938272" y="2258568"/>
             <a:ext cx="1828800" cy="292608"/>
           </a:xfrm>
           <a:prstGeom prst="rect">
@@ -12428,13 +13106,13 @@
             <a:r>
               <a:rPr lang="en-US" sz="1300" b="1" dirty="0">
                 <a:solidFill>
-                  <a:srgbClr val="4C1D95"/>
+                  <a:srgbClr val="0F766E"/>
                 </a:solidFill>
                 <a:latin typeface="Trebuchet MS" pitchFamily="34" charset="0"/>
                 <a:ea typeface="Trebuchet MS" pitchFamily="34" charset="-122"/>
                 <a:cs typeface="Trebuchet MS" pitchFamily="34" charset="-120"/>
               </a:rPr>
-              <a:t>re</a:t>
+              <a:t>open</a:t>
             </a:r>
             <a:endParaRPr lang="en-US" sz="1300" dirty="0"/>
           </a:p>
@@ -12448,7 +13126,7 @@
         </p:nvSpPr>
         <p:spPr>
           <a:xfrm>
-            <a:off x="2221992" y="2569464"/>
+            <a:off x="2938272" y="2569464"/>
             <a:ext cx="1828800" cy="201168"/>
           </a:xfrm>
           <a:prstGeom prst="rect">
@@ -12473,7 +13151,7 @@
                 <a:ea typeface="Calibri" pitchFamily="34" charset="-122"/>
                 <a:cs typeface="Calibri" pitchFamily="34" charset="-120"/>
               </a:rPr>
-              <a:t>again</a:t>
+              <a:t>not closed, accessible</a:t>
             </a:r>
             <a:endParaRPr lang="en-US" sz="850" dirty="0"/>
           </a:p>
@@ -12487,7 +13165,7 @@
         </p:nvSpPr>
         <p:spPr>
           <a:xfrm>
-            <a:off x="4370832" y="2258568"/>
+            <a:off x="5803392" y="2258568"/>
             <a:ext cx="1828800" cy="292608"/>
           </a:xfrm>
           <a:prstGeom prst="rect">
@@ -12496,11 +13174,11 @@
             </a:avLst>
           </a:prstGeom>
           <a:solidFill>
-            <a:srgbClr val="CCFBF1"/>
+            <a:srgbClr val="FCE7F3"/>
           </a:solidFill>
           <a:ln w="19050">
             <a:solidFill>
-              <a:srgbClr val="0D9488"/>
+              <a:srgbClr val="DB2777"/>
             </a:solidFill>
             <a:prstDash val="solid"/>
           </a:ln>
@@ -12521,7 +13199,7 @@
         </p:nvSpPr>
         <p:spPr>
           <a:xfrm>
-            <a:off x="4370832" y="2258568"/>
+            <a:off x="5803392" y="2258568"/>
             <a:ext cx="1828800" cy="292608"/>
           </a:xfrm>
           <a:prstGeom prst="rect">
@@ -12540,13 +13218,13 @@
             <a:r>
               <a:rPr lang="en-US" sz="1300" b="1" dirty="0">
                 <a:solidFill>
-                  <a:srgbClr val="0F766E"/>
+                  <a:srgbClr val="9D174D"/>
                 </a:solidFill>
                 <a:latin typeface="Trebuchet MS" pitchFamily="34" charset="0"/>
                 <a:ea typeface="Trebuchet MS" pitchFamily="34" charset="-122"/>
                 <a:cs typeface="Trebuchet MS" pitchFamily="34" charset="-120"/>
               </a:rPr>
-              <a:t>open</a:t>
+              <a:t>ly</a:t>
             </a:r>
             <a:endParaRPr lang="en-US" sz="1300" dirty="0"/>
           </a:p>
@@ -12560,7 +13238,7 @@
         </p:nvSpPr>
         <p:spPr>
           <a:xfrm>
-            <a:off x="4370832" y="2569464"/>
+            <a:off x="5803392" y="2569464"/>
             <a:ext cx="1828800" cy="201168"/>
           </a:xfrm>
           <a:prstGeom prst="rect">
@@ -12585,7 +13263,7 @@
                 <a:ea typeface="Calibri" pitchFamily="34" charset="-122"/>
                 <a:cs typeface="Calibri" pitchFamily="34" charset="-120"/>
               </a:rPr>
-              <a:t>not closed</a:t>
+              <a:t>in a way that is</a:t>
             </a:r>
             <a:endParaRPr lang="en-US" sz="850" dirty="0"/>
           </a:p>
@@ -12599,30 +13277,23 @@
         </p:nvSpPr>
         <p:spPr>
           <a:xfrm>
-            <a:off x="6519672" y="2258568"/>
-            <a:ext cx="1828800" cy="292608"/>
+            <a:off x="365760" y="3273552"/>
+            <a:ext cx="1371600" cy="658368"/>
           </a:xfrm>
           <a:prstGeom prst="rect">
             <a:avLst>
-              <a:gd name="adj" fmla="val 25000"/>
+              <a:gd name="adj" fmla="val 8333"/>
             </a:avLst>
           </a:prstGeom>
           <a:solidFill>
-            <a:srgbClr val="FCE7F3"/>
-          </a:solidFill>
-          <a:ln w="19050">
-            <a:solidFill>
-              <a:srgbClr val="DB2777"/>
-            </a:solidFill>
-            <a:prstDash val="solid"/>
-          </a:ln>
-          <a:effectLst>
-            <a:outerShdw sx="100000" sy="100000" kx="0" ky="0" algn="bl" rotWithShape="0" blurRad="101600" dist="38100" dir="8100000">
-              <a:srgbClr val="000000">
-                <a:alpha val="12000"/>
-              </a:srgbClr>
-            </a:outerShdw>
-          </a:effectLst>
+            <a:srgbClr val="E2E8F0"/>
+          </a:solidFill>
+          <a:ln w="12700">
+            <a:solidFill>
+              <a:srgbClr val="E2E8F0"/>
+            </a:solidFill>
+            <a:prstDash val="solid"/>
+          </a:ln>
         </p:spPr>
       </p:sp>
       <p:sp>
@@ -12633,90 +13304,117 @@
         </p:nvSpPr>
         <p:spPr>
           <a:xfrm>
-            <a:off x="6519672" y="2258568"/>
-            <a:ext cx="1828800" cy="292608"/>
-          </a:xfrm>
-          <a:prstGeom prst="rect">
-            <a:avLst/>
-          </a:prstGeom>
-          <a:noFill/>
-          <a:ln/>
-        </p:spPr>
-        <p:txBody>
-          <a:bodyPr wrap="square" lIns="0" tIns="0" rIns="0" bIns="0" rtlCol="0" anchor="ctr"/>
-          <a:lstStyle/>
-          <a:p>
-            <a:pPr algn="ctr" indent="0" marL="0">
-              <a:buNone/>
-            </a:pPr>
-            <a:r>
-              <a:rPr lang="en-US" sz="1300" b="1" dirty="0">
-                <a:solidFill>
-                  <a:srgbClr val="9D174D"/>
+            <a:off x="365760" y="3273552"/>
+            <a:ext cx="1371600" cy="658368"/>
+          </a:xfrm>
+          <a:prstGeom prst="rect">
+            <a:avLst/>
+          </a:prstGeom>
+          <a:noFill/>
+          <a:ln/>
+        </p:spPr>
+        <p:txBody>
+          <a:bodyPr wrap="square" lIns="0" tIns="0" rIns="0" bIns="0" rtlCol="0" anchor="ctr"/>
+          <a:lstStyle/>
+          <a:p>
+            <a:pPr algn="ctr" indent="0" marL="0">
+              <a:buNone/>
+            </a:pPr>
+            <a:r>
+              <a:rPr lang="en-US" sz="1100" b="1" dirty="0">
+                <a:solidFill>
+                  <a:srgbClr val="475569"/>
                 </a:solidFill>
                 <a:latin typeface="Trebuchet MS" pitchFamily="34" charset="0"/>
                 <a:ea typeface="Trebuchet MS" pitchFamily="34" charset="-122"/>
                 <a:cs typeface="Trebuchet MS" pitchFamily="34" charset="-120"/>
               </a:rPr>
-              <a:t>ing</a:t>
-            </a:r>
-            <a:endParaRPr lang="en-US" sz="1300" dirty="0"/>
-          </a:p>
-        </p:txBody>
-      </p:sp>
-      <p:sp>
-        <p:nvSpPr>
-          <p:cNvPr id="24" name="Text 22"/>
-          <p:cNvSpPr/>
-          <p:nvPr/>
-        </p:nvSpPr>
-        <p:spPr>
-          <a:xfrm>
-            <a:off x="6519672" y="2569464"/>
-            <a:ext cx="1828800" cy="201168"/>
-          </a:xfrm>
-          <a:prstGeom prst="rect">
-            <a:avLst/>
-          </a:prstGeom>
-          <a:noFill/>
-          <a:ln/>
-        </p:spPr>
-        <p:txBody>
-          <a:bodyPr wrap="square" lIns="0" tIns="0" rIns="0" bIns="0" rtlCol="0" anchor="t"/>
-          <a:lstStyle/>
-          <a:p>
-            <a:pPr algn="ctr" indent="0" marL="0">
-              <a:buNone/>
-            </a:pPr>
-            <a:r>
-              <a:rPr lang="en-US" sz="850" dirty="0">
-                <a:solidFill>
-                  <a:srgbClr val="475569"/>
+              <a:t>Syllables</a:t>
+            </a:r>
+            <a:endParaRPr lang="en-US" sz="1100" dirty="0"/>
+          </a:p>
+        </p:txBody>
+      </p:sp>
+      <p:sp>
+        <p:nvSpPr>
+          <p:cNvPr id="24" name="Shape 22"/>
+          <p:cNvSpPr/>
+          <p:nvPr/>
+        </p:nvSpPr>
+        <p:spPr>
+          <a:xfrm>
+            <a:off x="1874520" y="3273552"/>
+            <a:ext cx="6903720" cy="658368"/>
+          </a:xfrm>
+          <a:prstGeom prst="rect">
+            <a:avLst>
+              <a:gd name="adj" fmla="val 8333"/>
+            </a:avLst>
+          </a:prstGeom>
+          <a:solidFill>
+            <a:srgbClr val="F8FAFC"/>
+          </a:solidFill>
+          <a:ln w="12700">
+            <a:solidFill>
+              <a:srgbClr val="E2E8F0"/>
+            </a:solidFill>
+            <a:prstDash val="dash"/>
+          </a:ln>
+        </p:spPr>
+      </p:sp>
+      <p:sp>
+        <p:nvSpPr>
+          <p:cNvPr id="25" name="Text 23"/>
+          <p:cNvSpPr/>
+          <p:nvPr/>
+        </p:nvSpPr>
+        <p:spPr>
+          <a:xfrm>
+            <a:off x="1874520" y="3273552"/>
+            <a:ext cx="6903720" cy="658368"/>
+          </a:xfrm>
+          <a:prstGeom prst="rect">
+            <a:avLst/>
+          </a:prstGeom>
+          <a:noFill/>
+          <a:ln/>
+        </p:spPr>
+        <p:txBody>
+          <a:bodyPr wrap="square" rtlCol="0" anchor="ctr"/>
+          <a:lstStyle/>
+          <a:p>
+            <a:pPr algn="ctr" indent="0" marL="0">
+              <a:buNone/>
+            </a:pPr>
+            <a:r>
+              <a:rPr lang="en-US" sz="1100" i="1" dirty="0">
+                <a:solidFill>
+                  <a:srgbClr val="CBD5E1"/>
                 </a:solidFill>
                 <a:latin typeface="Calibri" pitchFamily="34" charset="0"/>
                 <a:ea typeface="Calibri" pitchFamily="34" charset="-122"/>
                 <a:cs typeface="Calibri" pitchFamily="34" charset="-120"/>
               </a:rPr>
-              <a:t>action happening now</a:t>
-            </a:r>
-            <a:endParaRPr lang="en-US" sz="850" dirty="0"/>
-          </a:p>
-        </p:txBody>
-      </p:sp>
-      <p:sp>
-        <p:nvSpPr>
-          <p:cNvPr id="25" name="Shape 23"/>
-          <p:cNvSpPr/>
-          <p:nvPr/>
-        </p:nvSpPr>
-        <p:spPr>
-          <a:xfrm>
-            <a:off x="365760" y="3273552"/>
-            <a:ext cx="1371600" cy="658368"/>
+              <a:t>Write here...</a:t>
+            </a:r>
+            <a:endParaRPr lang="en-US" sz="1100" dirty="0"/>
+          </a:p>
+        </p:txBody>
+      </p:sp>
+      <p:sp>
+        <p:nvSpPr>
+          <p:cNvPr id="26" name="Shape 24"/>
+          <p:cNvSpPr/>
+          <p:nvPr/>
+        </p:nvSpPr>
+        <p:spPr>
+          <a:xfrm>
+            <a:off x="365760" y="4096512"/>
+            <a:ext cx="1371600" cy="804672"/>
           </a:xfrm>
           <a:prstGeom prst="rect">
             <a:avLst>
-              <a:gd name="adj" fmla="val 8333"/>
+              <a:gd name="adj" fmla="val 6818"/>
             </a:avLst>
           </a:prstGeom>
           <a:solidFill>
@@ -12732,14 +13430,14 @@
       </p:sp>
       <p:sp>
         <p:nvSpPr>
-          <p:cNvPr id="26" name="Text 24"/>
-          <p:cNvSpPr/>
-          <p:nvPr/>
-        </p:nvSpPr>
-        <p:spPr>
-          <a:xfrm>
-            <a:off x="365760" y="3273552"/>
-            <a:ext cx="1371600" cy="658368"/>
+          <p:cNvPr id="27" name="Text 25"/>
+          <p:cNvSpPr/>
+          <p:nvPr/>
+        </p:nvSpPr>
+        <p:spPr>
+          <a:xfrm>
+            <a:off x="365760" y="4096512"/>
+            <a:ext cx="1371600" cy="804672"/>
           </a:xfrm>
           <a:prstGeom prst="rect">
             <a:avLst/>
@@ -12763,7 +13461,7 @@
                 <a:ea typeface="Trebuchet MS" pitchFamily="34" charset="-122"/>
                 <a:cs typeface="Trebuchet MS" pitchFamily="34" charset="-120"/>
               </a:rPr>
-              <a:t>Syllables</a:t>
+              <a:t>Phonemes</a:t>
             </a:r>
             <a:endParaRPr lang="en-US" sz="1100" dirty="0"/>
           </a:p>
@@ -12771,80 +13469,14 @@
       </p:sp>
       <p:sp>
         <p:nvSpPr>
-          <p:cNvPr id="27" name="Shape 25"/>
-          <p:cNvSpPr/>
-          <p:nvPr/>
-        </p:nvSpPr>
-        <p:spPr>
-          <a:xfrm>
-            <a:off x="1874520" y="3273552"/>
-            <a:ext cx="6903720" cy="658368"/>
-          </a:xfrm>
-          <a:prstGeom prst="rect">
-            <a:avLst>
-              <a:gd name="adj" fmla="val 8333"/>
-            </a:avLst>
-          </a:prstGeom>
-          <a:solidFill>
-            <a:srgbClr val="F8FAFC"/>
-          </a:solidFill>
-          <a:ln w="12700">
-            <a:solidFill>
-              <a:srgbClr val="E2E8F0"/>
-            </a:solidFill>
-            <a:prstDash val="dash"/>
-          </a:ln>
-        </p:spPr>
-      </p:sp>
-      <p:sp>
-        <p:nvSpPr>
-          <p:cNvPr id="28" name="Text 26"/>
-          <p:cNvSpPr/>
-          <p:nvPr/>
-        </p:nvSpPr>
-        <p:spPr>
-          <a:xfrm>
-            <a:off x="1874520" y="3273552"/>
-            <a:ext cx="6903720" cy="658368"/>
-          </a:xfrm>
-          <a:prstGeom prst="rect">
-            <a:avLst/>
-          </a:prstGeom>
-          <a:noFill/>
-          <a:ln/>
-        </p:spPr>
-        <p:txBody>
-          <a:bodyPr wrap="square" rtlCol="0" anchor="ctr"/>
-          <a:lstStyle/>
-          <a:p>
-            <a:pPr algn="ctr" indent="0" marL="0">
-              <a:buNone/>
-            </a:pPr>
-            <a:r>
-              <a:rPr lang="en-US" sz="1100" i="1" dirty="0">
-                <a:solidFill>
-                  <a:srgbClr val="CBD5E1"/>
-                </a:solidFill>
-                <a:latin typeface="Calibri" pitchFamily="34" charset="0"/>
-                <a:ea typeface="Calibri" pitchFamily="34" charset="-122"/>
-                <a:cs typeface="Calibri" pitchFamily="34" charset="-120"/>
-              </a:rPr>
-              <a:t>Write here...</a:t>
-            </a:r>
-            <a:endParaRPr lang="en-US" sz="1100" dirty="0"/>
-          </a:p>
-        </p:txBody>
-      </p:sp>
-      <p:sp>
-        <p:nvSpPr>
-          <p:cNvPr id="29" name="Shape 27"/>
-          <p:cNvSpPr/>
-          <p:nvPr/>
-        </p:nvSpPr>
-        <p:spPr>
-          <a:xfrm>
-            <a:off x="365760" y="4096512"/>
-            <a:ext cx="1371600" cy="804672"/>
+          <p:cNvPr id="28" name="Shape 26"/>
+          <p:cNvSpPr/>
+          <p:nvPr/>
+        </p:nvSpPr>
+        <p:spPr>
+          <a:xfrm>
+            <a:off x="1874520" y="4096512"/>
+            <a:ext cx="6903720" cy="804672"/>
           </a:xfrm>
           <a:prstGeom prst="rect">
             <a:avLst>
@@ -12852,85 +13484,19 @@
             </a:avLst>
           </a:prstGeom>
           <a:solidFill>
-            <a:srgbClr val="E2E8F0"/>
+            <a:srgbClr val="F8FAFC"/>
           </a:solidFill>
           <a:ln w="12700">
             <a:solidFill>
               <a:srgbClr val="E2E8F0"/>
             </a:solidFill>
-            <a:prstDash val="solid"/>
-          </a:ln>
-        </p:spPr>
-      </p:sp>
-      <p:sp>
-        <p:nvSpPr>
-          <p:cNvPr id="30" name="Text 28"/>
-          <p:cNvSpPr/>
-          <p:nvPr/>
-        </p:nvSpPr>
-        <p:spPr>
-          <a:xfrm>
-            <a:off x="365760" y="4096512"/>
-            <a:ext cx="1371600" cy="804672"/>
-          </a:xfrm>
-          <a:prstGeom prst="rect">
-            <a:avLst/>
-          </a:prstGeom>
-          <a:noFill/>
-          <a:ln/>
-        </p:spPr>
-        <p:txBody>
-          <a:bodyPr wrap="square" lIns="0" tIns="0" rIns="0" bIns="0" rtlCol="0" anchor="ctr"/>
-          <a:lstStyle/>
-          <a:p>
-            <a:pPr algn="ctr" indent="0" marL="0">
-              <a:buNone/>
-            </a:pPr>
-            <a:r>
-              <a:rPr lang="en-US" sz="1100" b="1" dirty="0">
-                <a:solidFill>
-                  <a:srgbClr val="475569"/>
-                </a:solidFill>
-                <a:latin typeface="Trebuchet MS" pitchFamily="34" charset="0"/>
-                <a:ea typeface="Trebuchet MS" pitchFamily="34" charset="-122"/>
-                <a:cs typeface="Trebuchet MS" pitchFamily="34" charset="-120"/>
-              </a:rPr>
-              <a:t>Phonemes</a:t>
-            </a:r>
-            <a:endParaRPr lang="en-US" sz="1100" dirty="0"/>
-          </a:p>
-        </p:txBody>
-      </p:sp>
-      <p:sp>
-        <p:nvSpPr>
-          <p:cNvPr id="31" name="Shape 29"/>
-          <p:cNvSpPr/>
-          <p:nvPr/>
-        </p:nvSpPr>
-        <p:spPr>
-          <a:xfrm>
-            <a:off x="1874520" y="4096512"/>
-            <a:ext cx="6903720" cy="804672"/>
-          </a:xfrm>
-          <a:prstGeom prst="rect">
-            <a:avLst>
-              <a:gd name="adj" fmla="val 6818"/>
-            </a:avLst>
-          </a:prstGeom>
-          <a:solidFill>
-            <a:srgbClr val="F8FAFC"/>
-          </a:solidFill>
-          <a:ln w="12700">
-            <a:solidFill>
-              <a:srgbClr val="E2E8F0"/>
-            </a:solidFill>
             <a:prstDash val="dash"/>
           </a:ln>
         </p:spPr>
       </p:sp>
       <p:sp>
         <p:nvSpPr>
-          <p:cNvPr id="32" name="Text 30"/>
+          <p:cNvPr id="29" name="Text 27"/>
           <p:cNvSpPr/>
           <p:nvPr/>
         </p:nvSpPr>
@@ -13253,7 +13819,7 @@
                 <a:ea typeface="Calibri" pitchFamily="34" charset="-122"/>
                 <a:cs typeface="Calibri" pitchFamily="34" charset="-120"/>
               </a:rPr>
-              <a:t>Word Labs  •  wordlabs.app  •  Root: 'open' = not closed or blocked</a:t>
+              <a:t>Word Labs  •  wordlabs.app  •  Root: 'open' = not closed, accessible, uncovered</a:t>
             </a:r>
             <a:endParaRPr lang="en-US" sz="800" dirty="0"/>
           </a:p>
@@ -13392,7 +13958,7 @@
                 <a:ea typeface="Trebuchet MS" pitchFamily="34" charset="-122"/>
                 <a:cs typeface="Trebuchet MS" pitchFamily="34" charset="-120"/>
               </a:rPr>
-              <a:t>reopening</a:t>
+              <a:t>openly</a:t>
             </a:r>
             <a:endParaRPr lang="en-US" sz="2800" dirty="0"/>
           </a:p>
@@ -13472,7 +14038,7 @@
         </p:nvSpPr>
         <p:spPr>
           <a:xfrm>
-            <a:off x="2221992" y="2258568"/>
+            <a:off x="2938272" y="2258568"/>
             <a:ext cx="1828800" cy="292608"/>
           </a:xfrm>
           <a:prstGeom prst="rect">
@@ -13481,11 +14047,11 @@
             </a:avLst>
           </a:prstGeom>
           <a:solidFill>
-            <a:srgbClr val="DDD6FE"/>
+            <a:srgbClr val="CCFBF1"/>
           </a:solidFill>
           <a:ln w="19050">
             <a:solidFill>
-              <a:srgbClr val="7C3AED"/>
+              <a:srgbClr val="0D9488"/>
             </a:solidFill>
             <a:prstDash val="solid"/>
           </a:ln>
@@ -13506,7 +14072,7 @@
         </p:nvSpPr>
         <p:spPr>
           <a:xfrm>
-            <a:off x="2221992" y="2258568"/>
+            <a:off x="2938272" y="2258568"/>
             <a:ext cx="1828800" cy="292608"/>
           </a:xfrm>
           <a:prstGeom prst="rect">
@@ -13525,13 +14091,13 @@
             <a:r>
               <a:rPr lang="en-US" sz="1300" b="1" dirty="0">
                 <a:solidFill>
-                  <a:srgbClr val="4C1D95"/>
+                  <a:srgbClr val="0F766E"/>
                 </a:solidFill>
                 <a:latin typeface="Trebuchet MS" pitchFamily="34" charset="0"/>
                 <a:ea typeface="Trebuchet MS" pitchFamily="34" charset="-122"/>
                 <a:cs typeface="Trebuchet MS" pitchFamily="34" charset="-120"/>
               </a:rPr>
-              <a:t>re</a:t>
+              <a:t>open</a:t>
             </a:r>
             <a:endParaRPr lang="en-US" sz="1300" dirty="0"/>
           </a:p>
@@ -13545,7 +14111,7 @@
         </p:nvSpPr>
         <p:spPr>
           <a:xfrm>
-            <a:off x="2221992" y="2569464"/>
+            <a:off x="2938272" y="2569464"/>
             <a:ext cx="1828800" cy="201168"/>
           </a:xfrm>
           <a:prstGeom prst="rect">
@@ -13570,7 +14136,7 @@
                 <a:ea typeface="Calibri" pitchFamily="34" charset="-122"/>
                 <a:cs typeface="Calibri" pitchFamily="34" charset="-120"/>
               </a:rPr>
-              <a:t>again</a:t>
+              <a:t>not closed, accessible</a:t>
             </a:r>
             <a:endParaRPr lang="en-US" sz="850" dirty="0"/>
           </a:p>
@@ -13584,7 +14150,7 @@
         </p:nvSpPr>
         <p:spPr>
           <a:xfrm>
-            <a:off x="4370832" y="2258568"/>
+            <a:off x="5803392" y="2258568"/>
             <a:ext cx="1828800" cy="292608"/>
           </a:xfrm>
           <a:prstGeom prst="rect">
@@ -13593,11 +14159,11 @@
             </a:avLst>
           </a:prstGeom>
           <a:solidFill>
-            <a:srgbClr val="CCFBF1"/>
+            <a:srgbClr val="FCE7F3"/>
           </a:solidFill>
           <a:ln w="19050">
             <a:solidFill>
-              <a:srgbClr val="0D9488"/>
+              <a:srgbClr val="DB2777"/>
             </a:solidFill>
             <a:prstDash val="solid"/>
           </a:ln>
@@ -13618,7 +14184,7 @@
         </p:nvSpPr>
         <p:spPr>
           <a:xfrm>
-            <a:off x="4370832" y="2258568"/>
+            <a:off x="5803392" y="2258568"/>
             <a:ext cx="1828800" cy="292608"/>
           </a:xfrm>
           <a:prstGeom prst="rect">
@@ -13637,13 +14203,13 @@
             <a:r>
               <a:rPr lang="en-US" sz="1300" b="1" dirty="0">
                 <a:solidFill>
-                  <a:srgbClr val="0F766E"/>
+                  <a:srgbClr val="9D174D"/>
                 </a:solidFill>
                 <a:latin typeface="Trebuchet MS" pitchFamily="34" charset="0"/>
                 <a:ea typeface="Trebuchet MS" pitchFamily="34" charset="-122"/>
                 <a:cs typeface="Trebuchet MS" pitchFamily="34" charset="-120"/>
               </a:rPr>
-              <a:t>open</a:t>
+              <a:t>ly</a:t>
             </a:r>
             <a:endParaRPr lang="en-US" sz="1300" dirty="0"/>
           </a:p>
@@ -13657,7 +14223,7 @@
         </p:nvSpPr>
         <p:spPr>
           <a:xfrm>
-            <a:off x="4370832" y="2569464"/>
+            <a:off x="5803392" y="2569464"/>
             <a:ext cx="1828800" cy="201168"/>
           </a:xfrm>
           <a:prstGeom prst="rect">
@@ -13682,7 +14248,7 @@
                 <a:ea typeface="Calibri" pitchFamily="34" charset="-122"/>
                 <a:cs typeface="Calibri" pitchFamily="34" charset="-120"/>
               </a:rPr>
-              <a:t>not closed</a:t>
+              <a:t>in a way that is</a:t>
             </a:r>
             <a:endParaRPr lang="en-US" sz="850" dirty="0"/>
           </a:p>
@@ -13696,30 +14262,23 @@
         </p:nvSpPr>
         <p:spPr>
           <a:xfrm>
-            <a:off x="6519672" y="2258568"/>
-            <a:ext cx="1828800" cy="292608"/>
+            <a:off x="365760" y="3273552"/>
+            <a:ext cx="1371600" cy="658368"/>
           </a:xfrm>
           <a:prstGeom prst="rect">
             <a:avLst>
-              <a:gd name="adj" fmla="val 25000"/>
+              <a:gd name="adj" fmla="val 8333"/>
             </a:avLst>
           </a:prstGeom>
           <a:solidFill>
-            <a:srgbClr val="FCE7F3"/>
-          </a:solidFill>
-          <a:ln w="19050">
-            <a:solidFill>
-              <a:srgbClr val="DB2777"/>
-            </a:solidFill>
-            <a:prstDash val="solid"/>
-          </a:ln>
-          <a:effectLst>
-            <a:outerShdw sx="100000" sy="100000" kx="0" ky="0" algn="bl" rotWithShape="0" blurRad="101600" dist="38100" dir="8100000">
-              <a:srgbClr val="000000">
-                <a:alpha val="12000"/>
-              </a:srgbClr>
-            </a:outerShdw>
-          </a:effectLst>
+            <a:srgbClr val="E2E8F0"/>
+          </a:solidFill>
+          <a:ln w="12700">
+            <a:solidFill>
+              <a:srgbClr val="E2E8F0"/>
+            </a:solidFill>
+            <a:prstDash val="solid"/>
+          </a:ln>
         </p:spPr>
       </p:sp>
       <p:sp>
@@ -13730,86 +14289,47 @@
         </p:nvSpPr>
         <p:spPr>
           <a:xfrm>
-            <a:off x="6519672" y="2258568"/>
-            <a:ext cx="1828800" cy="292608"/>
-          </a:xfrm>
-          <a:prstGeom prst="rect">
-            <a:avLst/>
-          </a:prstGeom>
-          <a:noFill/>
-          <a:ln/>
-        </p:spPr>
-        <p:txBody>
-          <a:bodyPr wrap="square" lIns="0" tIns="0" rIns="0" bIns="0" rtlCol="0" anchor="ctr"/>
-          <a:lstStyle/>
-          <a:p>
-            <a:pPr algn="ctr" indent="0" marL="0">
-              <a:buNone/>
-            </a:pPr>
-            <a:r>
-              <a:rPr lang="en-US" sz="1300" b="1" dirty="0">
-                <a:solidFill>
-                  <a:srgbClr val="9D174D"/>
+            <a:off x="365760" y="3273552"/>
+            <a:ext cx="1371600" cy="658368"/>
+          </a:xfrm>
+          <a:prstGeom prst="rect">
+            <a:avLst/>
+          </a:prstGeom>
+          <a:noFill/>
+          <a:ln/>
+        </p:spPr>
+        <p:txBody>
+          <a:bodyPr wrap="square" lIns="0" tIns="0" rIns="0" bIns="0" rtlCol="0" anchor="ctr"/>
+          <a:lstStyle/>
+          <a:p>
+            <a:pPr algn="ctr" indent="0" marL="0">
+              <a:buNone/>
+            </a:pPr>
+            <a:r>
+              <a:rPr lang="en-US" sz="1100" b="1" dirty="0">
+                <a:solidFill>
+                  <a:srgbClr val="475569"/>
                 </a:solidFill>
                 <a:latin typeface="Trebuchet MS" pitchFamily="34" charset="0"/>
                 <a:ea typeface="Trebuchet MS" pitchFamily="34" charset="-122"/>
                 <a:cs typeface="Trebuchet MS" pitchFamily="34" charset="-120"/>
               </a:rPr>
-              <a:t>ing</a:t>
-            </a:r>
-            <a:endParaRPr lang="en-US" sz="1300" dirty="0"/>
-          </a:p>
-        </p:txBody>
-      </p:sp>
-      <p:sp>
-        <p:nvSpPr>
-          <p:cNvPr id="24" name="Text 22"/>
-          <p:cNvSpPr/>
-          <p:nvPr/>
-        </p:nvSpPr>
-        <p:spPr>
-          <a:xfrm>
-            <a:off x="6519672" y="2569464"/>
-            <a:ext cx="1828800" cy="201168"/>
-          </a:xfrm>
-          <a:prstGeom prst="rect">
-            <a:avLst/>
-          </a:prstGeom>
-          <a:noFill/>
-          <a:ln/>
-        </p:spPr>
-        <p:txBody>
-          <a:bodyPr wrap="square" lIns="0" tIns="0" rIns="0" bIns="0" rtlCol="0" anchor="t"/>
-          <a:lstStyle/>
-          <a:p>
-            <a:pPr algn="ctr" indent="0" marL="0">
-              <a:buNone/>
-            </a:pPr>
-            <a:r>
-              <a:rPr lang="en-US" sz="850" dirty="0">
-                <a:solidFill>
-                  <a:srgbClr val="475569"/>
-                </a:solidFill>
-                <a:latin typeface="Calibri" pitchFamily="34" charset="0"/>
-                <a:ea typeface="Calibri" pitchFamily="34" charset="-122"/>
-                <a:cs typeface="Calibri" pitchFamily="34" charset="-120"/>
-              </a:rPr>
-              <a:t>action happening now</a:t>
-            </a:r>
-            <a:endParaRPr lang="en-US" sz="850" dirty="0"/>
-          </a:p>
-        </p:txBody>
-      </p:sp>
-      <p:sp>
-        <p:nvSpPr>
-          <p:cNvPr id="25" name="Shape 23"/>
-          <p:cNvSpPr/>
-          <p:nvPr/>
-        </p:nvSpPr>
-        <p:spPr>
-          <a:xfrm>
-            <a:off x="365760" y="3273552"/>
-            <a:ext cx="1371600" cy="658368"/>
+              <a:t>Syllables</a:t>
+            </a:r>
+            <a:endParaRPr lang="en-US" sz="1100" dirty="0"/>
+          </a:p>
+        </p:txBody>
+      </p:sp>
+      <p:sp>
+        <p:nvSpPr>
+          <p:cNvPr id="24" name="Shape 22"/>
+          <p:cNvSpPr/>
+          <p:nvPr/>
+        </p:nvSpPr>
+        <p:spPr>
+          <a:xfrm>
+            <a:off x="1874520" y="3273552"/>
+            <a:ext cx="6903720" cy="658368"/>
           </a:xfrm>
           <a:prstGeom prst="rect">
             <a:avLst>
@@ -13817,11 +14337,38 @@
             </a:avLst>
           </a:prstGeom>
           <a:solidFill>
-            <a:srgbClr val="E2E8F0"/>
-          </a:solidFill>
-          <a:ln w="12700">
-            <a:solidFill>
-              <a:srgbClr val="E2E8F0"/>
+            <a:srgbClr val="CCFBF1"/>
+          </a:solidFill>
+          <a:ln w="12700">
+            <a:solidFill>
+              <a:srgbClr val="0D9488"/>
+            </a:solidFill>
+            <a:prstDash val="solid"/>
+          </a:ln>
+        </p:spPr>
+      </p:sp>
+      <p:sp>
+        <p:nvSpPr>
+          <p:cNvPr id="25" name="Shape 23"/>
+          <p:cNvSpPr/>
+          <p:nvPr/>
+        </p:nvSpPr>
+        <p:spPr>
+          <a:xfrm>
+            <a:off x="2313432" y="3364992"/>
+            <a:ext cx="1645920" cy="475488"/>
+          </a:xfrm>
+          <a:prstGeom prst="rect">
+            <a:avLst>
+              <a:gd name="adj" fmla="val 9615"/>
+            </a:avLst>
+          </a:prstGeom>
+          <a:solidFill>
+            <a:srgbClr val="FFFFFF"/>
+          </a:solidFill>
+          <a:ln w="12700">
+            <a:solidFill>
+              <a:srgbClr val="0D9488"/>
             </a:solidFill>
             <a:prstDash val="solid"/>
           </a:ln>
@@ -13835,63 +14382,75 @@
         </p:nvSpPr>
         <p:spPr>
           <a:xfrm>
-            <a:off x="365760" y="3273552"/>
-            <a:ext cx="1371600" cy="658368"/>
-          </a:xfrm>
-          <a:prstGeom prst="rect">
-            <a:avLst/>
-          </a:prstGeom>
-          <a:noFill/>
-          <a:ln/>
-        </p:spPr>
-        <p:txBody>
-          <a:bodyPr wrap="square" lIns="0" tIns="0" rIns="0" bIns="0" rtlCol="0" anchor="ctr"/>
-          <a:lstStyle/>
-          <a:p>
-            <a:pPr algn="ctr" indent="0" marL="0">
-              <a:buNone/>
-            </a:pPr>
-            <a:r>
-              <a:rPr lang="en-US" sz="1100" b="1" dirty="0">
-                <a:solidFill>
-                  <a:srgbClr val="475569"/>
+            <a:off x="2313432" y="3364992"/>
+            <a:ext cx="1645920" cy="475488"/>
+          </a:xfrm>
+          <a:prstGeom prst="rect">
+            <a:avLst/>
+          </a:prstGeom>
+          <a:noFill/>
+          <a:ln/>
+        </p:spPr>
+        <p:txBody>
+          <a:bodyPr wrap="square" lIns="0" tIns="0" rIns="0" bIns="0" rtlCol="0" anchor="ctr"/>
+          <a:lstStyle/>
+          <a:p>
+            <a:pPr algn="ctr" indent="0" marL="0">
+              <a:buNone/>
+            </a:pPr>
+            <a:r>
+              <a:rPr lang="en-US" sz="1400" b="1" dirty="0">
+                <a:solidFill>
+                  <a:srgbClr val="0D9488"/>
                 </a:solidFill>
                 <a:latin typeface="Trebuchet MS" pitchFamily="34" charset="0"/>
                 <a:ea typeface="Trebuchet MS" pitchFamily="34" charset="-122"/>
                 <a:cs typeface="Trebuchet MS" pitchFamily="34" charset="-120"/>
               </a:rPr>
-              <a:t>Syllables</a:t>
-            </a:r>
-            <a:endParaRPr lang="en-US" sz="1100" dirty="0"/>
-          </a:p>
-        </p:txBody>
-      </p:sp>
-      <p:sp>
-        <p:nvSpPr>
-          <p:cNvPr id="27" name="Shape 25"/>
-          <p:cNvSpPr/>
-          <p:nvPr/>
-        </p:nvSpPr>
-        <p:spPr>
-          <a:xfrm>
-            <a:off x="1874520" y="3273552"/>
-            <a:ext cx="6903720" cy="658368"/>
-          </a:xfrm>
-          <a:prstGeom prst="rect">
-            <a:avLst>
-              <a:gd name="adj" fmla="val 8333"/>
-            </a:avLst>
-          </a:prstGeom>
-          <a:solidFill>
-            <a:srgbClr val="CCFBF1"/>
-          </a:solidFill>
-          <a:ln w="12700">
-            <a:solidFill>
-              <a:srgbClr val="0D9488"/>
-            </a:solidFill>
-            <a:prstDash val="solid"/>
-          </a:ln>
-        </p:spPr>
+              <a:t>o</a:t>
+            </a:r>
+            <a:endParaRPr lang="en-US" sz="1400" dirty="0"/>
+          </a:p>
+        </p:txBody>
+      </p:sp>
+      <p:sp>
+        <p:nvSpPr>
+          <p:cNvPr id="27" name="Text 25"/>
+          <p:cNvSpPr/>
+          <p:nvPr/>
+        </p:nvSpPr>
+        <p:spPr>
+          <a:xfrm>
+            <a:off x="3959352" y="3364992"/>
+            <a:ext cx="411480" cy="475488"/>
+          </a:xfrm>
+          <a:prstGeom prst="rect">
+            <a:avLst/>
+          </a:prstGeom>
+          <a:noFill/>
+          <a:ln/>
+        </p:spPr>
+        <p:txBody>
+          <a:bodyPr wrap="square" lIns="0" tIns="0" rIns="0" bIns="0" rtlCol="0" anchor="ctr"/>
+          <a:lstStyle/>
+          <a:p>
+            <a:pPr algn="ctr" indent="0" marL="0">
+              <a:buNone/>
+            </a:pPr>
+            <a:r>
+              <a:rPr lang="en-US" sz="1600" b="1" dirty="0">
+                <a:solidFill>
+                  <a:srgbClr val="0D9488"/>
+                </a:solidFill>
+                <a:latin typeface="Trebuchet MS" pitchFamily="34" charset="0"/>
+                <a:ea typeface="Trebuchet MS" pitchFamily="34" charset="-122"/>
+                <a:cs typeface="Trebuchet MS" pitchFamily="34" charset="-120"/>
+              </a:rPr>
+              <a:t>·</a:t>
+            </a:r>
+            <a:endParaRPr lang="en-US" sz="1600" dirty="0"/>
+          </a:p>
+        </p:txBody>
       </p:sp>
       <p:sp>
         <p:nvSpPr>
@@ -13901,8 +14460,8 @@
         </p:nvSpPr>
         <p:spPr>
           <a:xfrm>
-            <a:off x="1975104" y="3364992"/>
-            <a:ext cx="1554480" cy="475488"/>
+            <a:off x="4370832" y="3364992"/>
+            <a:ext cx="1645920" cy="475488"/>
           </a:xfrm>
           <a:prstGeom prst="rect">
             <a:avLst>
@@ -13928,8 +14487,8 @@
         </p:nvSpPr>
         <p:spPr>
           <a:xfrm>
-            <a:off x="1975104" y="3364992"/>
-            <a:ext cx="1554480" cy="475488"/>
+            <a:off x="4370832" y="3364992"/>
+            <a:ext cx="1645920" cy="475488"/>
           </a:xfrm>
           <a:prstGeom prst="rect">
             <a:avLst/>
@@ -13953,7 +14512,7 @@
                 <a:ea typeface="Trebuchet MS" pitchFamily="34" charset="-122"/>
                 <a:cs typeface="Trebuchet MS" pitchFamily="34" charset="-120"/>
               </a:rPr>
-              <a:t>re</a:t>
+              <a:t>pen</a:t>
             </a:r>
             <a:endParaRPr lang="en-US" sz="1400" dirty="0"/>
           </a:p>
@@ -13967,8 +14526,8 @@
         </p:nvSpPr>
         <p:spPr>
           <a:xfrm>
-            <a:off x="3529584" y="3364992"/>
-            <a:ext cx="73152" cy="475488"/>
+            <a:off x="6016752" y="3364992"/>
+            <a:ext cx="411480" cy="475488"/>
           </a:xfrm>
           <a:prstGeom prst="rect">
             <a:avLst/>
@@ -14006,8 +14565,8 @@
         </p:nvSpPr>
         <p:spPr>
           <a:xfrm>
-            <a:off x="3602736" y="3364992"/>
-            <a:ext cx="1554480" cy="475488"/>
+            <a:off x="6428232" y="3364992"/>
+            <a:ext cx="1645920" cy="475488"/>
           </a:xfrm>
           <a:prstGeom prst="rect">
             <a:avLst>
@@ -14033,8 +14592,8 @@
         </p:nvSpPr>
         <p:spPr>
           <a:xfrm>
-            <a:off x="3602736" y="3364992"/>
-            <a:ext cx="1554480" cy="475488"/>
+            <a:off x="6428232" y="3364992"/>
+            <a:ext cx="1645920" cy="475488"/>
           </a:xfrm>
           <a:prstGeom prst="rect">
             <a:avLst/>
@@ -14058,7 +14617,7 @@
                 <a:ea typeface="Trebuchet MS" pitchFamily="34" charset="-122"/>
                 <a:cs typeface="Trebuchet MS" pitchFamily="34" charset="-120"/>
               </a:rPr>
-              <a:t>o</a:t>
+              <a:t>ly</a:t>
             </a:r>
             <a:endParaRPr lang="en-US" sz="1400" dirty="0"/>
           </a:p>
@@ -14066,224 +14625,80 @@
       </p:sp>
       <p:sp>
         <p:nvSpPr>
-          <p:cNvPr id="33" name="Text 31"/>
-          <p:cNvSpPr/>
-          <p:nvPr/>
-        </p:nvSpPr>
-        <p:spPr>
-          <a:xfrm>
-            <a:off x="5157216" y="3364992"/>
-            <a:ext cx="73152" cy="475488"/>
-          </a:xfrm>
-          <a:prstGeom prst="rect">
-            <a:avLst/>
-          </a:prstGeom>
-          <a:noFill/>
-          <a:ln/>
-        </p:spPr>
-        <p:txBody>
-          <a:bodyPr wrap="square" lIns="0" tIns="0" rIns="0" bIns="0" rtlCol="0" anchor="ctr"/>
-          <a:lstStyle/>
-          <a:p>
-            <a:pPr algn="ctr" indent="0" marL="0">
-              <a:buNone/>
-            </a:pPr>
-            <a:r>
-              <a:rPr lang="en-US" sz="1600" b="1" dirty="0">
-                <a:solidFill>
-                  <a:srgbClr val="0D9488"/>
+          <p:cNvPr id="33" name="Shape 31"/>
+          <p:cNvSpPr/>
+          <p:nvPr/>
+        </p:nvSpPr>
+        <p:spPr>
+          <a:xfrm>
+            <a:off x="365760" y="4096512"/>
+            <a:ext cx="1371600" cy="804672"/>
+          </a:xfrm>
+          <a:prstGeom prst="rect">
+            <a:avLst>
+              <a:gd name="adj" fmla="val 6818"/>
+            </a:avLst>
+          </a:prstGeom>
+          <a:solidFill>
+            <a:srgbClr val="E2E8F0"/>
+          </a:solidFill>
+          <a:ln w="12700">
+            <a:solidFill>
+              <a:srgbClr val="E2E8F0"/>
+            </a:solidFill>
+            <a:prstDash val="solid"/>
+          </a:ln>
+        </p:spPr>
+      </p:sp>
+      <p:sp>
+        <p:nvSpPr>
+          <p:cNvPr id="34" name="Text 32"/>
+          <p:cNvSpPr/>
+          <p:nvPr/>
+        </p:nvSpPr>
+        <p:spPr>
+          <a:xfrm>
+            <a:off x="365760" y="4096512"/>
+            <a:ext cx="1371600" cy="804672"/>
+          </a:xfrm>
+          <a:prstGeom prst="rect">
+            <a:avLst/>
+          </a:prstGeom>
+          <a:noFill/>
+          <a:ln/>
+        </p:spPr>
+        <p:txBody>
+          <a:bodyPr wrap="square" lIns="0" tIns="0" rIns="0" bIns="0" rtlCol="0" anchor="ctr"/>
+          <a:lstStyle/>
+          <a:p>
+            <a:pPr algn="ctr" indent="0" marL="0">
+              <a:buNone/>
+            </a:pPr>
+            <a:r>
+              <a:rPr lang="en-US" sz="1100" b="1" dirty="0">
+                <a:solidFill>
+                  <a:srgbClr val="475569"/>
                 </a:solidFill>
                 <a:latin typeface="Trebuchet MS" pitchFamily="34" charset="0"/>
                 <a:ea typeface="Trebuchet MS" pitchFamily="34" charset="-122"/>
                 <a:cs typeface="Trebuchet MS" pitchFamily="34" charset="-120"/>
               </a:rPr>
-              <a:t>·</a:t>
-            </a:r>
-            <a:endParaRPr lang="en-US" sz="1600" dirty="0"/>
-          </a:p>
-        </p:txBody>
-      </p:sp>
-      <p:sp>
-        <p:nvSpPr>
-          <p:cNvPr id="34" name="Shape 32"/>
-          <p:cNvSpPr/>
-          <p:nvPr/>
-        </p:nvSpPr>
-        <p:spPr>
-          <a:xfrm>
-            <a:off x="5230368" y="3364992"/>
-            <a:ext cx="1554480" cy="475488"/>
-          </a:xfrm>
-          <a:prstGeom prst="rect">
-            <a:avLst>
-              <a:gd name="adj" fmla="val 9615"/>
-            </a:avLst>
-          </a:prstGeom>
-          <a:solidFill>
-            <a:srgbClr val="FFFFFF"/>
-          </a:solidFill>
-          <a:ln w="12700">
-            <a:solidFill>
-              <a:srgbClr val="0D9488"/>
-            </a:solidFill>
-            <a:prstDash val="solid"/>
-          </a:ln>
-        </p:spPr>
-      </p:sp>
-      <p:sp>
-        <p:nvSpPr>
-          <p:cNvPr id="35" name="Text 33"/>
-          <p:cNvSpPr/>
-          <p:nvPr/>
-        </p:nvSpPr>
-        <p:spPr>
-          <a:xfrm>
-            <a:off x="5230368" y="3364992"/>
-            <a:ext cx="1554480" cy="475488"/>
-          </a:xfrm>
-          <a:prstGeom prst="rect">
-            <a:avLst/>
-          </a:prstGeom>
-          <a:noFill/>
-          <a:ln/>
-        </p:spPr>
-        <p:txBody>
-          <a:bodyPr wrap="square" lIns="0" tIns="0" rIns="0" bIns="0" rtlCol="0" anchor="ctr"/>
-          <a:lstStyle/>
-          <a:p>
-            <a:pPr algn="ctr" indent="0" marL="0">
-              <a:buNone/>
-            </a:pPr>
-            <a:r>
-              <a:rPr lang="en-US" sz="1400" b="1" dirty="0">
-                <a:solidFill>
-                  <a:srgbClr val="0D9488"/>
-                </a:solidFill>
-                <a:latin typeface="Trebuchet MS" pitchFamily="34" charset="0"/>
-                <a:ea typeface="Trebuchet MS" pitchFamily="34" charset="-122"/>
-                <a:cs typeface="Trebuchet MS" pitchFamily="34" charset="-120"/>
-              </a:rPr>
-              <a:t>pen</a:t>
-            </a:r>
-            <a:endParaRPr lang="en-US" sz="1400" dirty="0"/>
-          </a:p>
-        </p:txBody>
-      </p:sp>
-      <p:sp>
-        <p:nvSpPr>
-          <p:cNvPr id="36" name="Text 34"/>
-          <p:cNvSpPr/>
-          <p:nvPr/>
-        </p:nvSpPr>
-        <p:spPr>
-          <a:xfrm>
-            <a:off x="6784848" y="3364992"/>
-            <a:ext cx="73152" cy="475488"/>
-          </a:xfrm>
-          <a:prstGeom prst="rect">
-            <a:avLst/>
-          </a:prstGeom>
-          <a:noFill/>
-          <a:ln/>
-        </p:spPr>
-        <p:txBody>
-          <a:bodyPr wrap="square" lIns="0" tIns="0" rIns="0" bIns="0" rtlCol="0" anchor="ctr"/>
-          <a:lstStyle/>
-          <a:p>
-            <a:pPr algn="ctr" indent="0" marL="0">
-              <a:buNone/>
-            </a:pPr>
-            <a:r>
-              <a:rPr lang="en-US" sz="1600" b="1" dirty="0">
-                <a:solidFill>
-                  <a:srgbClr val="0D9488"/>
-                </a:solidFill>
-                <a:latin typeface="Trebuchet MS" pitchFamily="34" charset="0"/>
-                <a:ea typeface="Trebuchet MS" pitchFamily="34" charset="-122"/>
-                <a:cs typeface="Trebuchet MS" pitchFamily="34" charset="-120"/>
-              </a:rPr>
-              <a:t>·</a:t>
-            </a:r>
-            <a:endParaRPr lang="en-US" sz="1600" dirty="0"/>
-          </a:p>
-        </p:txBody>
-      </p:sp>
-      <p:sp>
-        <p:nvSpPr>
-          <p:cNvPr id="37" name="Shape 35"/>
-          <p:cNvSpPr/>
-          <p:nvPr/>
-        </p:nvSpPr>
-        <p:spPr>
-          <a:xfrm>
-            <a:off x="6858000" y="3364992"/>
-            <a:ext cx="1554480" cy="475488"/>
-          </a:xfrm>
-          <a:prstGeom prst="rect">
-            <a:avLst>
-              <a:gd name="adj" fmla="val 9615"/>
-            </a:avLst>
-          </a:prstGeom>
-          <a:solidFill>
-            <a:srgbClr val="FFFFFF"/>
-          </a:solidFill>
-          <a:ln w="12700">
-            <a:solidFill>
-              <a:srgbClr val="0D9488"/>
-            </a:solidFill>
-            <a:prstDash val="solid"/>
-          </a:ln>
-        </p:spPr>
-      </p:sp>
-      <p:sp>
-        <p:nvSpPr>
-          <p:cNvPr id="38" name="Text 36"/>
-          <p:cNvSpPr/>
-          <p:nvPr/>
-        </p:nvSpPr>
-        <p:spPr>
-          <a:xfrm>
-            <a:off x="6858000" y="3364992"/>
-            <a:ext cx="1554480" cy="475488"/>
-          </a:xfrm>
-          <a:prstGeom prst="rect">
-            <a:avLst/>
-          </a:prstGeom>
-          <a:noFill/>
-          <a:ln/>
-        </p:spPr>
-        <p:txBody>
-          <a:bodyPr wrap="square" lIns="0" tIns="0" rIns="0" bIns="0" rtlCol="0" anchor="ctr"/>
-          <a:lstStyle/>
-          <a:p>
-            <a:pPr algn="ctr" indent="0" marL="0">
-              <a:buNone/>
-            </a:pPr>
-            <a:r>
-              <a:rPr lang="en-US" sz="1400" b="1" dirty="0">
-                <a:solidFill>
-                  <a:srgbClr val="0D9488"/>
-                </a:solidFill>
-                <a:latin typeface="Trebuchet MS" pitchFamily="34" charset="0"/>
-                <a:ea typeface="Trebuchet MS" pitchFamily="34" charset="-122"/>
-                <a:cs typeface="Trebuchet MS" pitchFamily="34" charset="-120"/>
-              </a:rPr>
-              <a:t>ing</a:t>
-            </a:r>
-            <a:endParaRPr lang="en-US" sz="1400" dirty="0"/>
-          </a:p>
-        </p:txBody>
-      </p:sp>
-      <p:sp>
-        <p:nvSpPr>
-          <p:cNvPr id="39" name="Shape 37"/>
-          <p:cNvSpPr/>
-          <p:nvPr/>
-        </p:nvSpPr>
-        <p:spPr>
-          <a:xfrm>
-            <a:off x="365760" y="4096512"/>
-            <a:ext cx="1371600" cy="804672"/>
+              <a:t>Phonemes</a:t>
+            </a:r>
+            <a:endParaRPr lang="en-US" sz="1100" dirty="0"/>
+          </a:p>
+        </p:txBody>
+      </p:sp>
+      <p:sp>
+        <p:nvSpPr>
+          <p:cNvPr id="35" name="Shape 33"/>
+          <p:cNvSpPr/>
+          <p:nvPr/>
+        </p:nvSpPr>
+        <p:spPr>
+          <a:xfrm>
+            <a:off x="1874520" y="4096512"/>
+            <a:ext cx="6903720" cy="804672"/>
           </a:xfrm>
           <a:prstGeom prst="rect">
             <a:avLst>
@@ -14291,85 +14706,19 @@
             </a:avLst>
           </a:prstGeom>
           <a:solidFill>
-            <a:srgbClr val="E2E8F0"/>
+            <a:srgbClr val="F8FAFC"/>
           </a:solidFill>
           <a:ln w="12700">
             <a:solidFill>
               <a:srgbClr val="E2E8F0"/>
             </a:solidFill>
-            <a:prstDash val="solid"/>
-          </a:ln>
-        </p:spPr>
-      </p:sp>
-      <p:sp>
-        <p:nvSpPr>
-          <p:cNvPr id="40" name="Text 38"/>
-          <p:cNvSpPr/>
-          <p:nvPr/>
-        </p:nvSpPr>
-        <p:spPr>
-          <a:xfrm>
-            <a:off x="365760" y="4096512"/>
-            <a:ext cx="1371600" cy="804672"/>
-          </a:xfrm>
-          <a:prstGeom prst="rect">
-            <a:avLst/>
-          </a:prstGeom>
-          <a:noFill/>
-          <a:ln/>
-        </p:spPr>
-        <p:txBody>
-          <a:bodyPr wrap="square" lIns="0" tIns="0" rIns="0" bIns="0" rtlCol="0" anchor="ctr"/>
-          <a:lstStyle/>
-          <a:p>
-            <a:pPr algn="ctr" indent="0" marL="0">
-              <a:buNone/>
-            </a:pPr>
-            <a:r>
-              <a:rPr lang="en-US" sz="1100" b="1" dirty="0">
-                <a:solidFill>
-                  <a:srgbClr val="475569"/>
-                </a:solidFill>
-                <a:latin typeface="Trebuchet MS" pitchFamily="34" charset="0"/>
-                <a:ea typeface="Trebuchet MS" pitchFamily="34" charset="-122"/>
-                <a:cs typeface="Trebuchet MS" pitchFamily="34" charset="-120"/>
-              </a:rPr>
-              <a:t>Phonemes</a:t>
-            </a:r>
-            <a:endParaRPr lang="en-US" sz="1100" dirty="0"/>
-          </a:p>
-        </p:txBody>
-      </p:sp>
-      <p:sp>
-        <p:nvSpPr>
-          <p:cNvPr id="41" name="Shape 39"/>
-          <p:cNvSpPr/>
-          <p:nvPr/>
-        </p:nvSpPr>
-        <p:spPr>
-          <a:xfrm>
-            <a:off x="1874520" y="4096512"/>
-            <a:ext cx="6903720" cy="804672"/>
-          </a:xfrm>
-          <a:prstGeom prst="rect">
-            <a:avLst>
-              <a:gd name="adj" fmla="val 6818"/>
-            </a:avLst>
-          </a:prstGeom>
-          <a:solidFill>
-            <a:srgbClr val="F8FAFC"/>
-          </a:solidFill>
-          <a:ln w="12700">
-            <a:solidFill>
-              <a:srgbClr val="E2E8F0"/>
-            </a:solidFill>
             <a:prstDash val="dash"/>
           </a:ln>
         </p:spPr>
       </p:sp>
       <p:sp>
         <p:nvSpPr>
-          <p:cNvPr id="42" name="Text 40"/>
+          <p:cNvPr id="36" name="Text 34"/>
           <p:cNvSpPr/>
           <p:nvPr/>
         </p:nvSpPr>
@@ -14601,7 +14950,7 @@
                 <a:ea typeface="Calibri" pitchFamily="34" charset="-122"/>
                 <a:cs typeface="Calibri" pitchFamily="34" charset="-120"/>
               </a:rPr>
-              <a:t>Root 'open' — not closed or blocked</a:t>
+              <a:t>Root 'open' — not closed, accessible, uncovered</a:t>
             </a:r>
             <a:endParaRPr lang="en-US" sz="1600" dirty="0"/>
           </a:p>
@@ -14957,7 +15306,7 @@
                 <a:ea typeface="Calibri" pitchFamily="34" charset="-122"/>
                 <a:cs typeface="Calibri" pitchFamily="34" charset="-120"/>
               </a:rPr>
-              <a:t>Word Labs  •  wordlabs.app  •  Root: 'open' = not closed or blocked</a:t>
+              <a:t>Word Labs  •  wordlabs.app  •  Root: 'open' = not closed, accessible, uncovered</a:t>
             </a:r>
             <a:endParaRPr lang="en-US" sz="800" dirty="0"/>
           </a:p>
@@ -15096,7 +15445,7 @@
                 <a:ea typeface="Trebuchet MS" pitchFamily="34" charset="-122"/>
                 <a:cs typeface="Trebuchet MS" pitchFamily="34" charset="-120"/>
               </a:rPr>
-              <a:t>reopening</a:t>
+              <a:t>openly</a:t>
             </a:r>
             <a:endParaRPr lang="en-US" sz="2800" dirty="0"/>
           </a:p>
@@ -15176,7 +15525,7 @@
         </p:nvSpPr>
         <p:spPr>
           <a:xfrm>
-            <a:off x="2221992" y="2258568"/>
+            <a:off x="2938272" y="2258568"/>
             <a:ext cx="1828800" cy="292608"/>
           </a:xfrm>
           <a:prstGeom prst="rect">
@@ -15185,11 +15534,11 @@
             </a:avLst>
           </a:prstGeom>
           <a:solidFill>
-            <a:srgbClr val="DDD6FE"/>
+            <a:srgbClr val="CCFBF1"/>
           </a:solidFill>
           <a:ln w="19050">
             <a:solidFill>
-              <a:srgbClr val="7C3AED"/>
+              <a:srgbClr val="0D9488"/>
             </a:solidFill>
             <a:prstDash val="solid"/>
           </a:ln>
@@ -15210,7 +15559,7 @@
         </p:nvSpPr>
         <p:spPr>
           <a:xfrm>
-            <a:off x="2221992" y="2258568"/>
+            <a:off x="2938272" y="2258568"/>
             <a:ext cx="1828800" cy="292608"/>
           </a:xfrm>
           <a:prstGeom prst="rect">
@@ -15229,13 +15578,13 @@
             <a:r>
               <a:rPr lang="en-US" sz="1300" b="1" dirty="0">
                 <a:solidFill>
-                  <a:srgbClr val="4C1D95"/>
+                  <a:srgbClr val="0F766E"/>
                 </a:solidFill>
                 <a:latin typeface="Trebuchet MS" pitchFamily="34" charset="0"/>
                 <a:ea typeface="Trebuchet MS" pitchFamily="34" charset="-122"/>
                 <a:cs typeface="Trebuchet MS" pitchFamily="34" charset="-120"/>
               </a:rPr>
-              <a:t>re</a:t>
+              <a:t>open</a:t>
             </a:r>
             <a:endParaRPr lang="en-US" sz="1300" dirty="0"/>
           </a:p>
@@ -15249,7 +15598,7 @@
         </p:nvSpPr>
         <p:spPr>
           <a:xfrm>
-            <a:off x="2221992" y="2569464"/>
+            <a:off x="2938272" y="2569464"/>
             <a:ext cx="1828800" cy="201168"/>
           </a:xfrm>
           <a:prstGeom prst="rect">
@@ -15274,7 +15623,7 @@
                 <a:ea typeface="Calibri" pitchFamily="34" charset="-122"/>
                 <a:cs typeface="Calibri" pitchFamily="34" charset="-120"/>
               </a:rPr>
-              <a:t>again</a:t>
+              <a:t>not closed, accessible</a:t>
             </a:r>
             <a:endParaRPr lang="en-US" sz="850" dirty="0"/>
           </a:p>
@@ -15288,7 +15637,7 @@
         </p:nvSpPr>
         <p:spPr>
           <a:xfrm>
-            <a:off x="4370832" y="2258568"/>
+            <a:off x="5803392" y="2258568"/>
             <a:ext cx="1828800" cy="292608"/>
           </a:xfrm>
           <a:prstGeom prst="rect">
@@ -15297,11 +15646,11 @@
             </a:avLst>
           </a:prstGeom>
           <a:solidFill>
-            <a:srgbClr val="CCFBF1"/>
+            <a:srgbClr val="FCE7F3"/>
           </a:solidFill>
           <a:ln w="19050">
             <a:solidFill>
-              <a:srgbClr val="0D9488"/>
+              <a:srgbClr val="DB2777"/>
             </a:solidFill>
             <a:prstDash val="solid"/>
           </a:ln>
@@ -15322,7 +15671,7 @@
         </p:nvSpPr>
         <p:spPr>
           <a:xfrm>
-            <a:off x="4370832" y="2258568"/>
+            <a:off x="5803392" y="2258568"/>
             <a:ext cx="1828800" cy="292608"/>
           </a:xfrm>
           <a:prstGeom prst="rect">
@@ -15341,13 +15690,13 @@
             <a:r>
               <a:rPr lang="en-US" sz="1300" b="1" dirty="0">
                 <a:solidFill>
-                  <a:srgbClr val="0F766E"/>
+                  <a:srgbClr val="9D174D"/>
                 </a:solidFill>
                 <a:latin typeface="Trebuchet MS" pitchFamily="34" charset="0"/>
                 <a:ea typeface="Trebuchet MS" pitchFamily="34" charset="-122"/>
                 <a:cs typeface="Trebuchet MS" pitchFamily="34" charset="-120"/>
               </a:rPr>
-              <a:t>open</a:t>
+              <a:t>ly</a:t>
             </a:r>
             <a:endParaRPr lang="en-US" sz="1300" dirty="0"/>
           </a:p>
@@ -15361,7 +15710,7 @@
         </p:nvSpPr>
         <p:spPr>
           <a:xfrm>
-            <a:off x="4370832" y="2569464"/>
+            <a:off x="5803392" y="2569464"/>
             <a:ext cx="1828800" cy="201168"/>
           </a:xfrm>
           <a:prstGeom prst="rect">
@@ -15386,7 +15735,7 @@
                 <a:ea typeface="Calibri" pitchFamily="34" charset="-122"/>
                 <a:cs typeface="Calibri" pitchFamily="34" charset="-120"/>
               </a:rPr>
-              <a:t>not closed</a:t>
+              <a:t>in a way that is</a:t>
             </a:r>
             <a:endParaRPr lang="en-US" sz="850" dirty="0"/>
           </a:p>
@@ -15400,30 +15749,23 @@
         </p:nvSpPr>
         <p:spPr>
           <a:xfrm>
-            <a:off x="6519672" y="2258568"/>
-            <a:ext cx="1828800" cy="292608"/>
+            <a:off x="365760" y="3273552"/>
+            <a:ext cx="1371600" cy="658368"/>
           </a:xfrm>
           <a:prstGeom prst="rect">
             <a:avLst>
-              <a:gd name="adj" fmla="val 25000"/>
+              <a:gd name="adj" fmla="val 8333"/>
             </a:avLst>
           </a:prstGeom>
           <a:solidFill>
-            <a:srgbClr val="FCE7F3"/>
-          </a:solidFill>
-          <a:ln w="19050">
-            <a:solidFill>
-              <a:srgbClr val="DB2777"/>
-            </a:solidFill>
-            <a:prstDash val="solid"/>
-          </a:ln>
-          <a:effectLst>
-            <a:outerShdw sx="100000" sy="100000" kx="0" ky="0" algn="bl" rotWithShape="0" blurRad="101600" dist="38100" dir="8100000">
-              <a:srgbClr val="000000">
-                <a:alpha val="12000"/>
-              </a:srgbClr>
-            </a:outerShdw>
-          </a:effectLst>
+            <a:srgbClr val="E2E8F0"/>
+          </a:solidFill>
+          <a:ln w="12700">
+            <a:solidFill>
+              <a:srgbClr val="E2E8F0"/>
+            </a:solidFill>
+            <a:prstDash val="solid"/>
+          </a:ln>
         </p:spPr>
       </p:sp>
       <p:sp>
@@ -15434,86 +15776,47 @@
         </p:nvSpPr>
         <p:spPr>
           <a:xfrm>
-            <a:off x="6519672" y="2258568"/>
-            <a:ext cx="1828800" cy="292608"/>
-          </a:xfrm>
-          <a:prstGeom prst="rect">
-            <a:avLst/>
-          </a:prstGeom>
-          <a:noFill/>
-          <a:ln/>
-        </p:spPr>
-        <p:txBody>
-          <a:bodyPr wrap="square" lIns="0" tIns="0" rIns="0" bIns="0" rtlCol="0" anchor="ctr"/>
-          <a:lstStyle/>
-          <a:p>
-            <a:pPr algn="ctr" indent="0" marL="0">
-              <a:buNone/>
-            </a:pPr>
-            <a:r>
-              <a:rPr lang="en-US" sz="1300" b="1" dirty="0">
-                <a:solidFill>
-                  <a:srgbClr val="9D174D"/>
+            <a:off x="365760" y="3273552"/>
+            <a:ext cx="1371600" cy="658368"/>
+          </a:xfrm>
+          <a:prstGeom prst="rect">
+            <a:avLst/>
+          </a:prstGeom>
+          <a:noFill/>
+          <a:ln/>
+        </p:spPr>
+        <p:txBody>
+          <a:bodyPr wrap="square" lIns="0" tIns="0" rIns="0" bIns="0" rtlCol="0" anchor="ctr"/>
+          <a:lstStyle/>
+          <a:p>
+            <a:pPr algn="ctr" indent="0" marL="0">
+              <a:buNone/>
+            </a:pPr>
+            <a:r>
+              <a:rPr lang="en-US" sz="1100" b="1" dirty="0">
+                <a:solidFill>
+                  <a:srgbClr val="475569"/>
                 </a:solidFill>
                 <a:latin typeface="Trebuchet MS" pitchFamily="34" charset="0"/>
                 <a:ea typeface="Trebuchet MS" pitchFamily="34" charset="-122"/>
                 <a:cs typeface="Trebuchet MS" pitchFamily="34" charset="-120"/>
               </a:rPr>
-              <a:t>ing</a:t>
-            </a:r>
-            <a:endParaRPr lang="en-US" sz="1300" dirty="0"/>
-          </a:p>
-        </p:txBody>
-      </p:sp>
-      <p:sp>
-        <p:nvSpPr>
-          <p:cNvPr id="24" name="Text 22"/>
-          <p:cNvSpPr/>
-          <p:nvPr/>
-        </p:nvSpPr>
-        <p:spPr>
-          <a:xfrm>
-            <a:off x="6519672" y="2569464"/>
-            <a:ext cx="1828800" cy="201168"/>
-          </a:xfrm>
-          <a:prstGeom prst="rect">
-            <a:avLst/>
-          </a:prstGeom>
-          <a:noFill/>
-          <a:ln/>
-        </p:spPr>
-        <p:txBody>
-          <a:bodyPr wrap="square" lIns="0" tIns="0" rIns="0" bIns="0" rtlCol="0" anchor="t"/>
-          <a:lstStyle/>
-          <a:p>
-            <a:pPr algn="ctr" indent="0" marL="0">
-              <a:buNone/>
-            </a:pPr>
-            <a:r>
-              <a:rPr lang="en-US" sz="850" dirty="0">
-                <a:solidFill>
-                  <a:srgbClr val="475569"/>
-                </a:solidFill>
-                <a:latin typeface="Calibri" pitchFamily="34" charset="0"/>
-                <a:ea typeface="Calibri" pitchFamily="34" charset="-122"/>
-                <a:cs typeface="Calibri" pitchFamily="34" charset="-120"/>
-              </a:rPr>
-              <a:t>action happening now</a:t>
-            </a:r>
-            <a:endParaRPr lang="en-US" sz="850" dirty="0"/>
-          </a:p>
-        </p:txBody>
-      </p:sp>
-      <p:sp>
-        <p:nvSpPr>
-          <p:cNvPr id="25" name="Shape 23"/>
-          <p:cNvSpPr/>
-          <p:nvPr/>
-        </p:nvSpPr>
-        <p:spPr>
-          <a:xfrm>
-            <a:off x="365760" y="3273552"/>
-            <a:ext cx="1371600" cy="658368"/>
+              <a:t>Syllables</a:t>
+            </a:r>
+            <a:endParaRPr lang="en-US" sz="1100" dirty="0"/>
+          </a:p>
+        </p:txBody>
+      </p:sp>
+      <p:sp>
+        <p:nvSpPr>
+          <p:cNvPr id="24" name="Shape 22"/>
+          <p:cNvSpPr/>
+          <p:nvPr/>
+        </p:nvSpPr>
+        <p:spPr>
+          <a:xfrm>
+            <a:off x="1874520" y="3273552"/>
+            <a:ext cx="6903720" cy="658368"/>
           </a:xfrm>
           <a:prstGeom prst="rect">
             <a:avLst>
@@ -15521,11 +15824,38 @@
             </a:avLst>
           </a:prstGeom>
           <a:solidFill>
-            <a:srgbClr val="E2E8F0"/>
-          </a:solidFill>
-          <a:ln w="12700">
-            <a:solidFill>
-              <a:srgbClr val="E2E8F0"/>
+            <a:srgbClr val="CCFBF1"/>
+          </a:solidFill>
+          <a:ln w="12700">
+            <a:solidFill>
+              <a:srgbClr val="0D9488"/>
+            </a:solidFill>
+            <a:prstDash val="solid"/>
+          </a:ln>
+        </p:spPr>
+      </p:sp>
+      <p:sp>
+        <p:nvSpPr>
+          <p:cNvPr id="25" name="Shape 23"/>
+          <p:cNvSpPr/>
+          <p:nvPr/>
+        </p:nvSpPr>
+        <p:spPr>
+          <a:xfrm>
+            <a:off x="2313432" y="3364992"/>
+            <a:ext cx="1645920" cy="475488"/>
+          </a:xfrm>
+          <a:prstGeom prst="rect">
+            <a:avLst>
+              <a:gd name="adj" fmla="val 9615"/>
+            </a:avLst>
+          </a:prstGeom>
+          <a:solidFill>
+            <a:srgbClr val="FFFFFF"/>
+          </a:solidFill>
+          <a:ln w="12700">
+            <a:solidFill>
+              <a:srgbClr val="0D9488"/>
             </a:solidFill>
             <a:prstDash val="solid"/>
           </a:ln>
@@ -15539,32 +15869,308 @@
         </p:nvSpPr>
         <p:spPr>
           <a:xfrm>
-            <a:off x="365760" y="3273552"/>
-            <a:ext cx="1371600" cy="658368"/>
-          </a:xfrm>
-          <a:prstGeom prst="rect">
-            <a:avLst/>
-          </a:prstGeom>
-          <a:noFill/>
-          <a:ln/>
-        </p:spPr>
-        <p:txBody>
-          <a:bodyPr wrap="square" lIns="0" tIns="0" rIns="0" bIns="0" rtlCol="0" anchor="ctr"/>
-          <a:lstStyle/>
-          <a:p>
-            <a:pPr algn="ctr" indent="0" marL="0">
-              <a:buNone/>
-            </a:pPr>
-            <a:r>
-              <a:rPr lang="en-US" sz="1100" b="1" dirty="0">
-                <a:solidFill>
-                  <a:srgbClr val="475569"/>
+            <a:off x="2313432" y="3364992"/>
+            <a:ext cx="1645920" cy="475488"/>
+          </a:xfrm>
+          <a:prstGeom prst="rect">
+            <a:avLst/>
+          </a:prstGeom>
+          <a:noFill/>
+          <a:ln/>
+        </p:spPr>
+        <p:txBody>
+          <a:bodyPr wrap="square" lIns="0" tIns="0" rIns="0" bIns="0" rtlCol="0" anchor="ctr"/>
+          <a:lstStyle/>
+          <a:p>
+            <a:pPr algn="ctr" indent="0" marL="0">
+              <a:buNone/>
+            </a:pPr>
+            <a:r>
+              <a:rPr lang="en-US" sz="1400" b="1" dirty="0">
+                <a:solidFill>
+                  <a:srgbClr val="0D9488"/>
                 </a:solidFill>
                 <a:latin typeface="Trebuchet MS" pitchFamily="34" charset="0"/>
                 <a:ea typeface="Trebuchet MS" pitchFamily="34" charset="-122"/>
                 <a:cs typeface="Trebuchet MS" pitchFamily="34" charset="-120"/>
               </a:rPr>
-              <a:t>Syllables</a:t>
+              <a:t>o</a:t>
+            </a:r>
+            <a:endParaRPr lang="en-US" sz="1400" dirty="0"/>
+          </a:p>
+        </p:txBody>
+      </p:sp>
+      <p:sp>
+        <p:nvSpPr>
+          <p:cNvPr id="27" name="Text 25"/>
+          <p:cNvSpPr/>
+          <p:nvPr/>
+        </p:nvSpPr>
+        <p:spPr>
+          <a:xfrm>
+            <a:off x="3959352" y="3364992"/>
+            <a:ext cx="411480" cy="475488"/>
+          </a:xfrm>
+          <a:prstGeom prst="rect">
+            <a:avLst/>
+          </a:prstGeom>
+          <a:noFill/>
+          <a:ln/>
+        </p:spPr>
+        <p:txBody>
+          <a:bodyPr wrap="square" lIns="0" tIns="0" rIns="0" bIns="0" rtlCol="0" anchor="ctr"/>
+          <a:lstStyle/>
+          <a:p>
+            <a:pPr algn="ctr" indent="0" marL="0">
+              <a:buNone/>
+            </a:pPr>
+            <a:r>
+              <a:rPr lang="en-US" sz="1600" b="1" dirty="0">
+                <a:solidFill>
+                  <a:srgbClr val="0D9488"/>
+                </a:solidFill>
+                <a:latin typeface="Trebuchet MS" pitchFamily="34" charset="0"/>
+                <a:ea typeface="Trebuchet MS" pitchFamily="34" charset="-122"/>
+                <a:cs typeface="Trebuchet MS" pitchFamily="34" charset="-120"/>
+              </a:rPr>
+              <a:t>·</a:t>
+            </a:r>
+            <a:endParaRPr lang="en-US" sz="1600" dirty="0"/>
+          </a:p>
+        </p:txBody>
+      </p:sp>
+      <p:sp>
+        <p:nvSpPr>
+          <p:cNvPr id="28" name="Shape 26"/>
+          <p:cNvSpPr/>
+          <p:nvPr/>
+        </p:nvSpPr>
+        <p:spPr>
+          <a:xfrm>
+            <a:off x="4370832" y="3364992"/>
+            <a:ext cx="1645920" cy="475488"/>
+          </a:xfrm>
+          <a:prstGeom prst="rect">
+            <a:avLst>
+              <a:gd name="adj" fmla="val 9615"/>
+            </a:avLst>
+          </a:prstGeom>
+          <a:solidFill>
+            <a:srgbClr val="FFFFFF"/>
+          </a:solidFill>
+          <a:ln w="12700">
+            <a:solidFill>
+              <a:srgbClr val="0D9488"/>
+            </a:solidFill>
+            <a:prstDash val="solid"/>
+          </a:ln>
+        </p:spPr>
+      </p:sp>
+      <p:sp>
+        <p:nvSpPr>
+          <p:cNvPr id="29" name="Text 27"/>
+          <p:cNvSpPr/>
+          <p:nvPr/>
+        </p:nvSpPr>
+        <p:spPr>
+          <a:xfrm>
+            <a:off x="4370832" y="3364992"/>
+            <a:ext cx="1645920" cy="475488"/>
+          </a:xfrm>
+          <a:prstGeom prst="rect">
+            <a:avLst/>
+          </a:prstGeom>
+          <a:noFill/>
+          <a:ln/>
+        </p:spPr>
+        <p:txBody>
+          <a:bodyPr wrap="square" lIns="0" tIns="0" rIns="0" bIns="0" rtlCol="0" anchor="ctr"/>
+          <a:lstStyle/>
+          <a:p>
+            <a:pPr algn="ctr" indent="0" marL="0">
+              <a:buNone/>
+            </a:pPr>
+            <a:r>
+              <a:rPr lang="en-US" sz="1400" b="1" dirty="0">
+                <a:solidFill>
+                  <a:srgbClr val="0D9488"/>
+                </a:solidFill>
+                <a:latin typeface="Trebuchet MS" pitchFamily="34" charset="0"/>
+                <a:ea typeface="Trebuchet MS" pitchFamily="34" charset="-122"/>
+                <a:cs typeface="Trebuchet MS" pitchFamily="34" charset="-120"/>
+              </a:rPr>
+              <a:t>pen</a:t>
+            </a:r>
+            <a:endParaRPr lang="en-US" sz="1400" dirty="0"/>
+          </a:p>
+        </p:txBody>
+      </p:sp>
+      <p:sp>
+        <p:nvSpPr>
+          <p:cNvPr id="30" name="Text 28"/>
+          <p:cNvSpPr/>
+          <p:nvPr/>
+        </p:nvSpPr>
+        <p:spPr>
+          <a:xfrm>
+            <a:off x="6016752" y="3364992"/>
+            <a:ext cx="411480" cy="475488"/>
+          </a:xfrm>
+          <a:prstGeom prst="rect">
+            <a:avLst/>
+          </a:prstGeom>
+          <a:noFill/>
+          <a:ln/>
+        </p:spPr>
+        <p:txBody>
+          <a:bodyPr wrap="square" lIns="0" tIns="0" rIns="0" bIns="0" rtlCol="0" anchor="ctr"/>
+          <a:lstStyle/>
+          <a:p>
+            <a:pPr algn="ctr" indent="0" marL="0">
+              <a:buNone/>
+            </a:pPr>
+            <a:r>
+              <a:rPr lang="en-US" sz="1600" b="1" dirty="0">
+                <a:solidFill>
+                  <a:srgbClr val="0D9488"/>
+                </a:solidFill>
+                <a:latin typeface="Trebuchet MS" pitchFamily="34" charset="0"/>
+                <a:ea typeface="Trebuchet MS" pitchFamily="34" charset="-122"/>
+                <a:cs typeface="Trebuchet MS" pitchFamily="34" charset="-120"/>
+              </a:rPr>
+              <a:t>·</a:t>
+            </a:r>
+            <a:endParaRPr lang="en-US" sz="1600" dirty="0"/>
+          </a:p>
+        </p:txBody>
+      </p:sp>
+      <p:sp>
+        <p:nvSpPr>
+          <p:cNvPr id="31" name="Shape 29"/>
+          <p:cNvSpPr/>
+          <p:nvPr/>
+        </p:nvSpPr>
+        <p:spPr>
+          <a:xfrm>
+            <a:off x="6428232" y="3364992"/>
+            <a:ext cx="1645920" cy="475488"/>
+          </a:xfrm>
+          <a:prstGeom prst="rect">
+            <a:avLst>
+              <a:gd name="adj" fmla="val 9615"/>
+            </a:avLst>
+          </a:prstGeom>
+          <a:solidFill>
+            <a:srgbClr val="FFFFFF"/>
+          </a:solidFill>
+          <a:ln w="12700">
+            <a:solidFill>
+              <a:srgbClr val="0D9488"/>
+            </a:solidFill>
+            <a:prstDash val="solid"/>
+          </a:ln>
+        </p:spPr>
+      </p:sp>
+      <p:sp>
+        <p:nvSpPr>
+          <p:cNvPr id="32" name="Text 30"/>
+          <p:cNvSpPr/>
+          <p:nvPr/>
+        </p:nvSpPr>
+        <p:spPr>
+          <a:xfrm>
+            <a:off x="6428232" y="3364992"/>
+            <a:ext cx="1645920" cy="475488"/>
+          </a:xfrm>
+          <a:prstGeom prst="rect">
+            <a:avLst/>
+          </a:prstGeom>
+          <a:noFill/>
+          <a:ln/>
+        </p:spPr>
+        <p:txBody>
+          <a:bodyPr wrap="square" lIns="0" tIns="0" rIns="0" bIns="0" rtlCol="0" anchor="ctr"/>
+          <a:lstStyle/>
+          <a:p>
+            <a:pPr algn="ctr" indent="0" marL="0">
+              <a:buNone/>
+            </a:pPr>
+            <a:r>
+              <a:rPr lang="en-US" sz="1400" b="1" dirty="0">
+                <a:solidFill>
+                  <a:srgbClr val="0D9488"/>
+                </a:solidFill>
+                <a:latin typeface="Trebuchet MS" pitchFamily="34" charset="0"/>
+                <a:ea typeface="Trebuchet MS" pitchFamily="34" charset="-122"/>
+                <a:cs typeface="Trebuchet MS" pitchFamily="34" charset="-120"/>
+              </a:rPr>
+              <a:t>ly</a:t>
+            </a:r>
+            <a:endParaRPr lang="en-US" sz="1400" dirty="0"/>
+          </a:p>
+        </p:txBody>
+      </p:sp>
+      <p:sp>
+        <p:nvSpPr>
+          <p:cNvPr id="33" name="Shape 31"/>
+          <p:cNvSpPr/>
+          <p:nvPr/>
+        </p:nvSpPr>
+        <p:spPr>
+          <a:xfrm>
+            <a:off x="365760" y="4096512"/>
+            <a:ext cx="1371600" cy="804672"/>
+          </a:xfrm>
+          <a:prstGeom prst="rect">
+            <a:avLst>
+              <a:gd name="adj" fmla="val 6818"/>
+            </a:avLst>
+          </a:prstGeom>
+          <a:solidFill>
+            <a:srgbClr val="E2E8F0"/>
+          </a:solidFill>
+          <a:ln w="12700">
+            <a:solidFill>
+              <a:srgbClr val="E2E8F0"/>
+            </a:solidFill>
+            <a:prstDash val="solid"/>
+          </a:ln>
+        </p:spPr>
+      </p:sp>
+      <p:sp>
+        <p:nvSpPr>
+          <p:cNvPr id="34" name="Text 32"/>
+          <p:cNvSpPr/>
+          <p:nvPr/>
+        </p:nvSpPr>
+        <p:spPr>
+          <a:xfrm>
+            <a:off x="365760" y="4096512"/>
+            <a:ext cx="1371600" cy="804672"/>
+          </a:xfrm>
+          <a:prstGeom prst="rect">
+            <a:avLst/>
+          </a:prstGeom>
+          <a:noFill/>
+          <a:ln/>
+        </p:spPr>
+        <p:txBody>
+          <a:bodyPr wrap="square" lIns="0" tIns="0" rIns="0" bIns="0" rtlCol="0" anchor="ctr"/>
+          <a:lstStyle/>
+          <a:p>
+            <a:pPr algn="ctr" indent="0" marL="0">
+              <a:buNone/>
+            </a:pPr>
+            <a:r>
+              <a:rPr lang="en-US" sz="1100" b="1" dirty="0">
+                <a:solidFill>
+                  <a:srgbClr val="475569"/>
+                </a:solidFill>
+                <a:latin typeface="Trebuchet MS" pitchFamily="34" charset="0"/>
+                <a:ea typeface="Trebuchet MS" pitchFamily="34" charset="-122"/>
+                <a:cs typeface="Trebuchet MS" pitchFamily="34" charset="-120"/>
+              </a:rPr>
+              <a:t>Phonemes</a:t>
             </a:r>
             <a:endParaRPr lang="en-US" sz="1100" dirty="0"/>
           </a:p>
@@ -15572,13 +16178,13 @@
       </p:sp>
       <p:sp>
         <p:nvSpPr>
-          <p:cNvPr id="27" name="Shape 25"/>
-          <p:cNvSpPr/>
-          <p:nvPr/>
-        </p:nvSpPr>
-        <p:spPr>
-          <a:xfrm>
-            <a:off x="1874520" y="3273552"/>
+          <p:cNvPr id="35" name="Shape 33"/>
+          <p:cNvSpPr/>
+          <p:nvPr/>
+        </p:nvSpPr>
+        <p:spPr>
+          <a:xfrm>
+            <a:off x="1874520" y="4096512"/>
             <a:ext cx="6903720" cy="658368"/>
           </a:xfrm>
           <a:prstGeom prst="rect">
@@ -15587,30 +16193,30 @@
             </a:avLst>
           </a:prstGeom>
           <a:solidFill>
-            <a:srgbClr val="CCFBF1"/>
-          </a:solidFill>
-          <a:ln w="12700">
-            <a:solidFill>
-              <a:srgbClr val="0D9488"/>
-            </a:solidFill>
-            <a:prstDash val="solid"/>
-          </a:ln>
-        </p:spPr>
-      </p:sp>
-      <p:sp>
-        <p:nvSpPr>
-          <p:cNvPr id="28" name="Shape 26"/>
-          <p:cNvSpPr/>
-          <p:nvPr/>
-        </p:nvSpPr>
-        <p:spPr>
-          <a:xfrm>
-            <a:off x="1975104" y="3364992"/>
-            <a:ext cx="1554480" cy="475488"/>
+            <a:srgbClr val="FCE7F3"/>
+          </a:solidFill>
+          <a:ln w="12700">
+            <a:solidFill>
+              <a:srgbClr val="DB2777"/>
+            </a:solidFill>
+            <a:prstDash val="solid"/>
+          </a:ln>
+        </p:spPr>
+      </p:sp>
+      <p:sp>
+        <p:nvSpPr>
+          <p:cNvPr id="36" name="Shape 34"/>
+          <p:cNvSpPr/>
+          <p:nvPr/>
+        </p:nvSpPr>
+        <p:spPr>
+          <a:xfrm>
+            <a:off x="2254649" y="4169664"/>
+            <a:ext cx="685800" cy="475488"/>
           </a:xfrm>
           <a:prstGeom prst="rect">
             <a:avLst>
-              <a:gd name="adj" fmla="val 9615"/>
+              <a:gd name="adj" fmla="val 7692"/>
             </a:avLst>
           </a:prstGeom>
           <a:solidFill>
@@ -15618,104 +16224,131 @@
           </a:solidFill>
           <a:ln w="12700">
             <a:solidFill>
-              <a:srgbClr val="0D9488"/>
-            </a:solidFill>
-            <a:prstDash val="solid"/>
-          </a:ln>
-        </p:spPr>
-      </p:sp>
-      <p:sp>
-        <p:nvSpPr>
-          <p:cNvPr id="29" name="Text 27"/>
-          <p:cNvSpPr/>
-          <p:nvPr/>
-        </p:nvSpPr>
-        <p:spPr>
-          <a:xfrm>
-            <a:off x="1975104" y="3364992"/>
-            <a:ext cx="1554480" cy="475488"/>
-          </a:xfrm>
-          <a:prstGeom prst="rect">
-            <a:avLst/>
-          </a:prstGeom>
-          <a:noFill/>
-          <a:ln/>
-        </p:spPr>
-        <p:txBody>
-          <a:bodyPr wrap="square" lIns="0" tIns="0" rIns="0" bIns="0" rtlCol="0" anchor="ctr"/>
-          <a:lstStyle/>
-          <a:p>
-            <a:pPr algn="ctr" indent="0" marL="0">
-              <a:buNone/>
-            </a:pPr>
-            <a:r>
-              <a:rPr lang="en-US" sz="1400" b="1" dirty="0">
-                <a:solidFill>
-                  <a:srgbClr val="0D9488"/>
+              <a:srgbClr val="DB2777"/>
+            </a:solidFill>
+            <a:prstDash val="solid"/>
+          </a:ln>
+        </p:spPr>
+      </p:sp>
+      <p:sp>
+        <p:nvSpPr>
+          <p:cNvPr id="37" name="Text 35"/>
+          <p:cNvSpPr/>
+          <p:nvPr/>
+        </p:nvSpPr>
+        <p:spPr>
+          <a:xfrm>
+            <a:off x="2254649" y="4169664"/>
+            <a:ext cx="685800" cy="475488"/>
+          </a:xfrm>
+          <a:prstGeom prst="rect">
+            <a:avLst/>
+          </a:prstGeom>
+          <a:noFill/>
+          <a:ln/>
+        </p:spPr>
+        <p:txBody>
+          <a:bodyPr wrap="square" lIns="0" tIns="0" rIns="0" bIns="0" rtlCol="0" anchor="ctr"/>
+          <a:lstStyle/>
+          <a:p>
+            <a:pPr algn="ctr" indent="0" marL="0">
+              <a:buNone/>
+            </a:pPr>
+            <a:r>
+              <a:rPr lang="en-US" sz="900" b="1" dirty="0">
+                <a:solidFill>
+                  <a:srgbClr val="9D174D"/>
                 </a:solidFill>
                 <a:latin typeface="Trebuchet MS" pitchFamily="34" charset="0"/>
                 <a:ea typeface="Trebuchet MS" pitchFamily="34" charset="-122"/>
                 <a:cs typeface="Trebuchet MS" pitchFamily="34" charset="-120"/>
               </a:rPr>
-              <a:t>re</a:t>
-            </a:r>
-            <a:endParaRPr lang="en-US" sz="1400" dirty="0"/>
-          </a:p>
-        </p:txBody>
-      </p:sp>
-      <p:sp>
-        <p:nvSpPr>
-          <p:cNvPr id="30" name="Text 28"/>
-          <p:cNvSpPr/>
-          <p:nvPr/>
-        </p:nvSpPr>
-        <p:spPr>
-          <a:xfrm>
-            <a:off x="3529584" y="3364992"/>
-            <a:ext cx="73152" cy="475488"/>
-          </a:xfrm>
-          <a:prstGeom prst="rect">
-            <a:avLst/>
-          </a:prstGeom>
-          <a:noFill/>
-          <a:ln/>
-        </p:spPr>
-        <p:txBody>
-          <a:bodyPr wrap="square" lIns="0" tIns="0" rIns="0" bIns="0" rtlCol="0" anchor="ctr"/>
-          <a:lstStyle/>
-          <a:p>
-            <a:pPr algn="ctr" indent="0" marL="0">
-              <a:buNone/>
-            </a:pPr>
-            <a:r>
-              <a:rPr lang="en-US" sz="1600" b="1" dirty="0">
-                <a:solidFill>
-                  <a:srgbClr val="0D9488"/>
+              <a:t>o</a:t>
+            </a:r>
+            <a:endParaRPr lang="en-US" sz="900" dirty="0"/>
+          </a:p>
+        </p:txBody>
+      </p:sp>
+      <p:sp>
+        <p:nvSpPr>
+          <p:cNvPr id="38" name="Shape 36"/>
+          <p:cNvSpPr/>
+          <p:nvPr/>
+        </p:nvSpPr>
+        <p:spPr>
+          <a:xfrm>
+            <a:off x="3293146" y="4169664"/>
+            <a:ext cx="685800" cy="475488"/>
+          </a:xfrm>
+          <a:prstGeom prst="rect">
+            <a:avLst>
+              <a:gd name="adj" fmla="val 7692"/>
+            </a:avLst>
+          </a:prstGeom>
+          <a:solidFill>
+            <a:srgbClr val="FFFFFF"/>
+          </a:solidFill>
+          <a:ln w="12700">
+            <a:solidFill>
+              <a:srgbClr val="DB2777"/>
+            </a:solidFill>
+            <a:prstDash val="solid"/>
+          </a:ln>
+        </p:spPr>
+      </p:sp>
+      <p:sp>
+        <p:nvSpPr>
+          <p:cNvPr id="39" name="Text 37"/>
+          <p:cNvSpPr/>
+          <p:nvPr/>
+        </p:nvSpPr>
+        <p:spPr>
+          <a:xfrm>
+            <a:off x="3293146" y="4169664"/>
+            <a:ext cx="685800" cy="475488"/>
+          </a:xfrm>
+          <a:prstGeom prst="rect">
+            <a:avLst/>
+          </a:prstGeom>
+          <a:noFill/>
+          <a:ln/>
+        </p:spPr>
+        <p:txBody>
+          <a:bodyPr wrap="square" lIns="0" tIns="0" rIns="0" bIns="0" rtlCol="0" anchor="ctr"/>
+          <a:lstStyle/>
+          <a:p>
+            <a:pPr algn="ctr" indent="0" marL="0">
+              <a:buNone/>
+            </a:pPr>
+            <a:r>
+              <a:rPr lang="en-US" sz="900" b="1" dirty="0">
+                <a:solidFill>
+                  <a:srgbClr val="9D174D"/>
                 </a:solidFill>
                 <a:latin typeface="Trebuchet MS" pitchFamily="34" charset="0"/>
                 <a:ea typeface="Trebuchet MS" pitchFamily="34" charset="-122"/>
                 <a:cs typeface="Trebuchet MS" pitchFamily="34" charset="-120"/>
               </a:rPr>
-              <a:t>·</a:t>
-            </a:r>
-            <a:endParaRPr lang="en-US" sz="1600" dirty="0"/>
-          </a:p>
-        </p:txBody>
-      </p:sp>
-      <p:sp>
-        <p:nvSpPr>
-          <p:cNvPr id="31" name="Shape 29"/>
-          <p:cNvSpPr/>
-          <p:nvPr/>
-        </p:nvSpPr>
-        <p:spPr>
-          <a:xfrm>
-            <a:off x="3602736" y="3364992"/>
-            <a:ext cx="1554480" cy="475488"/>
+              <a:t>p</a:t>
+            </a:r>
+            <a:endParaRPr lang="en-US" sz="900" dirty="0"/>
+          </a:p>
+        </p:txBody>
+      </p:sp>
+      <p:sp>
+        <p:nvSpPr>
+          <p:cNvPr id="40" name="Shape 38"/>
+          <p:cNvSpPr/>
+          <p:nvPr/>
+        </p:nvSpPr>
+        <p:spPr>
+          <a:xfrm>
+            <a:off x="4331643" y="4169664"/>
+            <a:ext cx="685800" cy="475488"/>
           </a:xfrm>
           <a:prstGeom prst="rect">
             <a:avLst>
-              <a:gd name="adj" fmla="val 9615"/>
+              <a:gd name="adj" fmla="val 7692"/>
             </a:avLst>
           </a:prstGeom>
           <a:solidFill>
@@ -15723,104 +16356,131 @@
           </a:solidFill>
           <a:ln w="12700">
             <a:solidFill>
-              <a:srgbClr val="0D9488"/>
-            </a:solidFill>
-            <a:prstDash val="solid"/>
-          </a:ln>
-        </p:spPr>
-      </p:sp>
-      <p:sp>
-        <p:nvSpPr>
-          <p:cNvPr id="32" name="Text 30"/>
-          <p:cNvSpPr/>
-          <p:nvPr/>
-        </p:nvSpPr>
-        <p:spPr>
-          <a:xfrm>
-            <a:off x="3602736" y="3364992"/>
-            <a:ext cx="1554480" cy="475488"/>
-          </a:xfrm>
-          <a:prstGeom prst="rect">
-            <a:avLst/>
-          </a:prstGeom>
-          <a:noFill/>
-          <a:ln/>
-        </p:spPr>
-        <p:txBody>
-          <a:bodyPr wrap="square" lIns="0" tIns="0" rIns="0" bIns="0" rtlCol="0" anchor="ctr"/>
-          <a:lstStyle/>
-          <a:p>
-            <a:pPr algn="ctr" indent="0" marL="0">
-              <a:buNone/>
-            </a:pPr>
-            <a:r>
-              <a:rPr lang="en-US" sz="1400" b="1" dirty="0">
-                <a:solidFill>
-                  <a:srgbClr val="0D9488"/>
+              <a:srgbClr val="DB2777"/>
+            </a:solidFill>
+            <a:prstDash val="solid"/>
+          </a:ln>
+        </p:spPr>
+      </p:sp>
+      <p:sp>
+        <p:nvSpPr>
+          <p:cNvPr id="41" name="Text 39"/>
+          <p:cNvSpPr/>
+          <p:nvPr/>
+        </p:nvSpPr>
+        <p:spPr>
+          <a:xfrm>
+            <a:off x="4331643" y="4169664"/>
+            <a:ext cx="685800" cy="475488"/>
+          </a:xfrm>
+          <a:prstGeom prst="rect">
+            <a:avLst/>
+          </a:prstGeom>
+          <a:noFill/>
+          <a:ln/>
+        </p:spPr>
+        <p:txBody>
+          <a:bodyPr wrap="square" lIns="0" tIns="0" rIns="0" bIns="0" rtlCol="0" anchor="ctr"/>
+          <a:lstStyle/>
+          <a:p>
+            <a:pPr algn="ctr" indent="0" marL="0">
+              <a:buNone/>
+            </a:pPr>
+            <a:r>
+              <a:rPr lang="en-US" sz="900" b="1" dirty="0">
+                <a:solidFill>
+                  <a:srgbClr val="9D174D"/>
                 </a:solidFill>
                 <a:latin typeface="Trebuchet MS" pitchFamily="34" charset="0"/>
                 <a:ea typeface="Trebuchet MS" pitchFamily="34" charset="-122"/>
                 <a:cs typeface="Trebuchet MS" pitchFamily="34" charset="-120"/>
               </a:rPr>
-              <a:t>o</a:t>
-            </a:r>
-            <a:endParaRPr lang="en-US" sz="1400" dirty="0"/>
-          </a:p>
-        </p:txBody>
-      </p:sp>
-      <p:sp>
-        <p:nvSpPr>
-          <p:cNvPr id="33" name="Text 31"/>
-          <p:cNvSpPr/>
-          <p:nvPr/>
-        </p:nvSpPr>
-        <p:spPr>
-          <a:xfrm>
-            <a:off x="5157216" y="3364992"/>
-            <a:ext cx="73152" cy="475488"/>
-          </a:xfrm>
-          <a:prstGeom prst="rect">
-            <a:avLst/>
-          </a:prstGeom>
-          <a:noFill/>
-          <a:ln/>
-        </p:spPr>
-        <p:txBody>
-          <a:bodyPr wrap="square" lIns="0" tIns="0" rIns="0" bIns="0" rtlCol="0" anchor="ctr"/>
-          <a:lstStyle/>
-          <a:p>
-            <a:pPr algn="ctr" indent="0" marL="0">
-              <a:buNone/>
-            </a:pPr>
-            <a:r>
-              <a:rPr lang="en-US" sz="1600" b="1" dirty="0">
-                <a:solidFill>
-                  <a:srgbClr val="0D9488"/>
+              <a:t>e</a:t>
+            </a:r>
+            <a:endParaRPr lang="en-US" sz="900" dirty="0"/>
+          </a:p>
+        </p:txBody>
+      </p:sp>
+      <p:sp>
+        <p:nvSpPr>
+          <p:cNvPr id="42" name="Shape 40"/>
+          <p:cNvSpPr/>
+          <p:nvPr/>
+        </p:nvSpPr>
+        <p:spPr>
+          <a:xfrm>
+            <a:off x="5370141" y="4169664"/>
+            <a:ext cx="685800" cy="475488"/>
+          </a:xfrm>
+          <a:prstGeom prst="rect">
+            <a:avLst>
+              <a:gd name="adj" fmla="val 7692"/>
+            </a:avLst>
+          </a:prstGeom>
+          <a:solidFill>
+            <a:srgbClr val="FFFFFF"/>
+          </a:solidFill>
+          <a:ln w="12700">
+            <a:solidFill>
+              <a:srgbClr val="DB2777"/>
+            </a:solidFill>
+            <a:prstDash val="solid"/>
+          </a:ln>
+        </p:spPr>
+      </p:sp>
+      <p:sp>
+        <p:nvSpPr>
+          <p:cNvPr id="43" name="Text 41"/>
+          <p:cNvSpPr/>
+          <p:nvPr/>
+        </p:nvSpPr>
+        <p:spPr>
+          <a:xfrm>
+            <a:off x="5370141" y="4169664"/>
+            <a:ext cx="685800" cy="475488"/>
+          </a:xfrm>
+          <a:prstGeom prst="rect">
+            <a:avLst/>
+          </a:prstGeom>
+          <a:noFill/>
+          <a:ln/>
+        </p:spPr>
+        <p:txBody>
+          <a:bodyPr wrap="square" lIns="0" tIns="0" rIns="0" bIns="0" rtlCol="0" anchor="ctr"/>
+          <a:lstStyle/>
+          <a:p>
+            <a:pPr algn="ctr" indent="0" marL="0">
+              <a:buNone/>
+            </a:pPr>
+            <a:r>
+              <a:rPr lang="en-US" sz="900" b="1" dirty="0">
+                <a:solidFill>
+                  <a:srgbClr val="9D174D"/>
                 </a:solidFill>
                 <a:latin typeface="Trebuchet MS" pitchFamily="34" charset="0"/>
                 <a:ea typeface="Trebuchet MS" pitchFamily="34" charset="-122"/>
                 <a:cs typeface="Trebuchet MS" pitchFamily="34" charset="-120"/>
               </a:rPr>
-              <a:t>·</a:t>
-            </a:r>
-            <a:endParaRPr lang="en-US" sz="1600" dirty="0"/>
-          </a:p>
-        </p:txBody>
-      </p:sp>
-      <p:sp>
-        <p:nvSpPr>
-          <p:cNvPr id="34" name="Shape 32"/>
-          <p:cNvSpPr/>
-          <p:nvPr/>
-        </p:nvSpPr>
-        <p:spPr>
-          <a:xfrm>
-            <a:off x="5230368" y="3364992"/>
-            <a:ext cx="1554480" cy="475488"/>
+              <a:t>n</a:t>
+            </a:r>
+            <a:endParaRPr lang="en-US" sz="900" dirty="0"/>
+          </a:p>
+        </p:txBody>
+      </p:sp>
+      <p:sp>
+        <p:nvSpPr>
+          <p:cNvPr id="44" name="Shape 42"/>
+          <p:cNvSpPr/>
+          <p:nvPr/>
+        </p:nvSpPr>
+        <p:spPr>
+          <a:xfrm>
+            <a:off x="6408638" y="4169664"/>
+            <a:ext cx="685800" cy="475488"/>
           </a:xfrm>
           <a:prstGeom prst="rect">
             <a:avLst>
-              <a:gd name="adj" fmla="val 9615"/>
+              <a:gd name="adj" fmla="val 7692"/>
             </a:avLst>
           </a:prstGeom>
           <a:solidFill>
@@ -15828,772 +16488,112 @@
           </a:solidFill>
           <a:ln w="12700">
             <a:solidFill>
-              <a:srgbClr val="0D9488"/>
-            </a:solidFill>
-            <a:prstDash val="solid"/>
-          </a:ln>
-        </p:spPr>
-      </p:sp>
-      <p:sp>
-        <p:nvSpPr>
-          <p:cNvPr id="35" name="Text 33"/>
-          <p:cNvSpPr/>
-          <p:nvPr/>
-        </p:nvSpPr>
-        <p:spPr>
-          <a:xfrm>
-            <a:off x="5230368" y="3364992"/>
-            <a:ext cx="1554480" cy="475488"/>
-          </a:xfrm>
-          <a:prstGeom prst="rect">
-            <a:avLst/>
-          </a:prstGeom>
-          <a:noFill/>
-          <a:ln/>
-        </p:spPr>
-        <p:txBody>
-          <a:bodyPr wrap="square" lIns="0" tIns="0" rIns="0" bIns="0" rtlCol="0" anchor="ctr"/>
-          <a:lstStyle/>
-          <a:p>
-            <a:pPr algn="ctr" indent="0" marL="0">
-              <a:buNone/>
-            </a:pPr>
-            <a:r>
-              <a:rPr lang="en-US" sz="1400" b="1" dirty="0">
-                <a:solidFill>
-                  <a:srgbClr val="0D9488"/>
+              <a:srgbClr val="DB2777"/>
+            </a:solidFill>
+            <a:prstDash val="solid"/>
+          </a:ln>
+        </p:spPr>
+      </p:sp>
+      <p:sp>
+        <p:nvSpPr>
+          <p:cNvPr id="45" name="Text 43"/>
+          <p:cNvSpPr/>
+          <p:nvPr/>
+        </p:nvSpPr>
+        <p:spPr>
+          <a:xfrm>
+            <a:off x="6408638" y="4169664"/>
+            <a:ext cx="685800" cy="475488"/>
+          </a:xfrm>
+          <a:prstGeom prst="rect">
+            <a:avLst/>
+          </a:prstGeom>
+          <a:noFill/>
+          <a:ln/>
+        </p:spPr>
+        <p:txBody>
+          <a:bodyPr wrap="square" lIns="0" tIns="0" rIns="0" bIns="0" rtlCol="0" anchor="ctr"/>
+          <a:lstStyle/>
+          <a:p>
+            <a:pPr algn="ctr" indent="0" marL="0">
+              <a:buNone/>
+            </a:pPr>
+            <a:r>
+              <a:rPr lang="en-US" sz="900" b="1" dirty="0">
+                <a:solidFill>
+                  <a:srgbClr val="9D174D"/>
                 </a:solidFill>
                 <a:latin typeface="Trebuchet MS" pitchFamily="34" charset="0"/>
                 <a:ea typeface="Trebuchet MS" pitchFamily="34" charset="-122"/>
                 <a:cs typeface="Trebuchet MS" pitchFamily="34" charset="-120"/>
               </a:rPr>
-              <a:t>pen</a:t>
-            </a:r>
-            <a:endParaRPr lang="en-US" sz="1400" dirty="0"/>
-          </a:p>
-        </p:txBody>
-      </p:sp>
-      <p:sp>
-        <p:nvSpPr>
-          <p:cNvPr id="36" name="Text 34"/>
-          <p:cNvSpPr/>
-          <p:nvPr/>
-        </p:nvSpPr>
-        <p:spPr>
-          <a:xfrm>
-            <a:off x="6784848" y="3364992"/>
-            <a:ext cx="73152" cy="475488"/>
-          </a:xfrm>
-          <a:prstGeom prst="rect">
-            <a:avLst/>
-          </a:prstGeom>
-          <a:noFill/>
-          <a:ln/>
-        </p:spPr>
-        <p:txBody>
-          <a:bodyPr wrap="square" lIns="0" tIns="0" rIns="0" bIns="0" rtlCol="0" anchor="ctr"/>
-          <a:lstStyle/>
-          <a:p>
-            <a:pPr algn="ctr" indent="0" marL="0">
-              <a:buNone/>
-            </a:pPr>
-            <a:r>
-              <a:rPr lang="en-US" sz="1600" b="1" dirty="0">
-                <a:solidFill>
-                  <a:srgbClr val="0D9488"/>
+              <a:t>l</a:t>
+            </a:r>
+            <a:endParaRPr lang="en-US" sz="900" dirty="0"/>
+          </a:p>
+        </p:txBody>
+      </p:sp>
+      <p:sp>
+        <p:nvSpPr>
+          <p:cNvPr id="46" name="Shape 44"/>
+          <p:cNvSpPr/>
+          <p:nvPr/>
+        </p:nvSpPr>
+        <p:spPr>
+          <a:xfrm>
+            <a:off x="7447135" y="4169664"/>
+            <a:ext cx="685800" cy="475488"/>
+          </a:xfrm>
+          <a:prstGeom prst="rect">
+            <a:avLst>
+              <a:gd name="adj" fmla="val 7692"/>
+            </a:avLst>
+          </a:prstGeom>
+          <a:solidFill>
+            <a:srgbClr val="FFFFFF"/>
+          </a:solidFill>
+          <a:ln w="12700">
+            <a:solidFill>
+              <a:srgbClr val="DB2777"/>
+            </a:solidFill>
+            <a:prstDash val="solid"/>
+          </a:ln>
+        </p:spPr>
+      </p:sp>
+      <p:sp>
+        <p:nvSpPr>
+          <p:cNvPr id="47" name="Text 45"/>
+          <p:cNvSpPr/>
+          <p:nvPr/>
+        </p:nvSpPr>
+        <p:spPr>
+          <a:xfrm>
+            <a:off x="7447135" y="4169664"/>
+            <a:ext cx="685800" cy="475488"/>
+          </a:xfrm>
+          <a:prstGeom prst="rect">
+            <a:avLst/>
+          </a:prstGeom>
+          <a:noFill/>
+          <a:ln/>
+        </p:spPr>
+        <p:txBody>
+          <a:bodyPr wrap="square" lIns="0" tIns="0" rIns="0" bIns="0" rtlCol="0" anchor="ctr"/>
+          <a:lstStyle/>
+          <a:p>
+            <a:pPr algn="ctr" indent="0" marL="0">
+              <a:buNone/>
+            </a:pPr>
+            <a:r>
+              <a:rPr lang="en-US" sz="900" b="1" dirty="0">
+                <a:solidFill>
+                  <a:srgbClr val="9D174D"/>
                 </a:solidFill>
                 <a:latin typeface="Trebuchet MS" pitchFamily="34" charset="0"/>
                 <a:ea typeface="Trebuchet MS" pitchFamily="34" charset="-122"/>
                 <a:cs typeface="Trebuchet MS" pitchFamily="34" charset="-120"/>
               </a:rPr>
-              <a:t>·</a:t>
-            </a:r>
-            <a:endParaRPr lang="en-US" sz="1600" dirty="0"/>
-          </a:p>
-        </p:txBody>
-      </p:sp>
-      <p:sp>
-        <p:nvSpPr>
-          <p:cNvPr id="37" name="Shape 35"/>
-          <p:cNvSpPr/>
-          <p:nvPr/>
-        </p:nvSpPr>
-        <p:spPr>
-          <a:xfrm>
-            <a:off x="6858000" y="3364992"/>
-            <a:ext cx="1554480" cy="475488"/>
-          </a:xfrm>
-          <a:prstGeom prst="rect">
-            <a:avLst>
-              <a:gd name="adj" fmla="val 9615"/>
-            </a:avLst>
-          </a:prstGeom>
-          <a:solidFill>
-            <a:srgbClr val="FFFFFF"/>
-          </a:solidFill>
-          <a:ln w="12700">
-            <a:solidFill>
-              <a:srgbClr val="0D9488"/>
-            </a:solidFill>
-            <a:prstDash val="solid"/>
-          </a:ln>
-        </p:spPr>
-      </p:sp>
-      <p:sp>
-        <p:nvSpPr>
-          <p:cNvPr id="38" name="Text 36"/>
-          <p:cNvSpPr/>
-          <p:nvPr/>
-        </p:nvSpPr>
-        <p:spPr>
-          <a:xfrm>
-            <a:off x="6858000" y="3364992"/>
-            <a:ext cx="1554480" cy="475488"/>
-          </a:xfrm>
-          <a:prstGeom prst="rect">
-            <a:avLst/>
-          </a:prstGeom>
-          <a:noFill/>
-          <a:ln/>
-        </p:spPr>
-        <p:txBody>
-          <a:bodyPr wrap="square" lIns="0" tIns="0" rIns="0" bIns="0" rtlCol="0" anchor="ctr"/>
-          <a:lstStyle/>
-          <a:p>
-            <a:pPr algn="ctr" indent="0" marL="0">
-              <a:buNone/>
-            </a:pPr>
-            <a:r>
-              <a:rPr lang="en-US" sz="1400" b="1" dirty="0">
-                <a:solidFill>
-                  <a:srgbClr val="0D9488"/>
-                </a:solidFill>
-                <a:latin typeface="Trebuchet MS" pitchFamily="34" charset="0"/>
-                <a:ea typeface="Trebuchet MS" pitchFamily="34" charset="-122"/>
-                <a:cs typeface="Trebuchet MS" pitchFamily="34" charset="-120"/>
-              </a:rPr>
-              <a:t>ing</a:t>
-            </a:r>
-            <a:endParaRPr lang="en-US" sz="1400" dirty="0"/>
-          </a:p>
-        </p:txBody>
-      </p:sp>
-      <p:sp>
-        <p:nvSpPr>
-          <p:cNvPr id="39" name="Shape 37"/>
-          <p:cNvSpPr/>
-          <p:nvPr/>
-        </p:nvSpPr>
-        <p:spPr>
-          <a:xfrm>
-            <a:off x="365760" y="4096512"/>
-            <a:ext cx="1371600" cy="804672"/>
-          </a:xfrm>
-          <a:prstGeom prst="rect">
-            <a:avLst>
-              <a:gd name="adj" fmla="val 6818"/>
-            </a:avLst>
-          </a:prstGeom>
-          <a:solidFill>
-            <a:srgbClr val="E2E8F0"/>
-          </a:solidFill>
-          <a:ln w="12700">
-            <a:solidFill>
-              <a:srgbClr val="E2E8F0"/>
-            </a:solidFill>
-            <a:prstDash val="solid"/>
-          </a:ln>
-        </p:spPr>
-      </p:sp>
-      <p:sp>
-        <p:nvSpPr>
-          <p:cNvPr id="40" name="Text 38"/>
-          <p:cNvSpPr/>
-          <p:nvPr/>
-        </p:nvSpPr>
-        <p:spPr>
-          <a:xfrm>
-            <a:off x="365760" y="4096512"/>
-            <a:ext cx="1371600" cy="804672"/>
-          </a:xfrm>
-          <a:prstGeom prst="rect">
-            <a:avLst/>
-          </a:prstGeom>
-          <a:noFill/>
-          <a:ln/>
-        </p:spPr>
-        <p:txBody>
-          <a:bodyPr wrap="square" lIns="0" tIns="0" rIns="0" bIns="0" rtlCol="0" anchor="ctr"/>
-          <a:lstStyle/>
-          <a:p>
-            <a:pPr algn="ctr" indent="0" marL="0">
-              <a:buNone/>
-            </a:pPr>
-            <a:r>
-              <a:rPr lang="en-US" sz="1100" b="1" dirty="0">
-                <a:solidFill>
-                  <a:srgbClr val="475569"/>
-                </a:solidFill>
-                <a:latin typeface="Trebuchet MS" pitchFamily="34" charset="0"/>
-                <a:ea typeface="Trebuchet MS" pitchFamily="34" charset="-122"/>
-                <a:cs typeface="Trebuchet MS" pitchFamily="34" charset="-120"/>
-              </a:rPr>
-              <a:t>Phonemes</a:t>
-            </a:r>
-            <a:endParaRPr lang="en-US" sz="1100" dirty="0"/>
-          </a:p>
-        </p:txBody>
-      </p:sp>
-      <p:sp>
-        <p:nvSpPr>
-          <p:cNvPr id="41" name="Shape 39"/>
-          <p:cNvSpPr/>
-          <p:nvPr/>
-        </p:nvSpPr>
-        <p:spPr>
-          <a:xfrm>
-            <a:off x="1874520" y="4096512"/>
-            <a:ext cx="6903720" cy="658368"/>
-          </a:xfrm>
-          <a:prstGeom prst="rect">
-            <a:avLst>
-              <a:gd name="adj" fmla="val 8333"/>
-            </a:avLst>
-          </a:prstGeom>
-          <a:solidFill>
-            <a:srgbClr val="FCE7F3"/>
-          </a:solidFill>
-          <a:ln w="12700">
-            <a:solidFill>
-              <a:srgbClr val="DB2777"/>
-            </a:solidFill>
-            <a:prstDash val="solid"/>
-          </a:ln>
-        </p:spPr>
-      </p:sp>
-      <p:sp>
-        <p:nvSpPr>
-          <p:cNvPr id="42" name="Shape 40"/>
-          <p:cNvSpPr/>
-          <p:nvPr/>
-        </p:nvSpPr>
-        <p:spPr>
-          <a:xfrm>
-            <a:off x="2023872" y="4169664"/>
-            <a:ext cx="685800" cy="475488"/>
-          </a:xfrm>
-          <a:prstGeom prst="rect">
-            <a:avLst>
-              <a:gd name="adj" fmla="val 7692"/>
-            </a:avLst>
-          </a:prstGeom>
-          <a:solidFill>
-            <a:srgbClr val="FFFFFF"/>
-          </a:solidFill>
-          <a:ln w="12700">
-            <a:solidFill>
-              <a:srgbClr val="DB2777"/>
-            </a:solidFill>
-            <a:prstDash val="solid"/>
-          </a:ln>
-        </p:spPr>
-      </p:sp>
-      <p:sp>
-        <p:nvSpPr>
-          <p:cNvPr id="43" name="Text 41"/>
-          <p:cNvSpPr/>
-          <p:nvPr/>
-        </p:nvSpPr>
-        <p:spPr>
-          <a:xfrm>
-            <a:off x="2023872" y="4169664"/>
-            <a:ext cx="685800" cy="475488"/>
-          </a:xfrm>
-          <a:prstGeom prst="rect">
-            <a:avLst/>
-          </a:prstGeom>
-          <a:noFill/>
-          <a:ln/>
-        </p:spPr>
-        <p:txBody>
-          <a:bodyPr wrap="square" lIns="0" tIns="0" rIns="0" bIns="0" rtlCol="0" anchor="ctr"/>
-          <a:lstStyle/>
-          <a:p>
-            <a:pPr algn="ctr" indent="0" marL="0">
-              <a:buNone/>
-            </a:pPr>
-            <a:r>
-              <a:rPr lang="en-US" sz="900" b="1" dirty="0">
-                <a:solidFill>
-                  <a:srgbClr val="9D174D"/>
-                </a:solidFill>
-                <a:latin typeface="Trebuchet MS" pitchFamily="34" charset="0"/>
-                <a:ea typeface="Trebuchet MS" pitchFamily="34" charset="-122"/>
-                <a:cs typeface="Trebuchet MS" pitchFamily="34" charset="-120"/>
-              </a:rPr>
-              <a:t>r</a:t>
-            </a:r>
-            <a:endParaRPr lang="en-US" sz="900" dirty="0"/>
-          </a:p>
-        </p:txBody>
-      </p:sp>
-      <p:sp>
-        <p:nvSpPr>
-          <p:cNvPr id="44" name="Shape 42"/>
-          <p:cNvSpPr/>
-          <p:nvPr/>
-        </p:nvSpPr>
-        <p:spPr>
-          <a:xfrm>
-            <a:off x="2831592" y="4169664"/>
-            <a:ext cx="685800" cy="475488"/>
-          </a:xfrm>
-          <a:prstGeom prst="rect">
-            <a:avLst>
-              <a:gd name="adj" fmla="val 7692"/>
-            </a:avLst>
-          </a:prstGeom>
-          <a:solidFill>
-            <a:srgbClr val="FFFFFF"/>
-          </a:solidFill>
-          <a:ln w="12700">
-            <a:solidFill>
-              <a:srgbClr val="DB2777"/>
-            </a:solidFill>
-            <a:prstDash val="solid"/>
-          </a:ln>
-        </p:spPr>
-      </p:sp>
-      <p:sp>
-        <p:nvSpPr>
-          <p:cNvPr id="45" name="Text 43"/>
-          <p:cNvSpPr/>
-          <p:nvPr/>
-        </p:nvSpPr>
-        <p:spPr>
-          <a:xfrm>
-            <a:off x="2831592" y="4169664"/>
-            <a:ext cx="685800" cy="475488"/>
-          </a:xfrm>
-          <a:prstGeom prst="rect">
-            <a:avLst/>
-          </a:prstGeom>
-          <a:noFill/>
-          <a:ln/>
-        </p:spPr>
-        <p:txBody>
-          <a:bodyPr wrap="square" lIns="0" tIns="0" rIns="0" bIns="0" rtlCol="0" anchor="ctr"/>
-          <a:lstStyle/>
-          <a:p>
-            <a:pPr algn="ctr" indent="0" marL="0">
-              <a:buNone/>
-            </a:pPr>
-            <a:r>
-              <a:rPr lang="en-US" sz="900" b="1" dirty="0">
-                <a:solidFill>
-                  <a:srgbClr val="9D174D"/>
-                </a:solidFill>
-                <a:latin typeface="Trebuchet MS" pitchFamily="34" charset="0"/>
-                <a:ea typeface="Trebuchet MS" pitchFamily="34" charset="-122"/>
-                <a:cs typeface="Trebuchet MS" pitchFamily="34" charset="-120"/>
-              </a:rPr>
-              <a:t>e</a:t>
-            </a:r>
-            <a:endParaRPr lang="en-US" sz="900" dirty="0"/>
-          </a:p>
-        </p:txBody>
-      </p:sp>
-      <p:sp>
-        <p:nvSpPr>
-          <p:cNvPr id="46" name="Shape 44"/>
-          <p:cNvSpPr/>
-          <p:nvPr/>
-        </p:nvSpPr>
-        <p:spPr>
-          <a:xfrm>
-            <a:off x="3639312" y="4169664"/>
-            <a:ext cx="685800" cy="475488"/>
-          </a:xfrm>
-          <a:prstGeom prst="rect">
-            <a:avLst>
-              <a:gd name="adj" fmla="val 7692"/>
-            </a:avLst>
-          </a:prstGeom>
-          <a:solidFill>
-            <a:srgbClr val="FFFFFF"/>
-          </a:solidFill>
-          <a:ln w="12700">
-            <a:solidFill>
-              <a:srgbClr val="DB2777"/>
-            </a:solidFill>
-            <a:prstDash val="solid"/>
-          </a:ln>
-        </p:spPr>
-      </p:sp>
-      <p:sp>
-        <p:nvSpPr>
-          <p:cNvPr id="47" name="Text 45"/>
-          <p:cNvSpPr/>
-          <p:nvPr/>
-        </p:nvSpPr>
-        <p:spPr>
-          <a:xfrm>
-            <a:off x="3639312" y="4169664"/>
-            <a:ext cx="685800" cy="475488"/>
-          </a:xfrm>
-          <a:prstGeom prst="rect">
-            <a:avLst/>
-          </a:prstGeom>
-          <a:noFill/>
-          <a:ln/>
-        </p:spPr>
-        <p:txBody>
-          <a:bodyPr wrap="square" lIns="0" tIns="0" rIns="0" bIns="0" rtlCol="0" anchor="ctr"/>
-          <a:lstStyle/>
-          <a:p>
-            <a:pPr algn="ctr" indent="0" marL="0">
-              <a:buNone/>
-            </a:pPr>
-            <a:r>
-              <a:rPr lang="en-US" sz="900" b="1" dirty="0">
-                <a:solidFill>
-                  <a:srgbClr val="9D174D"/>
-                </a:solidFill>
-                <a:latin typeface="Trebuchet MS" pitchFamily="34" charset="0"/>
-                <a:ea typeface="Trebuchet MS" pitchFamily="34" charset="-122"/>
-                <a:cs typeface="Trebuchet MS" pitchFamily="34" charset="-120"/>
-              </a:rPr>
-              <a:t>o</a:t>
-            </a:r>
-            <a:endParaRPr lang="en-US" sz="900" dirty="0"/>
-          </a:p>
-        </p:txBody>
-      </p:sp>
-      <p:sp>
-        <p:nvSpPr>
-          <p:cNvPr id="48" name="Shape 46"/>
-          <p:cNvSpPr/>
-          <p:nvPr/>
-        </p:nvSpPr>
-        <p:spPr>
-          <a:xfrm>
-            <a:off x="4447032" y="4169664"/>
-            <a:ext cx="685800" cy="475488"/>
-          </a:xfrm>
-          <a:prstGeom prst="rect">
-            <a:avLst>
-              <a:gd name="adj" fmla="val 7692"/>
-            </a:avLst>
-          </a:prstGeom>
-          <a:solidFill>
-            <a:srgbClr val="FFFFFF"/>
-          </a:solidFill>
-          <a:ln w="12700">
-            <a:solidFill>
-              <a:srgbClr val="DB2777"/>
-            </a:solidFill>
-            <a:prstDash val="solid"/>
-          </a:ln>
-        </p:spPr>
-      </p:sp>
-      <p:sp>
-        <p:nvSpPr>
-          <p:cNvPr id="49" name="Text 47"/>
-          <p:cNvSpPr/>
-          <p:nvPr/>
-        </p:nvSpPr>
-        <p:spPr>
-          <a:xfrm>
-            <a:off x="4447032" y="4169664"/>
-            <a:ext cx="685800" cy="475488"/>
-          </a:xfrm>
-          <a:prstGeom prst="rect">
-            <a:avLst/>
-          </a:prstGeom>
-          <a:noFill/>
-          <a:ln/>
-        </p:spPr>
-        <p:txBody>
-          <a:bodyPr wrap="square" lIns="0" tIns="0" rIns="0" bIns="0" rtlCol="0" anchor="ctr"/>
-          <a:lstStyle/>
-          <a:p>
-            <a:pPr algn="ctr" indent="0" marL="0">
-              <a:buNone/>
-            </a:pPr>
-            <a:r>
-              <a:rPr lang="en-US" sz="900" b="1" dirty="0">
-                <a:solidFill>
-                  <a:srgbClr val="9D174D"/>
-                </a:solidFill>
-                <a:latin typeface="Trebuchet MS" pitchFamily="34" charset="0"/>
-                <a:ea typeface="Trebuchet MS" pitchFamily="34" charset="-122"/>
-                <a:cs typeface="Trebuchet MS" pitchFamily="34" charset="-120"/>
-              </a:rPr>
-              <a:t>p</a:t>
-            </a:r>
-            <a:endParaRPr lang="en-US" sz="900" dirty="0"/>
-          </a:p>
-        </p:txBody>
-      </p:sp>
-      <p:sp>
-        <p:nvSpPr>
-          <p:cNvPr id="50" name="Shape 48"/>
-          <p:cNvSpPr/>
-          <p:nvPr/>
-        </p:nvSpPr>
-        <p:spPr>
-          <a:xfrm>
-            <a:off x="5254752" y="4169664"/>
-            <a:ext cx="685800" cy="475488"/>
-          </a:xfrm>
-          <a:prstGeom prst="rect">
-            <a:avLst>
-              <a:gd name="adj" fmla="val 7692"/>
-            </a:avLst>
-          </a:prstGeom>
-          <a:solidFill>
-            <a:srgbClr val="FFFFFF"/>
-          </a:solidFill>
-          <a:ln w="12700">
-            <a:solidFill>
-              <a:srgbClr val="DB2777"/>
-            </a:solidFill>
-            <a:prstDash val="solid"/>
-          </a:ln>
-        </p:spPr>
-      </p:sp>
-      <p:sp>
-        <p:nvSpPr>
-          <p:cNvPr id="51" name="Text 49"/>
-          <p:cNvSpPr/>
-          <p:nvPr/>
-        </p:nvSpPr>
-        <p:spPr>
-          <a:xfrm>
-            <a:off x="5254752" y="4169664"/>
-            <a:ext cx="685800" cy="475488"/>
-          </a:xfrm>
-          <a:prstGeom prst="rect">
-            <a:avLst/>
-          </a:prstGeom>
-          <a:noFill/>
-          <a:ln/>
-        </p:spPr>
-        <p:txBody>
-          <a:bodyPr wrap="square" lIns="0" tIns="0" rIns="0" bIns="0" rtlCol="0" anchor="ctr"/>
-          <a:lstStyle/>
-          <a:p>
-            <a:pPr algn="ctr" indent="0" marL="0">
-              <a:buNone/>
-            </a:pPr>
-            <a:r>
-              <a:rPr lang="en-US" sz="900" b="1" dirty="0">
-                <a:solidFill>
-                  <a:srgbClr val="9D174D"/>
-                </a:solidFill>
-                <a:latin typeface="Trebuchet MS" pitchFamily="34" charset="0"/>
-                <a:ea typeface="Trebuchet MS" pitchFamily="34" charset="-122"/>
-                <a:cs typeface="Trebuchet MS" pitchFamily="34" charset="-120"/>
-              </a:rPr>
-              <a:t>e</a:t>
-            </a:r>
-            <a:endParaRPr lang="en-US" sz="900" dirty="0"/>
-          </a:p>
-        </p:txBody>
-      </p:sp>
-      <p:sp>
-        <p:nvSpPr>
-          <p:cNvPr id="52" name="Shape 50"/>
-          <p:cNvSpPr/>
-          <p:nvPr/>
-        </p:nvSpPr>
-        <p:spPr>
-          <a:xfrm>
-            <a:off x="6062472" y="4169664"/>
-            <a:ext cx="685800" cy="475488"/>
-          </a:xfrm>
-          <a:prstGeom prst="rect">
-            <a:avLst>
-              <a:gd name="adj" fmla="val 7692"/>
-            </a:avLst>
-          </a:prstGeom>
-          <a:solidFill>
-            <a:srgbClr val="FFFFFF"/>
-          </a:solidFill>
-          <a:ln w="12700">
-            <a:solidFill>
-              <a:srgbClr val="DB2777"/>
-            </a:solidFill>
-            <a:prstDash val="solid"/>
-          </a:ln>
-        </p:spPr>
-      </p:sp>
-      <p:sp>
-        <p:nvSpPr>
-          <p:cNvPr id="53" name="Text 51"/>
-          <p:cNvSpPr/>
-          <p:nvPr/>
-        </p:nvSpPr>
-        <p:spPr>
-          <a:xfrm>
-            <a:off x="6062472" y="4169664"/>
-            <a:ext cx="685800" cy="475488"/>
-          </a:xfrm>
-          <a:prstGeom prst="rect">
-            <a:avLst/>
-          </a:prstGeom>
-          <a:noFill/>
-          <a:ln/>
-        </p:spPr>
-        <p:txBody>
-          <a:bodyPr wrap="square" lIns="0" tIns="0" rIns="0" bIns="0" rtlCol="0" anchor="ctr"/>
-          <a:lstStyle/>
-          <a:p>
-            <a:pPr algn="ctr" indent="0" marL="0">
-              <a:buNone/>
-            </a:pPr>
-            <a:r>
-              <a:rPr lang="en-US" sz="900" b="1" dirty="0">
-                <a:solidFill>
-                  <a:srgbClr val="9D174D"/>
-                </a:solidFill>
-                <a:latin typeface="Trebuchet MS" pitchFamily="34" charset="0"/>
-                <a:ea typeface="Trebuchet MS" pitchFamily="34" charset="-122"/>
-                <a:cs typeface="Trebuchet MS" pitchFamily="34" charset="-120"/>
-              </a:rPr>
-              <a:t>n</a:t>
-            </a:r>
-            <a:endParaRPr lang="en-US" sz="900" dirty="0"/>
-          </a:p>
-        </p:txBody>
-      </p:sp>
-      <p:sp>
-        <p:nvSpPr>
-          <p:cNvPr id="54" name="Shape 52"/>
-          <p:cNvSpPr/>
-          <p:nvPr/>
-        </p:nvSpPr>
-        <p:spPr>
-          <a:xfrm>
-            <a:off x="6870192" y="4169664"/>
-            <a:ext cx="685800" cy="475488"/>
-          </a:xfrm>
-          <a:prstGeom prst="rect">
-            <a:avLst>
-              <a:gd name="adj" fmla="val 7692"/>
-            </a:avLst>
-          </a:prstGeom>
-          <a:solidFill>
-            <a:srgbClr val="FFFFFF"/>
-          </a:solidFill>
-          <a:ln w="12700">
-            <a:solidFill>
-              <a:srgbClr val="DB2777"/>
-            </a:solidFill>
-            <a:prstDash val="solid"/>
-          </a:ln>
-        </p:spPr>
-      </p:sp>
-      <p:sp>
-        <p:nvSpPr>
-          <p:cNvPr id="55" name="Text 53"/>
-          <p:cNvSpPr/>
-          <p:nvPr/>
-        </p:nvSpPr>
-        <p:spPr>
-          <a:xfrm>
-            <a:off x="6870192" y="4169664"/>
-            <a:ext cx="685800" cy="475488"/>
-          </a:xfrm>
-          <a:prstGeom prst="rect">
-            <a:avLst/>
-          </a:prstGeom>
-          <a:noFill/>
-          <a:ln/>
-        </p:spPr>
-        <p:txBody>
-          <a:bodyPr wrap="square" lIns="0" tIns="0" rIns="0" bIns="0" rtlCol="0" anchor="ctr"/>
-          <a:lstStyle/>
-          <a:p>
-            <a:pPr algn="ctr" indent="0" marL="0">
-              <a:buNone/>
-            </a:pPr>
-            <a:r>
-              <a:rPr lang="en-US" sz="900" b="1" dirty="0">
-                <a:solidFill>
-                  <a:srgbClr val="9D174D"/>
-                </a:solidFill>
-                <a:latin typeface="Trebuchet MS" pitchFamily="34" charset="0"/>
-                <a:ea typeface="Trebuchet MS" pitchFamily="34" charset="-122"/>
-                <a:cs typeface="Trebuchet MS" pitchFamily="34" charset="-120"/>
-              </a:rPr>
-              <a:t>i</a:t>
-            </a:r>
-            <a:endParaRPr lang="en-US" sz="900" dirty="0"/>
-          </a:p>
-        </p:txBody>
-      </p:sp>
-      <p:sp>
-        <p:nvSpPr>
-          <p:cNvPr id="56" name="Shape 54"/>
-          <p:cNvSpPr/>
-          <p:nvPr/>
-        </p:nvSpPr>
-        <p:spPr>
-          <a:xfrm>
-            <a:off x="7677912" y="4169664"/>
-            <a:ext cx="685800" cy="475488"/>
-          </a:xfrm>
-          <a:prstGeom prst="rect">
-            <a:avLst>
-              <a:gd name="adj" fmla="val 7692"/>
-            </a:avLst>
-          </a:prstGeom>
-          <a:solidFill>
-            <a:srgbClr val="FFFFFF"/>
-          </a:solidFill>
-          <a:ln w="12700">
-            <a:solidFill>
-              <a:srgbClr val="DB2777"/>
-            </a:solidFill>
-            <a:prstDash val="solid"/>
-          </a:ln>
-        </p:spPr>
-      </p:sp>
-      <p:sp>
-        <p:nvSpPr>
-          <p:cNvPr id="57" name="Text 55"/>
-          <p:cNvSpPr/>
-          <p:nvPr/>
-        </p:nvSpPr>
-        <p:spPr>
-          <a:xfrm>
-            <a:off x="7677912" y="4169664"/>
-            <a:ext cx="685800" cy="475488"/>
-          </a:xfrm>
-          <a:prstGeom prst="rect">
-            <a:avLst/>
-          </a:prstGeom>
-          <a:noFill/>
-          <a:ln/>
-        </p:spPr>
-        <p:txBody>
-          <a:bodyPr wrap="square" lIns="0" tIns="0" rIns="0" bIns="0" rtlCol="0" anchor="ctr"/>
-          <a:lstStyle/>
-          <a:p>
-            <a:pPr algn="ctr" indent="0" marL="0">
-              <a:buNone/>
-            </a:pPr>
-            <a:r>
-              <a:rPr lang="en-US" sz="900" b="1" dirty="0">
-                <a:solidFill>
-                  <a:srgbClr val="9D174D"/>
-                </a:solidFill>
-                <a:latin typeface="Trebuchet MS" pitchFamily="34" charset="0"/>
-                <a:ea typeface="Trebuchet MS" pitchFamily="34" charset="-122"/>
-                <a:cs typeface="Trebuchet MS" pitchFamily="34" charset="-120"/>
-              </a:rPr>
-              <a:t>ng</a:t>
+              <a:t>y</a:t>
             </a:r>
             <a:endParaRPr lang="en-US" sz="900" dirty="0"/>
           </a:p>
@@ -17167,7 +17167,7 @@
                 <a:ea typeface="Calibri" pitchFamily="34" charset="-122"/>
                 <a:cs typeface="Calibri" pitchFamily="34" charset="-120"/>
               </a:rPr>
-              <a:t>Word Labs  •  wordlabs.app  •  Root: 'open' = not closed or blocked</a:t>
+              <a:t>Word Labs  •  wordlabs.app  •  Root: 'open' = not closed, accessible, uncovered</a:t>
             </a:r>
             <a:endParaRPr lang="en-US" sz="800" dirty="0"/>
           </a:p>
@@ -17501,7 +17501,7 @@
                 <a:ea typeface="Trebuchet MS" pitchFamily="34" charset="-122"/>
                 <a:cs typeface="Trebuchet MS" pitchFamily="34" charset="-120"/>
               </a:rPr>
-              <a:t>1</a:t>
+              <a:t>2</a:t>
             </a:r>
             <a:pPr algn="ctr" indent="0" marL="0">
               <a:buNone/>
@@ -17515,7 +17515,7 @@
                 <a:ea typeface="Trebuchet MS" pitchFamily="34" charset="-122"/>
                 <a:cs typeface="Trebuchet MS" pitchFamily="34" charset="-120"/>
               </a:rPr>
-              <a:t>  punctuation mark</a:t>
+              <a:t>  punctuation marks</a:t>
             </a:r>
             <a:endParaRPr lang="en-US" sz="2800" dirty="0"/>
           </a:p>
@@ -17807,7 +17807,7 @@
                 <a:ea typeface="Calibri" pitchFamily="34" charset="-122"/>
                 <a:cs typeface="Calibri" pitchFamily="34" charset="-120"/>
               </a:rPr>
-              <a:t>Word Labs  •  wordlabs.app  •  Root: 'open' = not closed or blocked</a:t>
+              <a:t>Word Labs  •  wordlabs.app  •  Root: 'open' = not closed, accessible, uncovered</a:t>
             </a:r>
             <a:endParaRPr lang="en-US" sz="800" dirty="0"/>
           </a:p>
@@ -17919,7 +17919,7 @@
                 <a:ea typeface="Calibri" pitchFamily="34" charset="-122"/>
                 <a:cs typeface="Calibri" pitchFamily="34" charset="-120"/>
               </a:rPr>
-              <a:t>The </a:t>
+              <a:t>With great </a:t>
             </a:r>
             <a:pPr algn="l" indent="0" marL="0">
               <a:buNone/>
@@ -17950,7 +17950,7 @@
                 <a:ea typeface="Calibri" pitchFamily="34" charset="-122"/>
                 <a:cs typeface="Calibri" pitchFamily="34" charset="-120"/>
               </a:rPr>
-              <a:t> of the speaker was admired, but she </a:t>
+              <a:t>, she </a:t>
             </a:r>
             <a:pPr algn="l" indent="0" marL="0">
               <a:buNone/>
@@ -17981,118 +17981,343 @@
                 <a:ea typeface="Calibri" pitchFamily="34" charset="-122"/>
                 <a:cs typeface="Calibri" pitchFamily="34" charset="-120"/>
               </a:rPr>
-              <a:t> the debate by </a:t>
-            </a:r>
+              <a:t> the old chest and found, to her delight, a handwritten letter from her grandmother.</a:t>
+            </a:r>
+            <a:endParaRPr lang="en-US" sz="1800" dirty="0"/>
+          </a:p>
+        </p:txBody>
+      </p:sp>
+      <p:sp>
+        <p:nvSpPr>
+          <p:cNvPr id="13" name="Shape 11"/>
+          <p:cNvSpPr/>
+          <p:nvPr/>
+        </p:nvSpPr>
+        <p:spPr>
+          <a:xfrm>
+            <a:off x="365760" y="2852928"/>
+            <a:ext cx="8412480" cy="475488"/>
+          </a:xfrm>
+          <a:prstGeom prst="rect">
+            <a:avLst>
+              <a:gd name="adj" fmla="val 15385"/>
+            </a:avLst>
+          </a:prstGeom>
+          <a:solidFill>
+            <a:srgbClr val="CCFBF1"/>
+          </a:solidFill>
+          <a:ln w="12700">
+            <a:solidFill>
+              <a:srgbClr val="0D9488"/>
+            </a:solidFill>
+            <a:prstDash val="solid"/>
+          </a:ln>
+        </p:spPr>
+      </p:sp>
+      <p:sp>
+        <p:nvSpPr>
+          <p:cNvPr id="14" name="Text 12"/>
+          <p:cNvSpPr/>
+          <p:nvPr/>
+        </p:nvSpPr>
+        <p:spPr>
+          <a:xfrm>
+            <a:off x="502920" y="2852928"/>
+            <a:ext cx="8229600" cy="475488"/>
+          </a:xfrm>
+          <a:prstGeom prst="rect">
+            <a:avLst/>
+          </a:prstGeom>
+          <a:noFill/>
+          <a:ln/>
+        </p:spPr>
+        <p:txBody>
+          <a:bodyPr wrap="square" rtlCol="0" anchor="ctr"/>
+          <a:lstStyle/>
+          <a:p>
             <a:pPr algn="l" indent="0" marL="0">
               <a:buNone/>
             </a:pPr>
             <a:r>
-              <a:rPr lang="en-US" sz="1800" b="1" dirty="0">
-                <a:solidFill>
-                  <a:srgbClr val="0D9488"/>
-                </a:solidFill>
-                <a:highlight>
-                  <a:srgbClr val="CCFBF1"/>
-                </a:highlight>
+              <a:rPr lang="en-US" sz="1200" b="1" dirty="0">
+                <a:solidFill>
+                  <a:srgbClr val="0F766E"/>
+                </a:solidFill>
                 <a:latin typeface="Calibri" pitchFamily="34" charset="0"/>
                 <a:ea typeface="Calibri" pitchFamily="34" charset="-122"/>
                 <a:cs typeface="Calibri" pitchFamily="34" charset="-120"/>
               </a:rPr>
-              <a:t>openly</a:t>
-            </a:r>
-            <a:pPr algn="l" indent="0" marL="0">
-              <a:buNone/>
-            </a:pPr>
-            <a:r>
-              <a:rPr lang="en-US" sz="1800" dirty="0">
-                <a:solidFill>
-                  <a:srgbClr val="0F172A"/>
+              <a:t>Now rewrite each focus word below with space between letters — leave room for your breakdown.</a:t>
+            </a:r>
+            <a:endParaRPr lang="en-US" sz="1200" dirty="0"/>
+          </a:p>
+        </p:txBody>
+      </p:sp>
+      <p:sp>
+        <p:nvSpPr>
+          <p:cNvPr id="15" name="Shape 13"/>
+          <p:cNvSpPr/>
+          <p:nvPr/>
+        </p:nvSpPr>
+        <p:spPr>
+          <a:xfrm>
+            <a:off x="411480" y="3456432"/>
+            <a:ext cx="2499360" cy="1005840"/>
+          </a:xfrm>
+          <a:prstGeom prst="rect">
+            <a:avLst>
+              <a:gd name="adj" fmla="val 7273"/>
+            </a:avLst>
+          </a:prstGeom>
+          <a:solidFill>
+            <a:srgbClr val="F8FAFC"/>
+          </a:solidFill>
+          <a:ln w="12700">
+            <a:solidFill>
+              <a:srgbClr val="E2E8F0"/>
+            </a:solidFill>
+            <a:prstDash val="solid"/>
+          </a:ln>
+        </p:spPr>
+      </p:sp>
+      <p:sp>
+        <p:nvSpPr>
+          <p:cNvPr id="16" name="Shape 14"/>
+          <p:cNvSpPr/>
+          <p:nvPr/>
+        </p:nvSpPr>
+        <p:spPr>
+          <a:xfrm>
+            <a:off x="411480" y="3977640"/>
+            <a:ext cx="2499360" cy="0"/>
+          </a:xfrm>
+          <a:prstGeom prst="line">
+            <a:avLst/>
+          </a:prstGeom>
+          <a:noFill/>
+          <a:ln w="12700">
+            <a:solidFill>
+              <a:srgbClr val="E2E8F0"/>
+            </a:solidFill>
+            <a:prstDash val="dash"/>
+          </a:ln>
+        </p:spPr>
+      </p:sp>
+      <p:sp>
+        <p:nvSpPr>
+          <p:cNvPr id="17" name="Text 15"/>
+          <p:cNvSpPr/>
+          <p:nvPr/>
+        </p:nvSpPr>
+        <p:spPr>
+          <a:xfrm>
+            <a:off x="411480" y="3456432"/>
+            <a:ext cx="2499360" cy="502920"/>
+          </a:xfrm>
+          <a:prstGeom prst="rect">
+            <a:avLst/>
+          </a:prstGeom>
+          <a:noFill/>
+          <a:ln/>
+        </p:spPr>
+        <p:txBody>
+          <a:bodyPr wrap="square" lIns="0" tIns="0" rIns="0" bIns="0" rtlCol="0" anchor="ctr"/>
+          <a:lstStyle/>
+          <a:p>
+            <a:pPr algn="ctr" indent="0" marL="0">
+              <a:buNone/>
+            </a:pPr>
+            <a:r>
+              <a:rPr lang="en-US" sz="1400" b="1" dirty="0">
+                <a:solidFill>
+                  <a:srgbClr val="0D9488"/>
+                </a:solidFill>
+                <a:latin typeface="Trebuchet MS" pitchFamily="34" charset="0"/>
+                <a:ea typeface="Trebuchet MS" pitchFamily="34" charset="-122"/>
+                <a:cs typeface="Trebuchet MS" pitchFamily="34" charset="-120"/>
+              </a:rPr>
+              <a:t>openness</a:t>
+            </a:r>
+            <a:endParaRPr lang="en-US" sz="1400" dirty="0"/>
+          </a:p>
+        </p:txBody>
+      </p:sp>
+      <p:sp>
+        <p:nvSpPr>
+          <p:cNvPr id="18" name="Text 16"/>
+          <p:cNvSpPr/>
+          <p:nvPr/>
+        </p:nvSpPr>
+        <p:spPr>
+          <a:xfrm>
+            <a:off x="411480" y="4005072"/>
+            <a:ext cx="2499360" cy="457200"/>
+          </a:xfrm>
+          <a:prstGeom prst="rect">
+            <a:avLst/>
+          </a:prstGeom>
+          <a:noFill/>
+          <a:ln/>
+        </p:spPr>
+        <p:txBody>
+          <a:bodyPr wrap="square" lIns="0" tIns="0" rIns="0" bIns="0" rtlCol="0" anchor="ctr"/>
+          <a:lstStyle/>
+          <a:p>
+            <a:pPr algn="ctr" indent="0" marL="0">
+              <a:buNone/>
+            </a:pPr>
+            <a:r>
+              <a:rPr lang="en-US" sz="900" i="1" dirty="0">
+                <a:solidFill>
+                  <a:srgbClr val="475569"/>
                 </a:solidFill>
                 <a:latin typeface="Calibri" pitchFamily="34" charset="0"/>
                 <a:ea typeface="Calibri" pitchFamily="34" charset="-122"/>
                 <a:cs typeface="Calibri" pitchFamily="34" charset="-120"/>
               </a:rPr>
-              <a:t> questioning the final decision.</a:t>
-            </a:r>
-            <a:endParaRPr lang="en-US" sz="1800" dirty="0"/>
-          </a:p>
-        </p:txBody>
-      </p:sp>
-      <p:sp>
-        <p:nvSpPr>
-          <p:cNvPr id="13" name="Shape 11"/>
-          <p:cNvSpPr/>
-          <p:nvPr/>
-        </p:nvSpPr>
-        <p:spPr>
-          <a:xfrm>
-            <a:off x="365760" y="2852928"/>
-            <a:ext cx="8412480" cy="475488"/>
+              <a:t>write your breakdown below</a:t>
+            </a:r>
+            <a:endParaRPr lang="en-US" sz="900" dirty="0"/>
+          </a:p>
+        </p:txBody>
+      </p:sp>
+      <p:sp>
+        <p:nvSpPr>
+          <p:cNvPr id="19" name="Shape 17"/>
+          <p:cNvSpPr/>
+          <p:nvPr/>
+        </p:nvSpPr>
+        <p:spPr>
+          <a:xfrm>
+            <a:off x="3185160" y="3456432"/>
+            <a:ext cx="2499360" cy="1005840"/>
           </a:xfrm>
           <a:prstGeom prst="rect">
             <a:avLst>
-              <a:gd name="adj" fmla="val 15385"/>
+              <a:gd name="adj" fmla="val 7273"/>
             </a:avLst>
           </a:prstGeom>
           <a:solidFill>
-            <a:srgbClr val="CCFBF1"/>
-          </a:solidFill>
-          <a:ln w="12700">
-            <a:solidFill>
-              <a:srgbClr val="0D9488"/>
-            </a:solidFill>
-            <a:prstDash val="solid"/>
-          </a:ln>
-        </p:spPr>
-      </p:sp>
-      <p:sp>
-        <p:nvSpPr>
-          <p:cNvPr id="14" name="Text 12"/>
-          <p:cNvSpPr/>
-          <p:nvPr/>
-        </p:nvSpPr>
-        <p:spPr>
-          <a:xfrm>
-            <a:off x="502920" y="2852928"/>
-            <a:ext cx="8229600" cy="475488"/>
-          </a:xfrm>
-          <a:prstGeom prst="rect">
-            <a:avLst/>
-          </a:prstGeom>
-          <a:noFill/>
-          <a:ln/>
-        </p:spPr>
-        <p:txBody>
-          <a:bodyPr wrap="square" rtlCol="0" anchor="ctr"/>
-          <a:lstStyle/>
-          <a:p>
-            <a:pPr algn="l" indent="0" marL="0">
-              <a:buNone/>
-            </a:pPr>
-            <a:r>
-              <a:rPr lang="en-US" sz="1200" b="1" dirty="0">
-                <a:solidFill>
-                  <a:srgbClr val="0F766E"/>
+            <a:srgbClr val="F8FAFC"/>
+          </a:solidFill>
+          <a:ln w="12700">
+            <a:solidFill>
+              <a:srgbClr val="E2E8F0"/>
+            </a:solidFill>
+            <a:prstDash val="solid"/>
+          </a:ln>
+        </p:spPr>
+      </p:sp>
+      <p:sp>
+        <p:nvSpPr>
+          <p:cNvPr id="20" name="Shape 18"/>
+          <p:cNvSpPr/>
+          <p:nvPr/>
+        </p:nvSpPr>
+        <p:spPr>
+          <a:xfrm>
+            <a:off x="3185160" y="3977640"/>
+            <a:ext cx="2499360" cy="0"/>
+          </a:xfrm>
+          <a:prstGeom prst="line">
+            <a:avLst/>
+          </a:prstGeom>
+          <a:noFill/>
+          <a:ln w="12700">
+            <a:solidFill>
+              <a:srgbClr val="E2E8F0"/>
+            </a:solidFill>
+            <a:prstDash val="dash"/>
+          </a:ln>
+        </p:spPr>
+      </p:sp>
+      <p:sp>
+        <p:nvSpPr>
+          <p:cNvPr id="21" name="Text 19"/>
+          <p:cNvSpPr/>
+          <p:nvPr/>
+        </p:nvSpPr>
+        <p:spPr>
+          <a:xfrm>
+            <a:off x="3185160" y="3456432"/>
+            <a:ext cx="2499360" cy="502920"/>
+          </a:xfrm>
+          <a:prstGeom prst="rect">
+            <a:avLst/>
+          </a:prstGeom>
+          <a:noFill/>
+          <a:ln/>
+        </p:spPr>
+        <p:txBody>
+          <a:bodyPr wrap="square" lIns="0" tIns="0" rIns="0" bIns="0" rtlCol="0" anchor="ctr"/>
+          <a:lstStyle/>
+          <a:p>
+            <a:pPr algn="ctr" indent="0" marL="0">
+              <a:buNone/>
+            </a:pPr>
+            <a:r>
+              <a:rPr lang="en-US" sz="1400" b="1" dirty="0">
+                <a:solidFill>
+                  <a:srgbClr val="0D9488"/>
+                </a:solidFill>
+                <a:latin typeface="Trebuchet MS" pitchFamily="34" charset="0"/>
+                <a:ea typeface="Trebuchet MS" pitchFamily="34" charset="-122"/>
+                <a:cs typeface="Trebuchet MS" pitchFamily="34" charset="-120"/>
+              </a:rPr>
+              <a:t>reopened</a:t>
+            </a:r>
+            <a:endParaRPr lang="en-US" sz="1400" dirty="0"/>
+          </a:p>
+        </p:txBody>
+      </p:sp>
+      <p:sp>
+        <p:nvSpPr>
+          <p:cNvPr id="22" name="Text 20"/>
+          <p:cNvSpPr/>
+          <p:nvPr/>
+        </p:nvSpPr>
+        <p:spPr>
+          <a:xfrm>
+            <a:off x="3185160" y="4005072"/>
+            <a:ext cx="2499360" cy="457200"/>
+          </a:xfrm>
+          <a:prstGeom prst="rect">
+            <a:avLst/>
+          </a:prstGeom>
+          <a:noFill/>
+          <a:ln/>
+        </p:spPr>
+        <p:txBody>
+          <a:bodyPr wrap="square" lIns="0" tIns="0" rIns="0" bIns="0" rtlCol="0" anchor="ctr"/>
+          <a:lstStyle/>
+          <a:p>
+            <a:pPr algn="ctr" indent="0" marL="0">
+              <a:buNone/>
+            </a:pPr>
+            <a:r>
+              <a:rPr lang="en-US" sz="900" i="1" dirty="0">
+                <a:solidFill>
+                  <a:srgbClr val="475569"/>
                 </a:solidFill>
                 <a:latin typeface="Calibri" pitchFamily="34" charset="0"/>
                 <a:ea typeface="Calibri" pitchFamily="34" charset="-122"/>
                 <a:cs typeface="Calibri" pitchFamily="34" charset="-120"/>
               </a:rPr>
-              <a:t>Now rewrite each focus word below with space between letters — leave room for your breakdown.</a:t>
-            </a:r>
-            <a:endParaRPr lang="en-US" sz="1200" dirty="0"/>
-          </a:p>
-        </p:txBody>
-      </p:sp>
-      <p:sp>
-        <p:nvSpPr>
-          <p:cNvPr id="15" name="Shape 13"/>
-          <p:cNvSpPr/>
-          <p:nvPr/>
-        </p:nvSpPr>
-        <p:spPr>
-          <a:xfrm>
-            <a:off x="411480" y="3456432"/>
+              <a:t>write your breakdown below</a:t>
+            </a:r>
+            <a:endParaRPr lang="en-US" sz="900" dirty="0"/>
+          </a:p>
+        </p:txBody>
+      </p:sp>
+      <p:sp>
+        <p:nvSpPr>
+          <p:cNvPr id="23" name="Shape 21"/>
+          <p:cNvSpPr/>
+          <p:nvPr/>
+        </p:nvSpPr>
+        <p:spPr>
+          <a:xfrm>
+            <a:off x="5958840" y="3456432"/>
             <a:ext cx="2499360" cy="1005840"/>
           </a:xfrm>
           <a:prstGeom prst="rect">
@@ -18113,13 +18338,13 @@
       </p:sp>
       <p:sp>
         <p:nvSpPr>
-          <p:cNvPr id="16" name="Shape 14"/>
-          <p:cNvSpPr/>
-          <p:nvPr/>
-        </p:nvSpPr>
-        <p:spPr>
-          <a:xfrm>
-            <a:off x="411480" y="3977640"/>
+          <p:cNvPr id="24" name="Shape 22"/>
+          <p:cNvSpPr/>
+          <p:nvPr/>
+        </p:nvSpPr>
+        <p:spPr>
+          <a:xfrm>
+            <a:off x="5958840" y="3977640"/>
             <a:ext cx="2499360" cy="0"/>
           </a:xfrm>
           <a:prstGeom prst="line">
@@ -18136,13 +18361,13 @@
       </p:sp>
       <p:sp>
         <p:nvSpPr>
-          <p:cNvPr id="17" name="Text 15"/>
-          <p:cNvSpPr/>
-          <p:nvPr/>
-        </p:nvSpPr>
-        <p:spPr>
-          <a:xfrm>
-            <a:off x="411480" y="3456432"/>
+          <p:cNvPr id="25" name="Text 23"/>
+          <p:cNvSpPr/>
+          <p:nvPr/>
+        </p:nvSpPr>
+        <p:spPr>
+          <a:xfrm>
+            <a:off x="5958840" y="3456432"/>
             <a:ext cx="2499360" cy="502920"/>
           </a:xfrm>
           <a:prstGeom prst="rect">
@@ -18167,263 +18392,7 @@
                 <a:ea typeface="Trebuchet MS" pitchFamily="34" charset="-122"/>
                 <a:cs typeface="Trebuchet MS" pitchFamily="34" charset="-120"/>
               </a:rPr>
-              <a:t>openness</a:t>
-            </a:r>
-            <a:endParaRPr lang="en-US" sz="1400" dirty="0"/>
-          </a:p>
-        </p:txBody>
-      </p:sp>
-      <p:sp>
-        <p:nvSpPr>
-          <p:cNvPr id="18" name="Text 16"/>
-          <p:cNvSpPr/>
-          <p:nvPr/>
-        </p:nvSpPr>
-        <p:spPr>
-          <a:xfrm>
-            <a:off x="411480" y="4005072"/>
-            <a:ext cx="2499360" cy="457200"/>
-          </a:xfrm>
-          <a:prstGeom prst="rect">
-            <a:avLst/>
-          </a:prstGeom>
-          <a:noFill/>
-          <a:ln/>
-        </p:spPr>
-        <p:txBody>
-          <a:bodyPr wrap="square" lIns="0" tIns="0" rIns="0" bIns="0" rtlCol="0" anchor="ctr"/>
-          <a:lstStyle/>
-          <a:p>
-            <a:pPr algn="ctr" indent="0" marL="0">
-              <a:buNone/>
-            </a:pPr>
-            <a:r>
-              <a:rPr lang="en-US" sz="900" i="1" dirty="0">
-                <a:solidFill>
-                  <a:srgbClr val="475569"/>
-                </a:solidFill>
-                <a:latin typeface="Calibri" pitchFamily="34" charset="0"/>
-                <a:ea typeface="Calibri" pitchFamily="34" charset="-122"/>
-                <a:cs typeface="Calibri" pitchFamily="34" charset="-120"/>
-              </a:rPr>
-              <a:t>write your breakdown below</a:t>
-            </a:r>
-            <a:endParaRPr lang="en-US" sz="900" dirty="0"/>
-          </a:p>
-        </p:txBody>
-      </p:sp>
-      <p:sp>
-        <p:nvSpPr>
-          <p:cNvPr id="19" name="Shape 17"/>
-          <p:cNvSpPr/>
-          <p:nvPr/>
-        </p:nvSpPr>
-        <p:spPr>
-          <a:xfrm>
-            <a:off x="3185160" y="3456432"/>
-            <a:ext cx="2499360" cy="1005840"/>
-          </a:xfrm>
-          <a:prstGeom prst="rect">
-            <a:avLst>
-              <a:gd name="adj" fmla="val 7273"/>
-            </a:avLst>
-          </a:prstGeom>
-          <a:solidFill>
-            <a:srgbClr val="F8FAFC"/>
-          </a:solidFill>
-          <a:ln w="12700">
-            <a:solidFill>
-              <a:srgbClr val="E2E8F0"/>
-            </a:solidFill>
-            <a:prstDash val="solid"/>
-          </a:ln>
-        </p:spPr>
-      </p:sp>
-      <p:sp>
-        <p:nvSpPr>
-          <p:cNvPr id="20" name="Shape 18"/>
-          <p:cNvSpPr/>
-          <p:nvPr/>
-        </p:nvSpPr>
-        <p:spPr>
-          <a:xfrm>
-            <a:off x="3185160" y="3977640"/>
-            <a:ext cx="2499360" cy="0"/>
-          </a:xfrm>
-          <a:prstGeom prst="line">
-            <a:avLst/>
-          </a:prstGeom>
-          <a:noFill/>
-          <a:ln w="12700">
-            <a:solidFill>
-              <a:srgbClr val="E2E8F0"/>
-            </a:solidFill>
-            <a:prstDash val="dash"/>
-          </a:ln>
-        </p:spPr>
-      </p:sp>
-      <p:sp>
-        <p:nvSpPr>
-          <p:cNvPr id="21" name="Text 19"/>
-          <p:cNvSpPr/>
-          <p:nvPr/>
-        </p:nvSpPr>
-        <p:spPr>
-          <a:xfrm>
-            <a:off x="3185160" y="3456432"/>
-            <a:ext cx="2499360" cy="502920"/>
-          </a:xfrm>
-          <a:prstGeom prst="rect">
-            <a:avLst/>
-          </a:prstGeom>
-          <a:noFill/>
-          <a:ln/>
-        </p:spPr>
-        <p:txBody>
-          <a:bodyPr wrap="square" lIns="0" tIns="0" rIns="0" bIns="0" rtlCol="0" anchor="ctr"/>
-          <a:lstStyle/>
-          <a:p>
-            <a:pPr algn="ctr" indent="0" marL="0">
-              <a:buNone/>
-            </a:pPr>
-            <a:r>
-              <a:rPr lang="en-US" sz="1400" b="1" dirty="0">
-                <a:solidFill>
-                  <a:srgbClr val="0D9488"/>
-                </a:solidFill>
-                <a:latin typeface="Trebuchet MS" pitchFamily="34" charset="0"/>
-                <a:ea typeface="Trebuchet MS" pitchFamily="34" charset="-122"/>
-                <a:cs typeface="Trebuchet MS" pitchFamily="34" charset="-120"/>
-              </a:rPr>
-              <a:t>reopened</a:t>
-            </a:r>
-            <a:endParaRPr lang="en-US" sz="1400" dirty="0"/>
-          </a:p>
-        </p:txBody>
-      </p:sp>
-      <p:sp>
-        <p:nvSpPr>
-          <p:cNvPr id="22" name="Text 20"/>
-          <p:cNvSpPr/>
-          <p:nvPr/>
-        </p:nvSpPr>
-        <p:spPr>
-          <a:xfrm>
-            <a:off x="3185160" y="4005072"/>
-            <a:ext cx="2499360" cy="457200"/>
-          </a:xfrm>
-          <a:prstGeom prst="rect">
-            <a:avLst/>
-          </a:prstGeom>
-          <a:noFill/>
-          <a:ln/>
-        </p:spPr>
-        <p:txBody>
-          <a:bodyPr wrap="square" lIns="0" tIns="0" rIns="0" bIns="0" rtlCol="0" anchor="ctr"/>
-          <a:lstStyle/>
-          <a:p>
-            <a:pPr algn="ctr" indent="0" marL="0">
-              <a:buNone/>
-            </a:pPr>
-            <a:r>
-              <a:rPr lang="en-US" sz="900" i="1" dirty="0">
-                <a:solidFill>
-                  <a:srgbClr val="475569"/>
-                </a:solidFill>
-                <a:latin typeface="Calibri" pitchFamily="34" charset="0"/>
-                <a:ea typeface="Calibri" pitchFamily="34" charset="-122"/>
-                <a:cs typeface="Calibri" pitchFamily="34" charset="-120"/>
-              </a:rPr>
-              <a:t>write your breakdown below</a:t>
-            </a:r>
-            <a:endParaRPr lang="en-US" sz="900" dirty="0"/>
-          </a:p>
-        </p:txBody>
-      </p:sp>
-      <p:sp>
-        <p:nvSpPr>
-          <p:cNvPr id="23" name="Shape 21"/>
-          <p:cNvSpPr/>
-          <p:nvPr/>
-        </p:nvSpPr>
-        <p:spPr>
-          <a:xfrm>
-            <a:off x="5958840" y="3456432"/>
-            <a:ext cx="2499360" cy="1005840"/>
-          </a:xfrm>
-          <a:prstGeom prst="rect">
-            <a:avLst>
-              <a:gd name="adj" fmla="val 7273"/>
-            </a:avLst>
-          </a:prstGeom>
-          <a:solidFill>
-            <a:srgbClr val="F8FAFC"/>
-          </a:solidFill>
-          <a:ln w="12700">
-            <a:solidFill>
-              <a:srgbClr val="E2E8F0"/>
-            </a:solidFill>
-            <a:prstDash val="solid"/>
-          </a:ln>
-        </p:spPr>
-      </p:sp>
-      <p:sp>
-        <p:nvSpPr>
-          <p:cNvPr id="24" name="Shape 22"/>
-          <p:cNvSpPr/>
-          <p:nvPr/>
-        </p:nvSpPr>
-        <p:spPr>
-          <a:xfrm>
-            <a:off x="5958840" y="3977640"/>
-            <a:ext cx="2499360" cy="0"/>
-          </a:xfrm>
-          <a:prstGeom prst="line">
-            <a:avLst/>
-          </a:prstGeom>
-          <a:noFill/>
-          <a:ln w="12700">
-            <a:solidFill>
-              <a:srgbClr val="E2E8F0"/>
-            </a:solidFill>
-            <a:prstDash val="dash"/>
-          </a:ln>
-        </p:spPr>
-      </p:sp>
-      <p:sp>
-        <p:nvSpPr>
-          <p:cNvPr id="25" name="Text 23"/>
-          <p:cNvSpPr/>
-          <p:nvPr/>
-        </p:nvSpPr>
-        <p:spPr>
-          <a:xfrm>
-            <a:off x="5958840" y="3456432"/>
-            <a:ext cx="2499360" cy="502920"/>
-          </a:xfrm>
-          <a:prstGeom prst="rect">
-            <a:avLst/>
-          </a:prstGeom>
-          <a:noFill/>
-          <a:ln/>
-        </p:spPr>
-        <p:txBody>
-          <a:bodyPr wrap="square" lIns="0" tIns="0" rIns="0" bIns="0" rtlCol="0" anchor="ctr"/>
-          <a:lstStyle/>
-          <a:p>
-            <a:pPr algn="ctr" indent="0" marL="0">
-              <a:buNone/>
-            </a:pPr>
-            <a:r>
-              <a:rPr lang="en-US" sz="1400" b="1" dirty="0">
-                <a:solidFill>
-                  <a:srgbClr val="0D9488"/>
-                </a:solidFill>
-                <a:latin typeface="Trebuchet MS" pitchFamily="34" charset="0"/>
-                <a:ea typeface="Trebuchet MS" pitchFamily="34" charset="-122"/>
-                <a:cs typeface="Trebuchet MS" pitchFamily="34" charset="-120"/>
-              </a:rPr>
-              <a:t>openly</a:t>
+              <a:t>opener</a:t>
             </a:r>
             <a:endParaRPr lang="en-US" sz="1400" dirty="0"/>
           </a:p>
@@ -18754,7 +18723,7 @@
                 <a:ea typeface="Calibri" pitchFamily="34" charset="-122"/>
                 <a:cs typeface="Calibri" pitchFamily="34" charset="-120"/>
               </a:rPr>
-              <a:t>Word Labs  •  wordlabs.app  •  Root: 'open' = not closed or blocked</a:t>
+              <a:t>Word Labs  •  wordlabs.app  •  Root: 'open' = not closed, accessible, uncovered</a:t>
             </a:r>
             <a:endParaRPr lang="en-US" sz="800" dirty="0"/>
           </a:p>
@@ -19581,7 +19550,7 @@
                 <a:ea typeface="Calibri" pitchFamily="34" charset="-122"/>
                 <a:cs typeface="Calibri" pitchFamily="34" charset="-120"/>
               </a:rPr>
-              <a:t>Word Labs  •  wordlabs.app  •  Root: 'open' = not closed or blocked</a:t>
+              <a:t>Word Labs  •  wordlabs.app  •  Root: 'open' = not closed, accessible, uncovered</a:t>
             </a:r>
             <a:endParaRPr lang="en-US" sz="800" dirty="0"/>
           </a:p>
@@ -19898,7 +19867,7 @@
                 <a:ea typeface="Calibri" pitchFamily="34" charset="-122"/>
                 <a:cs typeface="Calibri" pitchFamily="34" charset="-120"/>
               </a:rPr>
-              <a:t>not closed; honest</a:t>
+              <a:t>not closed, accessible</a:t>
             </a:r>
             <a:endParaRPr lang="en-US" sz="850" dirty="0"/>
           </a:p>
@@ -20010,7 +19979,7 @@
                 <a:ea typeface="Calibri" pitchFamily="34" charset="-122"/>
                 <a:cs typeface="Calibri" pitchFamily="34" charset="-120"/>
               </a:rPr>
-              <a:t>state or quality of</a:t>
+              <a:t>quality or state of</a:t>
             </a:r>
             <a:endParaRPr lang="en-US" sz="850" dirty="0"/>
           </a:p>
@@ -20566,7 +20535,7 @@
                 <a:ea typeface="Calibri" pitchFamily="34" charset="-122"/>
                 <a:cs typeface="Calibri" pitchFamily="34" charset="-120"/>
               </a:rPr>
-              <a:t>Word Labs  •  wordlabs.app  •  Root: 'open' = not closed or blocked</a:t>
+              <a:t>Word Labs  •  wordlabs.app  •  Root: 'open' = not closed, accessible, uncovered</a:t>
             </a:r>
             <a:endParaRPr lang="en-US" sz="800" dirty="0"/>
           </a:p>
@@ -20883,7 +20852,7 @@
                 <a:ea typeface="Calibri" pitchFamily="34" charset="-122"/>
                 <a:cs typeface="Calibri" pitchFamily="34" charset="-120"/>
               </a:rPr>
-              <a:t>not closed; honest</a:t>
+              <a:t>not closed, accessible</a:t>
             </a:r>
             <a:endParaRPr lang="en-US" sz="850" dirty="0"/>
           </a:p>
@@ -20995,7 +20964,7 @@
                 <a:ea typeface="Calibri" pitchFamily="34" charset="-122"/>
                 <a:cs typeface="Calibri" pitchFamily="34" charset="-120"/>
               </a:rPr>
-              <a:t>state or quality of</a:t>
+              <a:t>quality or state of</a:t>
             </a:r>
             <a:endParaRPr lang="en-US" sz="850" dirty="0"/>
           </a:p>
@@ -21788,7 +21757,7 @@
                 <a:ea typeface="Calibri" pitchFamily="34" charset="-122"/>
                 <a:cs typeface="Calibri" pitchFamily="34" charset="-120"/>
               </a:rPr>
-              <a:t>Word Labs  •  wordlabs.app  •  Root: 'open' = not closed or blocked</a:t>
+              <a:t>Word Labs  •  wordlabs.app  •  Root: 'open' = not closed, accessible, uncovered</a:t>
             </a:r>
             <a:endParaRPr lang="en-US" sz="800" dirty="0"/>
           </a:p>
@@ -22105,7 +22074,7 @@
                 <a:ea typeface="Calibri" pitchFamily="34" charset="-122"/>
                 <a:cs typeface="Calibri" pitchFamily="34" charset="-120"/>
               </a:rPr>
-              <a:t>not closed; honest</a:t>
+              <a:t>not closed, accessible</a:t>
             </a:r>
             <a:endParaRPr lang="en-US" sz="850" dirty="0"/>
           </a:p>
@@ -22217,7 +22186,7 @@
                 <a:ea typeface="Calibri" pitchFamily="34" charset="-122"/>
                 <a:cs typeface="Calibri" pitchFamily="34" charset="-120"/>
               </a:rPr>
-              <a:t>state or quality of</a:t>
+              <a:t>quality or state of</a:t>
             </a:r>
             <a:endParaRPr lang="en-US" sz="850" dirty="0"/>
           </a:p>
@@ -23433,7 +23402,7 @@
                 <a:ea typeface="Calibri" pitchFamily="34" charset="-122"/>
                 <a:cs typeface="Calibri" pitchFamily="34" charset="-120"/>
               </a:rPr>
-              <a:t>Word Labs  •  wordlabs.app  •  Root: 'open' = not closed or blocked</a:t>
+              <a:t>Word Labs  •  wordlabs.app  •  Root: 'open' = not closed, accessible, uncovered</a:t>
             </a:r>
             <a:endParaRPr lang="en-US" sz="800" dirty="0"/>
           </a:p>
@@ -24260,7 +24229,7 @@
                 <a:ea typeface="Calibri" pitchFamily="34" charset="-122"/>
                 <a:cs typeface="Calibri" pitchFamily="34" charset="-120"/>
               </a:rPr>
-              <a:t>Word Labs  •  wordlabs.app  •  Root: 'open' = not closed or blocked</a:t>
+              <a:t>Word Labs  •  wordlabs.app  •  Root: 'open' = not closed, accessible, uncovered</a:t>
             </a:r>
             <a:endParaRPr lang="en-US" sz="800" dirty="0"/>
           </a:p>
@@ -24689,7 +24658,7 @@
                 <a:ea typeface="Calibri" pitchFamily="34" charset="-122"/>
                 <a:cs typeface="Calibri" pitchFamily="34" charset="-120"/>
               </a:rPr>
-              <a:t>not closed</a:t>
+              <a:t>not closed, accessible</a:t>
             </a:r>
             <a:endParaRPr lang="en-US" sz="850" dirty="0"/>
           </a:p>
@@ -25357,7 +25326,7 @@
                 <a:ea typeface="Calibri" pitchFamily="34" charset="-122"/>
                 <a:cs typeface="Calibri" pitchFamily="34" charset="-120"/>
               </a:rPr>
-              <a:t>Word Labs  •  wordlabs.app  •  Root: 'open' = not closed or blocked</a:t>
+              <a:t>Word Labs  •  wordlabs.app  •  Root: 'open' = not closed, accessible, uncovered</a:t>
             </a:r>
             <a:endParaRPr lang="en-US" sz="800" dirty="0"/>
           </a:p>
@@ -25430,7 +25399,7 @@
                 <a:ea typeface="Trebuchet MS" pitchFamily="34" charset="-122"/>
                 <a:cs typeface="Trebuchet MS" pitchFamily="34" charset="-120"/>
               </a:rPr>
-              <a:t>We are learning that the root 'open' means 'not closed or blocked'.</a:t>
+              <a:t>We are learning that the root 'open' means 'not closed, accessible, uncovered'.</a:t>
             </a:r>
             <a:endParaRPr lang="en-US" sz="2000" dirty="0"/>
           </a:p>
@@ -26076,7 +26045,7 @@
                 <a:ea typeface="Calibri" pitchFamily="34" charset="-122"/>
                 <a:cs typeface="Calibri" pitchFamily="34" charset="-120"/>
               </a:rPr>
-              <a:t>Word Labs  •  wordlabs.app  •  Root: 'open' = not closed or blocked</a:t>
+              <a:t>Word Labs  •  wordlabs.app  •  Root: 'open' = not closed, accessible, uncovered</a:t>
             </a:r>
             <a:endParaRPr lang="en-US" sz="800" dirty="0"/>
           </a:p>
@@ -26505,7 +26474,7 @@
                 <a:ea typeface="Calibri" pitchFamily="34" charset="-122"/>
                 <a:cs typeface="Calibri" pitchFamily="34" charset="-120"/>
               </a:rPr>
-              <a:t>not closed</a:t>
+              <a:t>not closed, accessible</a:t>
             </a:r>
             <a:endParaRPr lang="en-US" sz="850" dirty="0"/>
           </a:p>
@@ -27410,7 +27379,7 @@
                 <a:ea typeface="Calibri" pitchFamily="34" charset="-122"/>
                 <a:cs typeface="Calibri" pitchFamily="34" charset="-120"/>
               </a:rPr>
-              <a:t>Word Labs  •  wordlabs.app  •  Root: 'open' = not closed or blocked</a:t>
+              <a:t>Word Labs  •  wordlabs.app  •  Root: 'open' = not closed, accessible, uncovered</a:t>
             </a:r>
             <a:endParaRPr lang="en-US" sz="800" dirty="0"/>
           </a:p>
@@ -27839,7 +27808,7 @@
                 <a:ea typeface="Calibri" pitchFamily="34" charset="-122"/>
                 <a:cs typeface="Calibri" pitchFamily="34" charset="-120"/>
               </a:rPr>
-              <a:t>not closed</a:t>
+              <a:t>not closed, accessible</a:t>
             </a:r>
             <a:endParaRPr lang="en-US" sz="850" dirty="0"/>
           </a:p>
@@ -29167,7 +29136,7 @@
                 <a:ea typeface="Calibri" pitchFamily="34" charset="-122"/>
                 <a:cs typeface="Calibri" pitchFamily="34" charset="-120"/>
               </a:rPr>
-              <a:t>Word Labs  •  wordlabs.app  •  Root: 'open' = not closed or blocked</a:t>
+              <a:t>Word Labs  •  wordlabs.app  •  Root: 'open' = not closed, accessible, uncovered</a:t>
             </a:r>
             <a:endParaRPr lang="en-US" sz="800" dirty="0"/>
           </a:p>
@@ -29306,7 +29275,7 @@
                 <a:ea typeface="Trebuchet MS" pitchFamily="34" charset="-122"/>
                 <a:cs typeface="Trebuchet MS" pitchFamily="34" charset="-120"/>
               </a:rPr>
-              <a:t>openly</a:t>
+              <a:t>opener</a:t>
             </a:r>
             <a:endParaRPr lang="en-US" sz="2800" dirty="0"/>
           </a:p>
@@ -29994,7 +29963,7 @@
                 <a:ea typeface="Calibri" pitchFamily="34" charset="-122"/>
                 <a:cs typeface="Calibri" pitchFamily="34" charset="-120"/>
               </a:rPr>
-              <a:t>Word Labs  •  wordlabs.app  •  Root: 'open' = not closed or blocked</a:t>
+              <a:t>Word Labs  •  wordlabs.app  •  Root: 'open' = not closed, accessible, uncovered</a:t>
             </a:r>
             <a:endParaRPr lang="en-US" sz="800" dirty="0"/>
           </a:p>
@@ -30133,7 +30102,7 @@
                 <a:ea typeface="Trebuchet MS" pitchFamily="34" charset="-122"/>
                 <a:cs typeface="Trebuchet MS" pitchFamily="34" charset="-120"/>
               </a:rPr>
-              <a:t>openly</a:t>
+              <a:t>opener</a:t>
             </a:r>
             <a:endParaRPr lang="en-US" sz="2800" dirty="0"/>
           </a:p>
@@ -30311,7 +30280,7 @@
                 <a:ea typeface="Calibri" pitchFamily="34" charset="-122"/>
                 <a:cs typeface="Calibri" pitchFamily="34" charset="-120"/>
               </a:rPr>
-              <a:t>not closed; honest</a:t>
+              <a:t>not closed, accessible</a:t>
             </a:r>
             <a:endParaRPr lang="en-US" sz="850" dirty="0"/>
           </a:p>
@@ -30384,7 +30353,7 @@
                 <a:ea typeface="Trebuchet MS" pitchFamily="34" charset="-122"/>
                 <a:cs typeface="Trebuchet MS" pitchFamily="34" charset="-120"/>
               </a:rPr>
-              <a:t>ly</a:t>
+              <a:t>er</a:t>
             </a:r>
             <a:endParaRPr lang="en-US" sz="1300" dirty="0"/>
           </a:p>
@@ -30423,7 +30392,7 @@
                 <a:ea typeface="Calibri" pitchFamily="34" charset="-122"/>
                 <a:cs typeface="Calibri" pitchFamily="34" charset="-120"/>
               </a:rPr>
-              <a:t>in a certain way</a:t>
+              <a:t>a person or thing that does</a:t>
             </a:r>
             <a:endParaRPr lang="en-US" sz="850" dirty="0"/>
           </a:p>
@@ -30979,7 +30948,7 @@
                 <a:ea typeface="Calibri" pitchFamily="34" charset="-122"/>
                 <a:cs typeface="Calibri" pitchFamily="34" charset="-120"/>
               </a:rPr>
-              <a:t>Word Labs  •  wordlabs.app  •  Root: 'open' = not closed or blocked</a:t>
+              <a:t>Word Labs  •  wordlabs.app  •  Root: 'open' = not closed, accessible, uncovered</a:t>
             </a:r>
             <a:endParaRPr lang="en-US" sz="800" dirty="0"/>
           </a:p>
@@ -31118,7 +31087,7 @@
                 <a:ea typeface="Trebuchet MS" pitchFamily="34" charset="-122"/>
                 <a:cs typeface="Trebuchet MS" pitchFamily="34" charset="-120"/>
               </a:rPr>
-              <a:t>openly</a:t>
+              <a:t>opener</a:t>
             </a:r>
             <a:endParaRPr lang="en-US" sz="2800" dirty="0"/>
           </a:p>
@@ -31296,7 +31265,7 @@
                 <a:ea typeface="Calibri" pitchFamily="34" charset="-122"/>
                 <a:cs typeface="Calibri" pitchFamily="34" charset="-120"/>
               </a:rPr>
-              <a:t>not closed; honest</a:t>
+              <a:t>not closed, accessible</a:t>
             </a:r>
             <a:endParaRPr lang="en-US" sz="850" dirty="0"/>
           </a:p>
@@ -31369,7 +31338,7 @@
                 <a:ea typeface="Trebuchet MS" pitchFamily="34" charset="-122"/>
                 <a:cs typeface="Trebuchet MS" pitchFamily="34" charset="-120"/>
               </a:rPr>
-              <a:t>ly</a:t>
+              <a:t>er</a:t>
             </a:r>
             <a:endParaRPr lang="en-US" sz="1300" dirty="0"/>
           </a:p>
@@ -31408,7 +31377,7 @@
                 <a:ea typeface="Calibri" pitchFamily="34" charset="-122"/>
                 <a:cs typeface="Calibri" pitchFamily="34" charset="-120"/>
               </a:rPr>
-              <a:t>in a certain way</a:t>
+              <a:t>a person or thing that does</a:t>
             </a:r>
             <a:endParaRPr lang="en-US" sz="850" dirty="0"/>
           </a:p>
@@ -31777,7 +31746,7 @@
                 <a:ea typeface="Trebuchet MS" pitchFamily="34" charset="-122"/>
                 <a:cs typeface="Trebuchet MS" pitchFamily="34" charset="-120"/>
               </a:rPr>
-              <a:t>ly</a:t>
+              <a:t>er</a:t>
             </a:r>
             <a:endParaRPr lang="en-US" sz="1400" dirty="0"/>
           </a:p>
@@ -32201,7 +32170,7 @@
                 <a:ea typeface="Calibri" pitchFamily="34" charset="-122"/>
                 <a:cs typeface="Calibri" pitchFamily="34" charset="-120"/>
               </a:rPr>
-              <a:t>Word Labs  •  wordlabs.app  •  Root: 'open' = not closed or blocked</a:t>
+              <a:t>Word Labs  •  wordlabs.app  •  Root: 'open' = not closed, accessible, uncovered</a:t>
             </a:r>
             <a:endParaRPr lang="en-US" sz="800" dirty="0"/>
           </a:p>
@@ -32340,7 +32309,7 @@
                 <a:ea typeface="Trebuchet MS" pitchFamily="34" charset="-122"/>
                 <a:cs typeface="Trebuchet MS" pitchFamily="34" charset="-120"/>
               </a:rPr>
-              <a:t>openly</a:t>
+              <a:t>opener</a:t>
             </a:r>
             <a:endParaRPr lang="en-US" sz="2800" dirty="0"/>
           </a:p>
@@ -32518,7 +32487,7 @@
                 <a:ea typeface="Calibri" pitchFamily="34" charset="-122"/>
                 <a:cs typeface="Calibri" pitchFamily="34" charset="-120"/>
               </a:rPr>
-              <a:t>not closed; honest</a:t>
+              <a:t>not closed, accessible</a:t>
             </a:r>
             <a:endParaRPr lang="en-US" sz="850" dirty="0"/>
           </a:p>
@@ -32591,7 +32560,7 @@
                 <a:ea typeface="Trebuchet MS" pitchFamily="34" charset="-122"/>
                 <a:cs typeface="Trebuchet MS" pitchFamily="34" charset="-120"/>
               </a:rPr>
-              <a:t>ly</a:t>
+              <a:t>er</a:t>
             </a:r>
             <a:endParaRPr lang="en-US" sz="1300" dirty="0"/>
           </a:p>
@@ -32630,7 +32599,7 @@
                 <a:ea typeface="Calibri" pitchFamily="34" charset="-122"/>
                 <a:cs typeface="Calibri" pitchFamily="34" charset="-120"/>
               </a:rPr>
-              <a:t>in a certain way</a:t>
+              <a:t>a person or thing that does</a:t>
             </a:r>
             <a:endParaRPr lang="en-US" sz="850" dirty="0"/>
           </a:p>
@@ -32999,7 +32968,7 @@
                 <a:ea typeface="Trebuchet MS" pitchFamily="34" charset="-122"/>
                 <a:cs typeface="Trebuchet MS" pitchFamily="34" charset="-120"/>
               </a:rPr>
-              <a:t>ly</a:t>
+              <a:t>er</a:t>
             </a:r>
             <a:endParaRPr lang="en-US" sz="1400" dirty="0"/>
           </a:p>
@@ -33106,7 +33075,7 @@
         </p:nvSpPr>
         <p:spPr>
           <a:xfrm>
-            <a:off x="2254649" y="4169664"/>
+            <a:off x="2427732" y="4169664"/>
             <a:ext cx="685800" cy="475488"/>
           </a:xfrm>
           <a:prstGeom prst="rect">
@@ -33133,7 +33102,7 @@
         </p:nvSpPr>
         <p:spPr>
           <a:xfrm>
-            <a:off x="2254649" y="4169664"/>
+            <a:off x="2427732" y="4169664"/>
             <a:ext cx="685800" cy="475488"/>
           </a:xfrm>
           <a:prstGeom prst="rect">
@@ -33172,7 +33141,7 @@
         </p:nvSpPr>
         <p:spPr>
           <a:xfrm>
-            <a:off x="3293146" y="4169664"/>
+            <a:off x="3639312" y="4169664"/>
             <a:ext cx="685800" cy="475488"/>
           </a:xfrm>
           <a:prstGeom prst="rect">
@@ -33199,7 +33168,7 @@
         </p:nvSpPr>
         <p:spPr>
           <a:xfrm>
-            <a:off x="3293146" y="4169664"/>
+            <a:off x="3639312" y="4169664"/>
             <a:ext cx="685800" cy="475488"/>
           </a:xfrm>
           <a:prstGeom prst="rect">
@@ -33238,7 +33207,7 @@
         </p:nvSpPr>
         <p:spPr>
           <a:xfrm>
-            <a:off x="4331643" y="4169664"/>
+            <a:off x="4850892" y="4169664"/>
             <a:ext cx="685800" cy="475488"/>
           </a:xfrm>
           <a:prstGeom prst="rect">
@@ -33265,7 +33234,7 @@
         </p:nvSpPr>
         <p:spPr>
           <a:xfrm>
-            <a:off x="4331643" y="4169664"/>
+            <a:off x="4850892" y="4169664"/>
             <a:ext cx="685800" cy="475488"/>
           </a:xfrm>
           <a:prstGeom prst="rect">
@@ -33304,7 +33273,7 @@
         </p:nvSpPr>
         <p:spPr>
           <a:xfrm>
-            <a:off x="5370141" y="4169664"/>
+            <a:off x="6062472" y="4169664"/>
             <a:ext cx="685800" cy="475488"/>
           </a:xfrm>
           <a:prstGeom prst="rect">
@@ -33331,7 +33300,7 @@
         </p:nvSpPr>
         <p:spPr>
           <a:xfrm>
-            <a:off x="5370141" y="4169664"/>
+            <a:off x="6062472" y="4169664"/>
             <a:ext cx="685800" cy="475488"/>
           </a:xfrm>
           <a:prstGeom prst="rect">
@@ -33370,7 +33339,7 @@
         </p:nvSpPr>
         <p:spPr>
           <a:xfrm>
-            <a:off x="6408638" y="4169664"/>
+            <a:off x="7274052" y="4169664"/>
             <a:ext cx="685800" cy="475488"/>
           </a:xfrm>
           <a:prstGeom prst="rect">
@@ -33397,7 +33366,7 @@
         </p:nvSpPr>
         <p:spPr>
           <a:xfrm>
-            <a:off x="6408638" y="4169664"/>
+            <a:off x="7274052" y="4169664"/>
             <a:ext cx="685800" cy="475488"/>
           </a:xfrm>
           <a:prstGeom prst="rect">
@@ -33422,73 +33391,7 @@
                 <a:ea typeface="Trebuchet MS" pitchFamily="34" charset="-122"/>
                 <a:cs typeface="Trebuchet MS" pitchFamily="34" charset="-120"/>
               </a:rPr>
-              <a:t>l</a:t>
-            </a:r>
-            <a:endParaRPr lang="en-US" sz="900" dirty="0"/>
-          </a:p>
-        </p:txBody>
-      </p:sp>
-      <p:sp>
-        <p:nvSpPr>
-          <p:cNvPr id="46" name="Shape 44"/>
-          <p:cNvSpPr/>
-          <p:nvPr/>
-        </p:nvSpPr>
-        <p:spPr>
-          <a:xfrm>
-            <a:off x="7447135" y="4169664"/>
-            <a:ext cx="685800" cy="475488"/>
-          </a:xfrm>
-          <a:prstGeom prst="rect">
-            <a:avLst>
-              <a:gd name="adj" fmla="val 7692"/>
-            </a:avLst>
-          </a:prstGeom>
-          <a:solidFill>
-            <a:srgbClr val="FFFFFF"/>
-          </a:solidFill>
-          <a:ln w="12700">
-            <a:solidFill>
-              <a:srgbClr val="DB2777"/>
-            </a:solidFill>
-            <a:prstDash val="solid"/>
-          </a:ln>
-        </p:spPr>
-      </p:sp>
-      <p:sp>
-        <p:nvSpPr>
-          <p:cNvPr id="47" name="Text 45"/>
-          <p:cNvSpPr/>
-          <p:nvPr/>
-        </p:nvSpPr>
-        <p:spPr>
-          <a:xfrm>
-            <a:off x="7447135" y="4169664"/>
-            <a:ext cx="685800" cy="475488"/>
-          </a:xfrm>
-          <a:prstGeom prst="rect">
-            <a:avLst/>
-          </a:prstGeom>
-          <a:noFill/>
-          <a:ln/>
-        </p:spPr>
-        <p:txBody>
-          <a:bodyPr wrap="square" lIns="0" tIns="0" rIns="0" bIns="0" rtlCol="0" anchor="ctr"/>
-          <a:lstStyle/>
-          <a:p>
-            <a:pPr algn="ctr" indent="0" marL="0">
-              <a:buNone/>
-            </a:pPr>
-            <a:r>
-              <a:rPr lang="en-US" sz="900" b="1" dirty="0">
-                <a:solidFill>
-                  <a:srgbClr val="9D174D"/>
-                </a:solidFill>
-                <a:latin typeface="Trebuchet MS" pitchFamily="34" charset="0"/>
-                <a:ea typeface="Trebuchet MS" pitchFamily="34" charset="-122"/>
-                <a:cs typeface="Trebuchet MS" pitchFamily="34" charset="-120"/>
-              </a:rPr>
-              <a:t>y</a:t>
+              <a:t>er</a:t>
             </a:r>
             <a:endParaRPr lang="en-US" sz="900" dirty="0"/>
           </a:p>
@@ -33780,7 +33683,7 @@
                 <a:ea typeface="Calibri" pitchFamily="34" charset="-122"/>
                 <a:cs typeface="Calibri" pitchFamily="34" charset="-120"/>
               </a:rPr>
-              <a:t>Word Labs  •  wordlabs.app  •  Root: 'open' = not closed or blocked</a:t>
+              <a:t>Word Labs  •  wordlabs.app  •  Root: 'open' = not closed, accessible, uncovered</a:t>
             </a:r>
             <a:endParaRPr lang="en-US" sz="800" dirty="0"/>
           </a:p>
@@ -34949,7 +34852,7 @@
                 <a:ea typeface="Calibri" pitchFamily="34" charset="-122"/>
                 <a:cs typeface="Calibri" pitchFamily="34" charset="-120"/>
               </a:rPr>
-              <a:t>Word Labs  •  wordlabs.app  •  Root: 'open' = not closed or blocked</a:t>
+              <a:t>Word Labs  •  wordlabs.app  •  Root: 'open' = not closed, accessible, uncovered</a:t>
             </a:r>
             <a:endParaRPr lang="en-US" sz="800" dirty="0"/>
           </a:p>
@@ -35595,7 +35498,7 @@
                 <a:ea typeface="Trebuchet MS" pitchFamily="34" charset="-122"/>
                 <a:cs typeface="Trebuchet MS" pitchFamily="34" charset="-120"/>
               </a:rPr>
-              <a:t>wide-</a:t>
+              <a:t>pre-</a:t>
             </a:r>
             <a:endParaRPr lang="en-US" sz="1300" dirty="0"/>
           </a:p>
@@ -35684,7 +35587,7 @@
                 <a:ea typeface="Trebuchet MS" pitchFamily="34" charset="-122"/>
                 <a:cs typeface="Trebuchet MS" pitchFamily="34" charset="-120"/>
               </a:rPr>
-              <a:t>-er</a:t>
+              <a:t>-ly</a:t>
             </a:r>
             <a:endParaRPr lang="en-US" sz="1300" dirty="0"/>
           </a:p>
@@ -35748,7 +35651,7 @@
                 <a:ea typeface="Trebuchet MS" pitchFamily="34" charset="-122"/>
                 <a:cs typeface="Trebuchet MS" pitchFamily="34" charset="-120"/>
               </a:rPr>
-              <a:t>half-</a:t>
+              <a:t>wide-</a:t>
             </a:r>
             <a:endParaRPr lang="en-US" sz="1300" dirty="0"/>
           </a:p>
@@ -35837,7 +35740,7 @@
                 <a:ea typeface="Trebuchet MS" pitchFamily="34" charset="-122"/>
                 <a:cs typeface="Trebuchet MS" pitchFamily="34" charset="-120"/>
               </a:rPr>
-              <a:t>-ly</a:t>
+              <a:t>-ness</a:t>
             </a:r>
             <a:endParaRPr lang="en-US" sz="1300" dirty="0"/>
           </a:p>
@@ -35901,7 +35804,7 @@
                 <a:ea typeface="Trebuchet MS" pitchFamily="34" charset="-122"/>
                 <a:cs typeface="Trebuchet MS" pitchFamily="34" charset="-120"/>
               </a:rPr>
-              <a:t>semi-</a:t>
+              <a:t>half-</a:t>
             </a:r>
             <a:endParaRPr lang="en-US" sz="1300" dirty="0"/>
           </a:p>
@@ -35990,7 +35893,7 @@
                 <a:ea typeface="Trebuchet MS" pitchFamily="34" charset="-122"/>
                 <a:cs typeface="Trebuchet MS" pitchFamily="34" charset="-120"/>
               </a:rPr>
-              <a:t>-ness</a:t>
+              <a:t>-er</a:t>
             </a:r>
             <a:endParaRPr lang="en-US" sz="1300" dirty="0"/>
           </a:p>
@@ -36227,7 +36130,7 @@
                 <a:ea typeface="Trebuchet MS" pitchFamily="34" charset="-122"/>
                 <a:cs typeface="Trebuchet MS" pitchFamily="34" charset="-120"/>
               </a:rPr>
-              <a:t>opener</a:t>
+              <a:t>openly</a:t>
             </a:r>
             <a:endParaRPr lang="en-US" sz="1200" dirty="0"/>
           </a:p>
@@ -36293,7 +36196,7 @@
                 <a:ea typeface="Trebuchet MS" pitchFamily="34" charset="-122"/>
                 <a:cs typeface="Trebuchet MS" pitchFamily="34" charset="-120"/>
               </a:rPr>
-              <a:t>openly</a:t>
+              <a:t>openness</a:t>
             </a:r>
             <a:endParaRPr lang="en-US" sz="1200" dirty="0"/>
           </a:p>
@@ -36359,7 +36262,7 @@
                 <a:ea typeface="Trebuchet MS" pitchFamily="34" charset="-122"/>
                 <a:cs typeface="Trebuchet MS" pitchFamily="34" charset="-120"/>
               </a:rPr>
-              <a:t>openness</a:t>
+              <a:t>reopened</a:t>
             </a:r>
             <a:endParaRPr lang="en-US" sz="1200" dirty="0"/>
           </a:p>
@@ -36425,7 +36328,7 @@
                 <a:ea typeface="Trebuchet MS" pitchFamily="34" charset="-122"/>
                 <a:cs typeface="Trebuchet MS" pitchFamily="34" charset="-120"/>
               </a:rPr>
-              <a:t>reopened</a:t>
+              <a:t>reopening</a:t>
             </a:r>
             <a:endParaRPr lang="en-US" sz="1200" dirty="0"/>
           </a:p>
@@ -36491,7 +36394,7 @@
                 <a:ea typeface="Trebuchet MS" pitchFamily="34" charset="-122"/>
                 <a:cs typeface="Trebuchet MS" pitchFamily="34" charset="-120"/>
               </a:rPr>
-              <a:t>reopening</a:t>
+              <a:t>wide-open</a:t>
             </a:r>
             <a:endParaRPr lang="en-US" sz="1200" dirty="0"/>
           </a:p>
@@ -36557,7 +36460,7 @@
                 <a:ea typeface="Trebuchet MS" pitchFamily="34" charset="-122"/>
                 <a:cs typeface="Trebuchet MS" pitchFamily="34" charset="-120"/>
               </a:rPr>
-              <a:t>wide-open</a:t>
+              <a:t>opener</a:t>
             </a:r>
             <a:endParaRPr lang="en-US" sz="1200" dirty="0"/>
           </a:p>
@@ -36849,7 +36752,7 @@
                 <a:ea typeface="Calibri" pitchFamily="34" charset="-122"/>
                 <a:cs typeface="Calibri" pitchFamily="34" charset="-120"/>
               </a:rPr>
-              <a:t>Word Labs  •  wordlabs.app  •  Root: 'open' = not closed or blocked</a:t>
+              <a:t>Word Labs  •  wordlabs.app  •  Root: 'open' = not closed, accessible, uncovered</a:t>
             </a:r>
             <a:endParaRPr lang="en-US" sz="800" dirty="0"/>
           </a:p>
@@ -37013,7 +36916,7 @@
                 <a:ea typeface="Calibri" pitchFamily="34" charset="-122"/>
                 <a:cs typeface="Calibri" pitchFamily="34" charset="-120"/>
               </a:rPr>
-              <a:t>The core part of a word carrying its basic meaning. For example, 'open' means 'not closed or blocked'.</a:t>
+              <a:t>The core part of a word carrying its basic meaning. For example, 'open' means 'not closed, accessible, uncovered'.</a:t>
             </a:r>
             <a:endParaRPr lang="en-US" sz="1350" dirty="0"/>
           </a:p>
@@ -37633,7 +37536,7 @@
                 <a:ea typeface="Calibri" pitchFamily="34" charset="-122"/>
                 <a:cs typeface="Calibri" pitchFamily="34" charset="-120"/>
               </a:rPr>
-              <a:t>Word Labs  •  wordlabs.app  •  Root: 'open' = not closed or blocked</a:t>
+              <a:t>Word Labs  •  wordlabs.app  •  Root: 'open' = not closed, accessible, uncovered</a:t>
             </a:r>
             <a:endParaRPr lang="en-US" sz="800" dirty="0"/>
           </a:p>
@@ -37745,7 +37648,7 @@
                 <a:ea typeface="Calibri" pitchFamily="34" charset="-122"/>
                 <a:cs typeface="Calibri" pitchFamily="34" charset="-120"/>
               </a:rPr>
-              <a:t>1.  The word 'openly' contains the root 'open' plus the suffix '-ly'.</a:t>
+              <a:t>1.  An 'opener' is someone or something that opens things.</a:t>
             </a:r>
             <a:endParaRPr lang="en-US" sz="1300" dirty="0"/>
           </a:p>
@@ -37884,7 +37787,7 @@
                 <a:ea typeface="Calibri" pitchFamily="34" charset="-122"/>
                 <a:cs typeface="Calibri" pitchFamily="34" charset="-120"/>
               </a:rPr>
-              <a:t>2.  The prefix 're-' in 'reopened' means 'not'.</a:t>
+              <a:t>2.  Adding the prefix 're-' to 'open' makes the word 'reopen', meaning to open again.</a:t>
             </a:r>
             <a:endParaRPr lang="en-US" sz="1300" dirty="0"/>
           </a:p>
@@ -37907,11 +37810,11 @@
             </a:avLst>
           </a:prstGeom>
           <a:solidFill>
-            <a:srgbClr val="FEE2E2"/>
-          </a:solidFill>
-          <a:ln w="12700">
-            <a:solidFill>
-              <a:srgbClr val="DC2626"/>
+            <a:srgbClr val="DCFCE7"/>
+          </a:solidFill>
+          <a:ln w="12700">
+            <a:solidFill>
+              <a:srgbClr val="16A34A"/>
             </a:solidFill>
             <a:prstDash val="solid"/>
           </a:ln>
@@ -37944,13 +37847,13 @@
             <a:r>
               <a:rPr lang="en-US" sz="1100" b="1" dirty="0">
                 <a:solidFill>
-                  <a:srgbClr val="DC2626"/>
+                  <a:srgbClr val="16A34A"/>
                 </a:solidFill>
                 <a:latin typeface="Trebuchet MS" pitchFamily="34" charset="0"/>
                 <a:ea typeface="Trebuchet MS" pitchFamily="34" charset="-122"/>
                 <a:cs typeface="Trebuchet MS" pitchFamily="34" charset="-120"/>
               </a:rPr>
-              <a:t>FALSE</a:t>
+              <a:t>TRUE</a:t>
             </a:r>
             <a:endParaRPr lang="en-US" sz="1100" dirty="0"/>
           </a:p>
@@ -38023,7 +37926,7 @@
                 <a:ea typeface="Calibri" pitchFamily="34" charset="-122"/>
                 <a:cs typeface="Calibri" pitchFamily="34" charset="-120"/>
               </a:rPr>
-              <a:t>3.  An 'opener' is a person or tool that opens something.</a:t>
+              <a:t>3.  The root 'open' comes from the ancient Greek language.</a:t>
             </a:r>
             <a:endParaRPr lang="en-US" sz="1300" dirty="0"/>
           </a:p>
@@ -38046,11 +37949,11 @@
             </a:avLst>
           </a:prstGeom>
           <a:solidFill>
-            <a:srgbClr val="DCFCE7"/>
-          </a:solidFill>
-          <a:ln w="12700">
-            <a:solidFill>
-              <a:srgbClr val="16A34A"/>
+            <a:srgbClr val="FEE2E2"/>
+          </a:solidFill>
+          <a:ln w="12700">
+            <a:solidFill>
+              <a:srgbClr val="DC2626"/>
             </a:solidFill>
             <a:prstDash val="solid"/>
           </a:ln>
@@ -38083,13 +37986,13 @@
             <a:r>
               <a:rPr lang="en-US" sz="1100" b="1" dirty="0">
                 <a:solidFill>
-                  <a:srgbClr val="16A34A"/>
+                  <a:srgbClr val="DC2626"/>
                 </a:solidFill>
                 <a:latin typeface="Trebuchet MS" pitchFamily="34" charset="0"/>
                 <a:ea typeface="Trebuchet MS" pitchFamily="34" charset="-122"/>
                 <a:cs typeface="Trebuchet MS" pitchFamily="34" charset="-120"/>
               </a:rPr>
-              <a:t>TRUE</a:t>
+              <a:t>FALSE</a:t>
             </a:r>
             <a:endParaRPr lang="en-US" sz="1100" dirty="0"/>
           </a:p>
@@ -38162,7 +38065,7 @@
                 <a:ea typeface="Calibri" pitchFamily="34" charset="-122"/>
                 <a:cs typeface="Calibri" pitchFamily="34" charset="-120"/>
               </a:rPr>
-              <a:t>4.  The word 'openness' contains a suffix that turns it into a noun meaning a state or quality.</a:t>
+              <a:t>4.  The word 'openly' contains the root 'open' plus the suffix '-ly'.</a:t>
             </a:r>
             <a:endParaRPr lang="en-US" sz="1300" dirty="0"/>
           </a:p>
@@ -38301,7 +38204,7 @@
                 <a:ea typeface="Calibri" pitchFamily="34" charset="-122"/>
                 <a:cs typeface="Calibri" pitchFamily="34" charset="-120"/>
               </a:rPr>
-              <a:t>5.  The root 'open' comes from a Greek word meaning 'to see'.</a:t>
+              <a:t>5.  The word 'openness' has two suffixes added to the root 'open'.</a:t>
             </a:r>
             <a:endParaRPr lang="en-US" sz="1300" dirty="0"/>
           </a:p>
@@ -38659,7 +38562,7 @@
                 <a:ea typeface="Calibri" pitchFamily="34" charset="-122"/>
                 <a:cs typeface="Calibri" pitchFamily="34" charset="-120"/>
               </a:rPr>
-              <a:t>Word Labs  •  wordlabs.app  •  Root: 'open' = not closed or blocked</a:t>
+              <a:t>Word Labs  •  wordlabs.app  •  Root: 'open' = not closed, accessible, uncovered</a:t>
             </a:r>
             <a:endParaRPr lang="en-US" sz="800" dirty="0"/>
           </a:p>
@@ -38796,7 +38699,7 @@
                 <a:ea typeface="Trebuchet MS" pitchFamily="34" charset="-122"/>
                 <a:cs typeface="Trebuchet MS" pitchFamily="34" charset="-120"/>
               </a:rPr>
-              <a:t>not closed or blocked</a:t>
+              <a:t>not closed, accessible, uncovered</a:t>
             </a:r>
             <a:endParaRPr lang="en-US" sz="2000" dirty="0"/>
           </a:p>
@@ -39072,7 +38975,7 @@
                 <a:ea typeface="Trebuchet MS" pitchFamily="34" charset="-122"/>
                 <a:cs typeface="Trebuchet MS" pitchFamily="34" charset="-120"/>
               </a:rPr>
-              <a:t>opener</a:t>
+              <a:t>openly</a:t>
             </a:r>
             <a:endParaRPr lang="en-US" sz="1300" dirty="0"/>
           </a:p>
@@ -39138,7 +39041,7 @@
                 <a:ea typeface="Trebuchet MS" pitchFamily="34" charset="-122"/>
                 <a:cs typeface="Trebuchet MS" pitchFamily="34" charset="-120"/>
               </a:rPr>
-              <a:t>openly</a:t>
+              <a:t>openness</a:t>
             </a:r>
             <a:endParaRPr lang="en-US" sz="1300" dirty="0"/>
           </a:p>
@@ -39204,7 +39107,7 @@
                 <a:ea typeface="Trebuchet MS" pitchFamily="34" charset="-122"/>
                 <a:cs typeface="Trebuchet MS" pitchFamily="34" charset="-120"/>
               </a:rPr>
-              <a:t>openness</a:t>
+              <a:t>reopened</a:t>
             </a:r>
             <a:endParaRPr lang="en-US" sz="1300" dirty="0"/>
           </a:p>
@@ -39270,7 +39173,7 @@
                 <a:ea typeface="Trebuchet MS" pitchFamily="34" charset="-122"/>
                 <a:cs typeface="Trebuchet MS" pitchFamily="34" charset="-120"/>
               </a:rPr>
-              <a:t>reopened</a:t>
+              <a:t>reopening</a:t>
             </a:r>
             <a:endParaRPr lang="en-US" sz="1300" dirty="0"/>
           </a:p>
@@ -39336,7 +39239,7 @@
                 <a:ea typeface="Trebuchet MS" pitchFamily="34" charset="-122"/>
                 <a:cs typeface="Trebuchet MS" pitchFamily="34" charset="-120"/>
               </a:rPr>
-              <a:t>reopening</a:t>
+              <a:t>wide-open</a:t>
             </a:r>
             <a:endParaRPr lang="en-US" sz="1300" dirty="0"/>
           </a:p>
@@ -39628,7 +39531,7 @@
                 <a:ea typeface="Calibri" pitchFamily="34" charset="-122"/>
                 <a:cs typeface="Calibri" pitchFamily="34" charset="-120"/>
               </a:rPr>
-              <a:t>Word Labs  •  wordlabs.app  •  Root: 'open' = not closed or blocked</a:t>
+              <a:t>Word Labs  •  wordlabs.app  •  Root: 'open' = not closed, accessible, uncovered</a:t>
             </a:r>
             <a:endParaRPr lang="en-US" sz="800" dirty="0"/>
           </a:p>
@@ -40274,7 +40177,7 @@
                 <a:ea typeface="Trebuchet MS" pitchFamily="34" charset="-122"/>
                 <a:cs typeface="Trebuchet MS" pitchFamily="34" charset="-120"/>
               </a:rPr>
-              <a:t>wide-</a:t>
+              <a:t>pre-</a:t>
             </a:r>
             <a:endParaRPr lang="en-US" sz="1300" dirty="0"/>
           </a:p>
@@ -40363,7 +40266,7 @@
                 <a:ea typeface="Trebuchet MS" pitchFamily="34" charset="-122"/>
                 <a:cs typeface="Trebuchet MS" pitchFamily="34" charset="-120"/>
               </a:rPr>
-              <a:t>-er</a:t>
+              <a:t>-ly</a:t>
             </a:r>
             <a:endParaRPr lang="en-US" sz="1300" dirty="0"/>
           </a:p>
@@ -40427,7 +40330,7 @@
                 <a:ea typeface="Trebuchet MS" pitchFamily="34" charset="-122"/>
                 <a:cs typeface="Trebuchet MS" pitchFamily="34" charset="-120"/>
               </a:rPr>
-              <a:t>half-</a:t>
+              <a:t>wide-</a:t>
             </a:r>
             <a:endParaRPr lang="en-US" sz="1300" dirty="0"/>
           </a:p>
@@ -40516,7 +40419,7 @@
                 <a:ea typeface="Trebuchet MS" pitchFamily="34" charset="-122"/>
                 <a:cs typeface="Trebuchet MS" pitchFamily="34" charset="-120"/>
               </a:rPr>
-              <a:t>-ly</a:t>
+              <a:t>-ness</a:t>
             </a:r>
             <a:endParaRPr lang="en-US" sz="1300" dirty="0"/>
           </a:p>
@@ -40580,7 +40483,7 @@
                 <a:ea typeface="Trebuchet MS" pitchFamily="34" charset="-122"/>
                 <a:cs typeface="Trebuchet MS" pitchFamily="34" charset="-120"/>
               </a:rPr>
-              <a:t>semi-</a:t>
+              <a:t>half-</a:t>
             </a:r>
             <a:endParaRPr lang="en-US" sz="1300" dirty="0"/>
           </a:p>
@@ -40669,7 +40572,7 @@
                 <a:ea typeface="Trebuchet MS" pitchFamily="34" charset="-122"/>
                 <a:cs typeface="Trebuchet MS" pitchFamily="34" charset="-120"/>
               </a:rPr>
-              <a:t>-ness</a:t>
+              <a:t>-er</a:t>
             </a:r>
             <a:endParaRPr lang="en-US" sz="1300" dirty="0"/>
           </a:p>
@@ -41402,7 +41305,7 @@
                 <a:ea typeface="Calibri" pitchFamily="34" charset="-122"/>
                 <a:cs typeface="Calibri" pitchFamily="34" charset="-120"/>
               </a:rPr>
-              <a:t>Word Labs  •  wordlabs.app  •  Root: 'open' = not closed or blocked</a:t>
+              <a:t>Word Labs  •  wordlabs.app  •  Root: 'open' = not closed, accessible, uncovered</a:t>
             </a:r>
             <a:endParaRPr lang="en-US" sz="800" dirty="0"/>
           </a:p>
@@ -41580,7 +41483,7 @@
                 <a:ea typeface="Calibri" pitchFamily="34" charset="-122"/>
                 <a:cs typeface="Calibri" pitchFamily="34" charset="-120"/>
               </a:rPr>
-              <a:t>The act of opening something again after it has been shut or closed down.</a:t>
+              <a:t>Something that is completely open with no barriers or limits at all.</a:t>
             </a:r>
             <a:endParaRPr lang="en-US" sz="1200" dirty="0"/>
           </a:p>
@@ -41719,7 +41622,7 @@
                 <a:ea typeface="Calibri" pitchFamily="34" charset="-122"/>
                 <a:cs typeface="Calibri" pitchFamily="34" charset="-120"/>
               </a:rPr>
-              <a:t>Doing something in a way that is honest and not hidden from others.</a:t>
+              <a:t>The quality of being honest and willing to share your thoughts with others.</a:t>
             </a:r>
             <a:endParaRPr lang="en-US" sz="1200" dirty="0"/>
           </a:p>
@@ -41792,7 +41695,7 @@
                 <a:ea typeface="Trebuchet MS" pitchFamily="34" charset="-122"/>
                 <a:cs typeface="Trebuchet MS" pitchFamily="34" charset="-120"/>
               </a:rPr>
-              <a:t>opener</a:t>
+              <a:t>openly</a:t>
             </a:r>
             <a:endParaRPr lang="en-US" sz="1200" dirty="0"/>
           </a:p>
@@ -41858,7 +41761,7 @@
                 <a:ea typeface="Calibri" pitchFamily="34" charset="-122"/>
                 <a:cs typeface="Calibri" pitchFamily="34" charset="-120"/>
               </a:rPr>
-              <a:t>Opened again after being closed for a period of time.</a:t>
+              <a:t>The act of opening something again after it had been shut or closed down.</a:t>
             </a:r>
             <a:endParaRPr lang="en-US" sz="1200" dirty="0"/>
           </a:p>
@@ -41931,7 +41834,7 @@
                 <a:ea typeface="Trebuchet MS" pitchFamily="34" charset="-122"/>
                 <a:cs typeface="Trebuchet MS" pitchFamily="34" charset="-120"/>
               </a:rPr>
-              <a:t>openly</a:t>
+              <a:t>openness</a:t>
             </a:r>
             <a:endParaRPr lang="en-US" sz="1200" dirty="0"/>
           </a:p>
@@ -41997,7 +41900,7 @@
                 <a:ea typeface="Calibri" pitchFamily="34" charset="-122"/>
                 <a:cs typeface="Calibri" pitchFamily="34" charset="-120"/>
               </a:rPr>
-              <a:t>Having been made no longer closed, like a door or box that was shut.</a:t>
+              <a:t>When something has been moved so it is no longer shut, like a door or a box.</a:t>
             </a:r>
             <a:endParaRPr lang="en-US" sz="1200" dirty="0"/>
           </a:p>
@@ -42070,7 +41973,7 @@
                 <a:ea typeface="Trebuchet MS" pitchFamily="34" charset="-122"/>
                 <a:cs typeface="Trebuchet MS" pitchFamily="34" charset="-120"/>
               </a:rPr>
-              <a:t>openness</a:t>
+              <a:t>reopened</a:t>
             </a:r>
             <a:endParaRPr lang="en-US" sz="1200" dirty="0"/>
           </a:p>
@@ -42136,7 +42039,7 @@
                 <a:ea typeface="Calibri" pitchFamily="34" charset="-122"/>
                 <a:cs typeface="Calibri" pitchFamily="34" charset="-120"/>
               </a:rPr>
-              <a:t>The quality of being honest and willing to share your thoughts with others.</a:t>
+              <a:t>When a place or thing that was closed has been opened again.</a:t>
             </a:r>
             <a:endParaRPr lang="en-US" sz="1200" dirty="0"/>
           </a:p>
@@ -42209,7 +42112,7 @@
                 <a:ea typeface="Trebuchet MS" pitchFamily="34" charset="-122"/>
                 <a:cs typeface="Trebuchet MS" pitchFamily="34" charset="-120"/>
               </a:rPr>
-              <a:t>reopened</a:t>
+              <a:t>reopening</a:t>
             </a:r>
             <a:endParaRPr lang="en-US" sz="1200" dirty="0"/>
           </a:p>
@@ -42275,7 +42178,7 @@
                 <a:ea typeface="Calibri" pitchFamily="34" charset="-122"/>
                 <a:cs typeface="Calibri" pitchFamily="34" charset="-120"/>
               </a:rPr>
-              <a:t>A tool or person that opens something, like a can opener in the kitchen.</a:t>
+              <a:t>Doing something in a way that is honest and not hidden from others.</a:t>
             </a:r>
             <a:endParaRPr lang="en-US" sz="1200" dirty="0"/>
           </a:p>
@@ -42348,7 +42251,7 @@
                 <a:ea typeface="Trebuchet MS" pitchFamily="34" charset="-122"/>
                 <a:cs typeface="Trebuchet MS" pitchFamily="34" charset="-120"/>
               </a:rPr>
-              <a:t>reopening</a:t>
+              <a:t>wide-open</a:t>
             </a:r>
             <a:endParaRPr lang="en-US" sz="1200" dirty="0"/>
           </a:p>
@@ -42414,7 +42317,7 @@
                 <a:ea typeface="Calibri" pitchFamily="34" charset="-122"/>
                 <a:cs typeface="Calibri" pitchFamily="34" charset="-120"/>
               </a:rPr>
-              <a:t>A gap or space that you can pass through, or the act of making something not closed.</a:t>
+              <a:t>A gap or hole that you can pass through, or the beginning of something like a show or ceremony.</a:t>
             </a:r>
             <a:endParaRPr lang="en-US" sz="1200" dirty="0"/>
           </a:p>
@@ -42706,7 +42609,7 @@
                 <a:ea typeface="Calibri" pitchFamily="34" charset="-122"/>
                 <a:cs typeface="Calibri" pitchFamily="34" charset="-120"/>
               </a:rPr>
-              <a:t>Word Labs  •  wordlabs.app  •  Root: 'open' = not closed or blocked</a:t>
+              <a:t>Word Labs  •  wordlabs.app  •  Root: 'open' = not closed, accessible, uncovered</a:t>
             </a:r>
             <a:endParaRPr lang="en-US" sz="800" dirty="0"/>
           </a:p>
@@ -42909,7 +42812,7 @@
                 <a:ea typeface="Calibri" pitchFamily="34" charset="-122"/>
                 <a:cs typeface="Calibri" pitchFamily="34" charset="-120"/>
               </a:rPr>
-              <a:t>She spoke openly about her feelings during the class discussion, which made everyone feel comfortable sharing too.</a:t>
+              <a:t>The teacher asked the students to openly share their ideas during the class discussion.</a:t>
             </a:r>
             <a:endParaRPr lang="en-US" sz="1500" dirty="0"/>
           </a:p>
@@ -43073,7 +42976,7 @@
                 <a:ea typeface="Calibri" pitchFamily="34" charset="-122"/>
                 <a:cs typeface="Calibri" pitchFamily="34" charset="-120"/>
               </a:rPr>
-              <a:t>The grand reopening of the local library was celebrated with free books and activities for families.</a:t>
+              <a:t>After the holidays, the reopening of the library was celebrated by the whole community.</a:t>
             </a:r>
             <a:endParaRPr lang="en-US" sz="1500" dirty="0"/>
           </a:p>
@@ -43237,7 +43140,7 @@
                 <a:ea typeface="Calibri" pitchFamily="34" charset="-122"/>
                 <a:cs typeface="Calibri" pitchFamily="34" charset="-120"/>
               </a:rPr>
-              <a:t>The opening in the fence was just wide enough for the small dog to squeeze through into the garden.</a:t>
+              <a:t>She used a tin opener to carefully open the can of soup for her lunch.</a:t>
             </a:r>
             <a:endParaRPr lang="en-US" sz="1500" dirty="0"/>
           </a:p>
